--- a/Goldfields-BastionGroup-Executive-Deck.pptx
+++ b/Goldfields-BastionGroup-Executive-Deck.pptx
@@ -3142,7 +3142,7 @@
         <p:spPr>
           <a:xfrm>
             <a:off x="2926080" y="777240"/>
-            <a:ext cx="18288" cy="502920"/>
+            <a:ext cx="13716" cy="502920"/>
           </a:xfrm>
           <a:prstGeom prst="rect">
             <a:avLst/>
@@ -3212,7 +3212,9 @@
             <a:ext cx="4389120" cy="347472"/>
           </a:xfrm>
           <a:prstGeom prst="roundRect">
-            <a:avLst/>
+            <a:avLst>
+              <a:gd name="adj" fmla="val 31578"/>
+            </a:avLst>
           </a:prstGeom>
           <a:solidFill>
             <a:srgbClr val="0B3052"/>
@@ -3312,7 +3314,7 @@
               </a:spcBef>
               <a:defRPr sz="1200">
                 <a:solidFill>
-                  <a:srgbClr val="A5B9CD"/>
+                  <a:srgbClr val="AABED2"/>
                 </a:solidFill>
                 <a:latin typeface="Arial"/>
               </a:defRPr>
@@ -3331,11 +3333,13 @@
         </p:nvSpPr>
         <p:spPr>
           <a:xfrm>
-            <a:off x="731520" y="4069080"/>
-            <a:ext cx="10728655" cy="1691640"/>
+            <a:off x="731520" y="4160520"/>
+            <a:ext cx="10728655" cy="1645920"/>
           </a:xfrm>
           <a:prstGeom prst="roundRect">
-            <a:avLst/>
+            <a:avLst>
+              <a:gd name="adj" fmla="val 8333"/>
+            </a:avLst>
           </a:prstGeom>
           <a:solidFill>
             <a:srgbClr val="0B3052"/>
@@ -3376,8 +3380,8 @@
         </p:nvSpPr>
         <p:spPr>
           <a:xfrm>
-            <a:off x="1005840" y="4206240"/>
-            <a:ext cx="10180015" cy="1417320"/>
+            <a:off x="1005840" y="4297680"/>
+            <a:ext cx="10180015" cy="1371600"/>
           </a:xfrm>
           <a:prstGeom prst="rect">
             <a:avLst/>
@@ -3412,8 +3416,8 @@
         </p:nvSpPr>
         <p:spPr>
           <a:xfrm>
-            <a:off x="1005840" y="4572000"/>
-            <a:ext cx="2286000" cy="1005840"/>
+            <a:off x="1005840" y="4663440"/>
+            <a:ext cx="2286000" cy="960120"/>
           </a:xfrm>
           <a:prstGeom prst="rect">
             <a:avLst/>
@@ -3429,7 +3433,7 @@
             <a:pPr>
               <a:defRPr sz="850" b="1">
                 <a:solidFill>
-                  <a:srgbClr val="A5B9CD"/>
+                  <a:srgbClr val="AABED2"/>
                 </a:solidFill>
                 <a:latin typeface="Arial"/>
               </a:defRPr>
@@ -3480,8 +3484,8 @@
         </p:nvSpPr>
         <p:spPr>
           <a:xfrm>
-            <a:off x="3474720" y="4572000"/>
-            <a:ext cx="2286000" cy="1005840"/>
+            <a:off x="3474720" y="4663440"/>
+            <a:ext cx="2286000" cy="960120"/>
           </a:xfrm>
           <a:prstGeom prst="rect">
             <a:avLst/>
@@ -3497,7 +3501,7 @@
             <a:pPr>
               <a:defRPr sz="850" b="1">
                 <a:solidFill>
-                  <a:srgbClr val="A5B9CD"/>
+                  <a:srgbClr val="AABED2"/>
                 </a:solidFill>
                 <a:latin typeface="Arial"/>
               </a:defRPr>
@@ -3548,8 +3552,8 @@
         </p:nvSpPr>
         <p:spPr>
           <a:xfrm>
-            <a:off x="5943600" y="4572000"/>
-            <a:ext cx="2286000" cy="1005840"/>
+            <a:off x="5943600" y="4663440"/>
+            <a:ext cx="2286000" cy="960120"/>
           </a:xfrm>
           <a:prstGeom prst="rect">
             <a:avLst/>
@@ -3565,7 +3569,7 @@
             <a:pPr>
               <a:defRPr sz="850" b="1">
                 <a:solidFill>
-                  <a:srgbClr val="A5B9CD"/>
+                  <a:srgbClr val="AABED2"/>
                 </a:solidFill>
                 <a:latin typeface="Arial"/>
               </a:defRPr>
@@ -3616,8 +3620,8 @@
         </p:nvSpPr>
         <p:spPr>
           <a:xfrm>
-            <a:off x="8412480" y="4572000"/>
-            <a:ext cx="2286000" cy="1005840"/>
+            <a:off x="8412480" y="4663440"/>
+            <a:ext cx="2286000" cy="960120"/>
           </a:xfrm>
           <a:prstGeom prst="rect">
             <a:avLst/>
@@ -3633,7 +3637,7 @@
             <a:pPr>
               <a:defRPr sz="850" b="1">
                 <a:solidFill>
-                  <a:srgbClr val="A5B9CD"/>
+                  <a:srgbClr val="AABED2"/>
                 </a:solidFill>
                 <a:latin typeface="Arial"/>
               </a:defRPr>
@@ -3701,7 +3705,7 @@
             <a:pPr>
               <a:defRPr sz="850" b="1">
                 <a:solidFill>
-                  <a:srgbClr val="A5B9CD"/>
+                  <a:srgbClr val="AABED2"/>
                 </a:solidFill>
                 <a:latin typeface="Arial"/>
               </a:defRPr>
@@ -3754,8 +3758,8 @@
         </p:blipFill>
         <p:spPr>
           <a:xfrm>
-            <a:off x="731520" y="365760"/>
-            <a:ext cx="1056315" cy="347472"/>
+            <a:off x="731520" y="320040"/>
+            <a:ext cx="889528" cy="292608"/>
           </a:xfrm>
           <a:prstGeom prst="rect">
             <a:avLst/>
@@ -3770,8 +3774,8 @@
         </p:nvSpPr>
         <p:spPr>
           <a:xfrm>
-            <a:off x="2011680" y="365760"/>
-            <a:ext cx="18288" cy="347472"/>
+            <a:off x="1920240" y="320040"/>
+            <a:ext cx="13716" cy="292608"/>
           </a:xfrm>
           <a:prstGeom prst="rect">
             <a:avLst/>
@@ -3813,8 +3817,8 @@
         </p:nvSpPr>
         <p:spPr>
           <a:xfrm>
-            <a:off x="2148840" y="365760"/>
-            <a:ext cx="4114800" cy="347472"/>
+            <a:off x="2057400" y="320040"/>
+            <a:ext cx="4114800" cy="292608"/>
           </a:xfrm>
           <a:prstGeom prst="rect">
             <a:avLst/>
@@ -3830,7 +3834,7 @@
             <a:pPr>
               <a:defRPr sz="850" b="1">
                 <a:solidFill>
-                  <a:srgbClr val="A5B9CD"/>
+                  <a:srgbClr val="AABED2"/>
                 </a:solidFill>
                 <a:latin typeface="Arial"/>
               </a:defRPr>
@@ -3849,11 +3853,13 @@
         </p:nvSpPr>
         <p:spPr>
           <a:xfrm>
-            <a:off x="8961120" y="329184"/>
-            <a:ext cx="2499055" cy="384048"/>
+            <a:off x="8961120" y="292608"/>
+            <a:ext cx="2499055" cy="329184"/>
           </a:xfrm>
           <a:prstGeom prst="roundRect">
-            <a:avLst/>
+            <a:avLst>
+              <a:gd name="adj" fmla="val 33333"/>
+            </a:avLst>
           </a:prstGeom>
           <a:solidFill>
             <a:srgbClr val="0B3052"/>
@@ -3879,7 +3885,7 @@
           </a:fontRef>
         </p:style>
         <p:txBody>
-          <a:bodyPr rtlCol="0" anchor="ctr" wrap="square" tIns="54864"/>
+          <a:bodyPr rtlCol="0" anchor="ctr" wrap="square" tIns="36576"/>
           <a:lstStyle/>
           <a:p>
             <a:pPr algn="ctr">
@@ -3904,8 +3910,8 @@
         </p:nvSpPr>
         <p:spPr>
           <a:xfrm>
-            <a:off x="731520" y="868680"/>
-            <a:ext cx="10728655" cy="594360"/>
+            <a:off x="731520" y="749808"/>
+            <a:ext cx="10728655" cy="438912"/>
           </a:xfrm>
           <a:prstGeom prst="rect">
             <a:avLst/>
@@ -3919,7 +3925,7 @@
           <a:lstStyle/>
           <a:p>
             <a:pPr>
-              <a:defRPr sz="2200" b="1">
+              <a:defRPr sz="2000" b="1">
                 <a:solidFill>
                   <a:srgbClr val="FFFFFF"/>
                 </a:solidFill>
@@ -3940,11 +3946,13 @@
         </p:nvSpPr>
         <p:spPr>
           <a:xfrm>
-            <a:off x="731520" y="1508760"/>
-            <a:ext cx="5120640" cy="4709160"/>
+            <a:off x="731520" y="1371600"/>
+            <a:ext cx="5257800" cy="4572000"/>
           </a:xfrm>
           <a:prstGeom prst="roundRect">
-            <a:avLst/>
+            <a:avLst>
+              <a:gd name="adj" fmla="val 3000"/>
+            </a:avLst>
           </a:prstGeom>
           <a:solidFill>
             <a:srgbClr val="0B3052"/>
@@ -3977,9 +3985,219 @@
           </a:p>
         </p:txBody>
       </p:sp>
+      <p:sp>
+        <p:nvSpPr>
+          <p:cNvPr id="8" name="Rectangle 7"/>
+          <p:cNvSpPr/>
+          <p:nvPr/>
+        </p:nvSpPr>
+        <p:spPr>
+          <a:xfrm>
+            <a:off x="896112" y="1536192"/>
+            <a:ext cx="4928616" cy="219456"/>
+          </a:xfrm>
+          <a:prstGeom prst="rect">
+            <a:avLst/>
+          </a:prstGeom>
+          <a:solidFill>
+            <a:srgbClr val="103A62"/>
+          </a:solidFill>
+          <a:ln w="9525">
+            <a:solidFill>
+              <a:srgbClr val="1A4B75"/>
+            </a:solidFill>
+          </a:ln>
+        </p:spPr>
+        <p:style>
+          <a:lnRef idx="1">
+            <a:schemeClr val="accent1"/>
+          </a:lnRef>
+          <a:fillRef idx="3">
+            <a:schemeClr val="accent1"/>
+          </a:fillRef>
+          <a:effectRef idx="2">
+            <a:schemeClr val="accent1"/>
+          </a:effectRef>
+          <a:fontRef idx="minor">
+            <a:schemeClr val="lt1"/>
+          </a:fontRef>
+        </p:style>
+        <p:txBody>
+          <a:bodyPr rtlCol="0" anchor="ctr"/>
+          <a:lstStyle/>
+          <a:p>
+            <a:pPr algn="ctr"/>
+          </a:p>
+        </p:txBody>
+      </p:sp>
+      <p:sp>
+        <p:nvSpPr>
+          <p:cNvPr id="9" name="Oval 8"/>
+          <p:cNvSpPr/>
+          <p:nvPr/>
+        </p:nvSpPr>
+        <p:spPr>
+          <a:xfrm>
+            <a:off x="987552" y="1609344"/>
+            <a:ext cx="73152" cy="73152"/>
+          </a:xfrm>
+          <a:prstGeom prst="ellipse">
+            <a:avLst/>
+          </a:prstGeom>
+          <a:solidFill>
+            <a:srgbClr val="EB5A50"/>
+          </a:solidFill>
+          <a:ln>
+            <a:noFill/>
+          </a:ln>
+        </p:spPr>
+        <p:style>
+          <a:lnRef idx="1">
+            <a:schemeClr val="accent1"/>
+          </a:lnRef>
+          <a:fillRef idx="3">
+            <a:schemeClr val="accent1"/>
+          </a:fillRef>
+          <a:effectRef idx="2">
+            <a:schemeClr val="accent1"/>
+          </a:effectRef>
+          <a:fontRef idx="minor">
+            <a:schemeClr val="lt1"/>
+          </a:fontRef>
+        </p:style>
+        <p:txBody>
+          <a:bodyPr rtlCol="0" anchor="ctr"/>
+          <a:lstStyle/>
+          <a:p>
+            <a:pPr algn="ctr"/>
+          </a:p>
+        </p:txBody>
+      </p:sp>
+      <p:sp>
+        <p:nvSpPr>
+          <p:cNvPr id="10" name="Oval 9"/>
+          <p:cNvSpPr/>
+          <p:nvPr/>
+        </p:nvSpPr>
+        <p:spPr>
+          <a:xfrm>
+            <a:off x="1115568" y="1609344"/>
+            <a:ext cx="73152" cy="73152"/>
+          </a:xfrm>
+          <a:prstGeom prst="ellipse">
+            <a:avLst/>
+          </a:prstGeom>
+          <a:solidFill>
+            <a:srgbClr val="F5B94B"/>
+          </a:solidFill>
+          <a:ln>
+            <a:noFill/>
+          </a:ln>
+        </p:spPr>
+        <p:style>
+          <a:lnRef idx="1">
+            <a:schemeClr val="accent1"/>
+          </a:lnRef>
+          <a:fillRef idx="3">
+            <a:schemeClr val="accent1"/>
+          </a:fillRef>
+          <a:effectRef idx="2">
+            <a:schemeClr val="accent1"/>
+          </a:effectRef>
+          <a:fontRef idx="minor">
+            <a:schemeClr val="lt1"/>
+          </a:fontRef>
+        </p:style>
+        <p:txBody>
+          <a:bodyPr rtlCol="0" anchor="ctr"/>
+          <a:lstStyle/>
+          <a:p>
+            <a:pPr algn="ctr"/>
+          </a:p>
+        </p:txBody>
+      </p:sp>
+      <p:sp>
+        <p:nvSpPr>
+          <p:cNvPr id="11" name="Oval 10"/>
+          <p:cNvSpPr/>
+          <p:nvPr/>
+        </p:nvSpPr>
+        <p:spPr>
+          <a:xfrm>
+            <a:off x="1243584" y="1609344"/>
+            <a:ext cx="73152" cy="73152"/>
+          </a:xfrm>
+          <a:prstGeom prst="ellipse">
+            <a:avLst/>
+          </a:prstGeom>
+          <a:solidFill>
+            <a:srgbClr val="2DC378"/>
+          </a:solidFill>
+          <a:ln>
+            <a:noFill/>
+          </a:ln>
+        </p:spPr>
+        <p:style>
+          <a:lnRef idx="1">
+            <a:schemeClr val="accent1"/>
+          </a:lnRef>
+          <a:fillRef idx="3">
+            <a:schemeClr val="accent1"/>
+          </a:fillRef>
+          <a:effectRef idx="2">
+            <a:schemeClr val="accent1"/>
+          </a:effectRef>
+          <a:fontRef idx="minor">
+            <a:schemeClr val="lt1"/>
+          </a:fontRef>
+        </p:style>
+        <p:txBody>
+          <a:bodyPr rtlCol="0" anchor="ctr"/>
+          <a:lstStyle/>
+          <a:p>
+            <a:pPr algn="ctr"/>
+          </a:p>
+        </p:txBody>
+      </p:sp>
+      <p:sp>
+        <p:nvSpPr>
+          <p:cNvPr id="12" name="TextBox 11"/>
+          <p:cNvSpPr txBox="1"/>
+          <p:nvPr/>
+        </p:nvSpPr>
+        <p:spPr>
+          <a:xfrm>
+            <a:off x="1399032" y="1554480"/>
+            <a:ext cx="4334256" cy="182880"/>
+          </a:xfrm>
+          <a:prstGeom prst="rect">
+            <a:avLst/>
+          </a:prstGeom>
+          <a:noFill/>
+        </p:spPr>
+        <p:txBody>
+          <a:bodyPr wrap="none" lIns="0" tIns="0" bIns="0" rIns="0">
+            <a:spAutoFit/>
+          </a:bodyPr>
+          <a:lstStyle/>
+          <a:p>
+            <a:pPr>
+              <a:defRPr sz="700">
+                <a:solidFill>
+                  <a:srgbClr val="AABED2"/>
+                </a:solidFill>
+                <a:latin typeface="Arial"/>
+              </a:defRPr>
+            </a:pPr>
+            <a:r>
+              <a:t>🔒  goldfields-bay.vercel.app/admin/audit</a:t>
+            </a:r>
+          </a:p>
+        </p:txBody>
+      </p:sp>
       <p:pic>
         <p:nvPicPr>
-          <p:cNvPr id="8" name="Picture 7" descr="governance-audit-card.png"/>
+          <p:cNvPr id="13" name="Picture 12" descr="governance-audit-card.png"/>
           <p:cNvPicPr>
             <a:picLocks noChangeAspect="1"/>
           </p:cNvPicPr>
@@ -3993,8 +4211,8 @@
         </p:blipFill>
         <p:spPr>
           <a:xfrm>
-            <a:off x="868680" y="1645920"/>
-            <a:ext cx="4846320" cy="3150108"/>
+            <a:off x="1123657" y="1755648"/>
+            <a:ext cx="4473526" cy="2907792"/>
           </a:xfrm>
           <a:prstGeom prst="rect">
             <a:avLst/>
@@ -4003,14 +4221,14 @@
       </p:pic>
       <p:sp>
         <p:nvSpPr>
-          <p:cNvPr id="9" name="TextBox 8"/>
+          <p:cNvPr id="14" name="TextBox 13"/>
           <p:cNvSpPr txBox="1"/>
           <p:nvPr/>
         </p:nvSpPr>
         <p:spPr>
           <a:xfrm>
-            <a:off x="868680" y="5349240"/>
-            <a:ext cx="4846320" cy="731520"/>
+            <a:off x="896112" y="4736592"/>
+            <a:ext cx="4928616" cy="1115568"/>
           </a:xfrm>
           <a:prstGeom prst="rect">
             <a:avLst/>
@@ -4024,7 +4242,7 @@
           <a:lstStyle/>
           <a:p>
             <a:pPr>
-              <a:defRPr sz="850" b="1">
+              <a:defRPr sz="800" b="1">
                 <a:solidFill>
                   <a:srgbClr val="00E5C0"/>
                 </a:solidFill>
@@ -4037,9 +4255,12 @@
           </a:p>
           <a:p>
             <a:pPr>
-              <a:defRPr sz="800">
-                <a:solidFill>
-                  <a:srgbClr val="A5B9CD"/>
+              <a:spcBef>
+                <a:spcPts val="200"/>
+              </a:spcBef>
+              <a:defRPr sz="750">
+                <a:solidFill>
+                  <a:srgbClr val="AABED2"/>
                 </a:solidFill>
                 <a:latin typeface="Arial"/>
               </a:defRPr>
@@ -4052,17 +4273,19 @@
       </p:sp>
       <p:sp>
         <p:nvSpPr>
-          <p:cNvPr id="10" name="Rounded Rectangle 9"/>
+          <p:cNvPr id="15" name="Rounded Rectangle 14"/>
           <p:cNvSpPr/>
           <p:nvPr/>
         </p:nvSpPr>
         <p:spPr>
           <a:xfrm>
-            <a:off x="6108192" y="1508760"/>
-            <a:ext cx="5349240" cy="4709160"/>
+            <a:off x="6199632" y="1371600"/>
+            <a:ext cx="5257800" cy="4572000"/>
           </a:xfrm>
           <a:prstGeom prst="roundRect">
-            <a:avLst/>
+            <a:avLst>
+              <a:gd name="adj" fmla="val 3000"/>
+            </a:avLst>
           </a:prstGeom>
           <a:solidFill>
             <a:srgbClr val="0B3052"/>
@@ -4097,14 +4320,14 @@
       </p:sp>
       <p:sp>
         <p:nvSpPr>
-          <p:cNvPr id="11" name="TextBox 10"/>
+          <p:cNvPr id="16" name="TextBox 15"/>
           <p:cNvSpPr txBox="1"/>
           <p:nvPr/>
         </p:nvSpPr>
         <p:spPr>
           <a:xfrm>
-            <a:off x="6355080" y="1691640"/>
-            <a:ext cx="4846320" cy="4343400"/>
+            <a:off x="6446520" y="1554480"/>
+            <a:ext cx="4754880" cy="4160520"/>
           </a:xfrm>
           <a:prstGeom prst="rect">
             <a:avLst/>
@@ -4134,7 +4357,7 @@
               <a:spcBef>
                 <a:spcPts val="800"/>
               </a:spcBef>
-              <a:defRPr sz="1100" b="1">
+              <a:defRPr sz="1000" b="1">
                 <a:solidFill>
                   <a:srgbClr val="00E5C0"/>
                 </a:solidFill>
@@ -4148,9 +4371,9 @@
           <a:p>
             <a:pPr>
               <a:spcBef>
-                <a:spcPts val="200"/>
+                <a:spcPts val="100"/>
               </a:spcBef>
-              <a:defRPr sz="900">
+              <a:defRPr sz="800">
                 <a:solidFill>
                   <a:srgbClr val="FFFFFF"/>
                 </a:solidFill>
@@ -4166,7 +4389,7 @@
               <a:spcBef>
                 <a:spcPts val="800"/>
               </a:spcBef>
-              <a:defRPr sz="1100" b="1">
+              <a:defRPr sz="1000" b="1">
                 <a:solidFill>
                   <a:srgbClr val="00E5C0"/>
                 </a:solidFill>
@@ -4180,9 +4403,9 @@
           <a:p>
             <a:pPr>
               <a:spcBef>
-                <a:spcPts val="200"/>
+                <a:spcPts val="100"/>
               </a:spcBef>
-              <a:defRPr sz="900">
+              <a:defRPr sz="800">
                 <a:solidFill>
                   <a:srgbClr val="FFFFFF"/>
                 </a:solidFill>
@@ -4198,7 +4421,7 @@
               <a:spcBef>
                 <a:spcPts val="800"/>
               </a:spcBef>
-              <a:defRPr sz="1100" b="1">
+              <a:defRPr sz="1000" b="1">
                 <a:solidFill>
                   <a:srgbClr val="00E5C0"/>
                 </a:solidFill>
@@ -4212,9 +4435,9 @@
           <a:p>
             <a:pPr>
               <a:spcBef>
-                <a:spcPts val="200"/>
+                <a:spcPts val="100"/>
               </a:spcBef>
-              <a:defRPr sz="900">
+              <a:defRPr sz="800">
                 <a:solidFill>
                   <a:srgbClr val="FFFFFF"/>
                 </a:solidFill>
@@ -4230,7 +4453,7 @@
               <a:spcBef>
                 <a:spcPts val="800"/>
               </a:spcBef>
-              <a:defRPr sz="1100" b="1">
+              <a:defRPr sz="1000" b="1">
                 <a:solidFill>
                   <a:srgbClr val="00E5C0"/>
                 </a:solidFill>
@@ -4244,9 +4467,9 @@
           <a:p>
             <a:pPr>
               <a:spcBef>
-                <a:spcPts val="200"/>
+                <a:spcPts val="100"/>
               </a:spcBef>
-              <a:defRPr sz="900">
+              <a:defRPr sz="800">
                 <a:solidFill>
                   <a:srgbClr val="FFFFFF"/>
                 </a:solidFill>
@@ -4261,13 +4484,13 @@
       </p:sp>
       <p:sp>
         <p:nvSpPr>
-          <p:cNvPr id="12" name="Rectangle 11"/>
+          <p:cNvPr id="17" name="Rectangle 16"/>
           <p:cNvSpPr/>
           <p:nvPr/>
         </p:nvSpPr>
         <p:spPr>
           <a:xfrm>
-            <a:off x="731520" y="6400800"/>
+            <a:off x="731520" y="6144768"/>
             <a:ext cx="10728655" cy="13716"/>
           </a:xfrm>
           <a:prstGeom prst="rect">
@@ -4304,13 +4527,13 @@
       </p:sp>
       <p:sp>
         <p:nvSpPr>
-          <p:cNvPr id="13" name="TextBox 12"/>
+          <p:cNvPr id="18" name="TextBox 17"/>
           <p:cNvSpPr txBox="1"/>
           <p:nvPr/>
         </p:nvSpPr>
         <p:spPr>
           <a:xfrm>
-            <a:off x="731520" y="6446520"/>
+            <a:off x="731520" y="6236208"/>
             <a:ext cx="8229600" cy="320040"/>
           </a:xfrm>
           <a:prstGeom prst="rect">
@@ -4325,9 +4548,9 @@
           <a:lstStyle/>
           <a:p>
             <a:pPr>
-              <a:defRPr sz="900">
-                <a:solidFill>
-                  <a:srgbClr val="A5B9CD"/>
+              <a:defRPr sz="850">
+                <a:solidFill>
+                  <a:srgbClr val="AABED2"/>
                 </a:solidFill>
                 <a:latin typeface="Arial"/>
               </a:defRPr>
@@ -4340,13 +4563,13 @@
       </p:sp>
       <p:sp>
         <p:nvSpPr>
-          <p:cNvPr id="14" name="TextBox 13"/>
+          <p:cNvPr id="19" name="TextBox 18"/>
           <p:cNvSpPr txBox="1"/>
           <p:nvPr/>
         </p:nvSpPr>
         <p:spPr>
           <a:xfrm>
-            <a:off x="9601200" y="6446520"/>
+            <a:off x="9601200" y="6236208"/>
             <a:ext cx="1858975" cy="320040"/>
           </a:xfrm>
           <a:prstGeom prst="rect">
@@ -4361,7 +4584,7 @@
           <a:lstStyle/>
           <a:p>
             <a:pPr algn="r">
-              <a:defRPr sz="900" b="1">
+              <a:defRPr sz="850" b="1">
                 <a:solidFill>
                   <a:srgbClr val="C8A064"/>
                 </a:solidFill>
@@ -4416,8 +4639,8 @@
         </p:blipFill>
         <p:spPr>
           <a:xfrm>
-            <a:off x="731520" y="365760"/>
-            <a:ext cx="1056315" cy="347472"/>
+            <a:off x="731520" y="320040"/>
+            <a:ext cx="889528" cy="292608"/>
           </a:xfrm>
           <a:prstGeom prst="rect">
             <a:avLst/>
@@ -4432,8 +4655,8 @@
         </p:nvSpPr>
         <p:spPr>
           <a:xfrm>
-            <a:off x="2011680" y="365760"/>
-            <a:ext cx="18288" cy="347472"/>
+            <a:off x="1920240" y="320040"/>
+            <a:ext cx="13716" cy="292608"/>
           </a:xfrm>
           <a:prstGeom prst="rect">
             <a:avLst/>
@@ -4475,8 +4698,8 @@
         </p:nvSpPr>
         <p:spPr>
           <a:xfrm>
-            <a:off x="2148840" y="365760"/>
-            <a:ext cx="4114800" cy="347472"/>
+            <a:off x="2057400" y="320040"/>
+            <a:ext cx="4114800" cy="292608"/>
           </a:xfrm>
           <a:prstGeom prst="rect">
             <a:avLst/>
@@ -4492,7 +4715,7 @@
             <a:pPr>
               <a:defRPr sz="850" b="1">
                 <a:solidFill>
-                  <a:srgbClr val="A5B9CD"/>
+                  <a:srgbClr val="AABED2"/>
                 </a:solidFill>
                 <a:latin typeface="Arial"/>
               </a:defRPr>
@@ -4511,11 +4734,13 @@
         </p:nvSpPr>
         <p:spPr>
           <a:xfrm>
-            <a:off x="8961120" y="329184"/>
-            <a:ext cx="2499055" cy="384048"/>
+            <a:off x="8961120" y="292608"/>
+            <a:ext cx="2499055" cy="329184"/>
           </a:xfrm>
           <a:prstGeom prst="roundRect">
-            <a:avLst/>
+            <a:avLst>
+              <a:gd name="adj" fmla="val 33333"/>
+            </a:avLst>
           </a:prstGeom>
           <a:solidFill>
             <a:srgbClr val="0B3052"/>
@@ -4541,7 +4766,7 @@
           </a:fontRef>
         </p:style>
         <p:txBody>
-          <a:bodyPr rtlCol="0" anchor="ctr" wrap="square" tIns="54864"/>
+          <a:bodyPr rtlCol="0" anchor="ctr" wrap="square" tIns="36576"/>
           <a:lstStyle/>
           <a:p>
             <a:pPr algn="ctr">
@@ -4566,8 +4791,8 @@
         </p:nvSpPr>
         <p:spPr>
           <a:xfrm>
-            <a:off x="731520" y="868680"/>
-            <a:ext cx="10728655" cy="594360"/>
+            <a:off x="731520" y="749808"/>
+            <a:ext cx="10728655" cy="438912"/>
           </a:xfrm>
           <a:prstGeom prst="rect">
             <a:avLst/>
@@ -4581,7 +4806,7 @@
           <a:lstStyle/>
           <a:p>
             <a:pPr>
-              <a:defRPr sz="2200" b="1">
+              <a:defRPr sz="2000" b="1">
                 <a:solidFill>
                   <a:srgbClr val="FFFFFF"/>
                 </a:solidFill>
@@ -4602,11 +4827,13 @@
         </p:nvSpPr>
         <p:spPr>
           <a:xfrm>
-            <a:off x="731520" y="1508760"/>
-            <a:ext cx="5669280" cy="4709160"/>
+            <a:off x="731520" y="1371600"/>
+            <a:ext cx="5257800" cy="4572000"/>
           </a:xfrm>
           <a:prstGeom prst="roundRect">
-            <a:avLst/>
+            <a:avLst>
+              <a:gd name="adj" fmla="val 3000"/>
+            </a:avLst>
           </a:prstGeom>
           <a:solidFill>
             <a:srgbClr val="0B3052"/>
@@ -4639,9 +4866,219 @@
           </a:p>
         </p:txBody>
       </p:sp>
+      <p:sp>
+        <p:nvSpPr>
+          <p:cNvPr id="8" name="Rectangle 7"/>
+          <p:cNvSpPr/>
+          <p:nvPr/>
+        </p:nvSpPr>
+        <p:spPr>
+          <a:xfrm>
+            <a:off x="896112" y="1536192"/>
+            <a:ext cx="4928616" cy="219456"/>
+          </a:xfrm>
+          <a:prstGeom prst="rect">
+            <a:avLst/>
+          </a:prstGeom>
+          <a:solidFill>
+            <a:srgbClr val="103A62"/>
+          </a:solidFill>
+          <a:ln w="9525">
+            <a:solidFill>
+              <a:srgbClr val="1A4B75"/>
+            </a:solidFill>
+          </a:ln>
+        </p:spPr>
+        <p:style>
+          <a:lnRef idx="1">
+            <a:schemeClr val="accent1"/>
+          </a:lnRef>
+          <a:fillRef idx="3">
+            <a:schemeClr val="accent1"/>
+          </a:fillRef>
+          <a:effectRef idx="2">
+            <a:schemeClr val="accent1"/>
+          </a:effectRef>
+          <a:fontRef idx="minor">
+            <a:schemeClr val="lt1"/>
+          </a:fontRef>
+        </p:style>
+        <p:txBody>
+          <a:bodyPr rtlCol="0" anchor="ctr"/>
+          <a:lstStyle/>
+          <a:p>
+            <a:pPr algn="ctr"/>
+          </a:p>
+        </p:txBody>
+      </p:sp>
+      <p:sp>
+        <p:nvSpPr>
+          <p:cNvPr id="9" name="Oval 8"/>
+          <p:cNvSpPr/>
+          <p:nvPr/>
+        </p:nvSpPr>
+        <p:spPr>
+          <a:xfrm>
+            <a:off x="987552" y="1609344"/>
+            <a:ext cx="73152" cy="73152"/>
+          </a:xfrm>
+          <a:prstGeom prst="ellipse">
+            <a:avLst/>
+          </a:prstGeom>
+          <a:solidFill>
+            <a:srgbClr val="EB5A50"/>
+          </a:solidFill>
+          <a:ln>
+            <a:noFill/>
+          </a:ln>
+        </p:spPr>
+        <p:style>
+          <a:lnRef idx="1">
+            <a:schemeClr val="accent1"/>
+          </a:lnRef>
+          <a:fillRef idx="3">
+            <a:schemeClr val="accent1"/>
+          </a:fillRef>
+          <a:effectRef idx="2">
+            <a:schemeClr val="accent1"/>
+          </a:effectRef>
+          <a:fontRef idx="minor">
+            <a:schemeClr val="lt1"/>
+          </a:fontRef>
+        </p:style>
+        <p:txBody>
+          <a:bodyPr rtlCol="0" anchor="ctr"/>
+          <a:lstStyle/>
+          <a:p>
+            <a:pPr algn="ctr"/>
+          </a:p>
+        </p:txBody>
+      </p:sp>
+      <p:sp>
+        <p:nvSpPr>
+          <p:cNvPr id="10" name="Oval 9"/>
+          <p:cNvSpPr/>
+          <p:nvPr/>
+        </p:nvSpPr>
+        <p:spPr>
+          <a:xfrm>
+            <a:off x="1115568" y="1609344"/>
+            <a:ext cx="73152" cy="73152"/>
+          </a:xfrm>
+          <a:prstGeom prst="ellipse">
+            <a:avLst/>
+          </a:prstGeom>
+          <a:solidFill>
+            <a:srgbClr val="F5B94B"/>
+          </a:solidFill>
+          <a:ln>
+            <a:noFill/>
+          </a:ln>
+        </p:spPr>
+        <p:style>
+          <a:lnRef idx="1">
+            <a:schemeClr val="accent1"/>
+          </a:lnRef>
+          <a:fillRef idx="3">
+            <a:schemeClr val="accent1"/>
+          </a:fillRef>
+          <a:effectRef idx="2">
+            <a:schemeClr val="accent1"/>
+          </a:effectRef>
+          <a:fontRef idx="minor">
+            <a:schemeClr val="lt1"/>
+          </a:fontRef>
+        </p:style>
+        <p:txBody>
+          <a:bodyPr rtlCol="0" anchor="ctr"/>
+          <a:lstStyle/>
+          <a:p>
+            <a:pPr algn="ctr"/>
+          </a:p>
+        </p:txBody>
+      </p:sp>
+      <p:sp>
+        <p:nvSpPr>
+          <p:cNvPr id="11" name="Oval 10"/>
+          <p:cNvSpPr/>
+          <p:nvPr/>
+        </p:nvSpPr>
+        <p:spPr>
+          <a:xfrm>
+            <a:off x="1243584" y="1609344"/>
+            <a:ext cx="73152" cy="73152"/>
+          </a:xfrm>
+          <a:prstGeom prst="ellipse">
+            <a:avLst/>
+          </a:prstGeom>
+          <a:solidFill>
+            <a:srgbClr val="2DC378"/>
+          </a:solidFill>
+          <a:ln>
+            <a:noFill/>
+          </a:ln>
+        </p:spPr>
+        <p:style>
+          <a:lnRef idx="1">
+            <a:schemeClr val="accent1"/>
+          </a:lnRef>
+          <a:fillRef idx="3">
+            <a:schemeClr val="accent1"/>
+          </a:fillRef>
+          <a:effectRef idx="2">
+            <a:schemeClr val="accent1"/>
+          </a:effectRef>
+          <a:fontRef idx="minor">
+            <a:schemeClr val="lt1"/>
+          </a:fontRef>
+        </p:style>
+        <p:txBody>
+          <a:bodyPr rtlCol="0" anchor="ctr"/>
+          <a:lstStyle/>
+          <a:p>
+            <a:pPr algn="ctr"/>
+          </a:p>
+        </p:txBody>
+      </p:sp>
+      <p:sp>
+        <p:nvSpPr>
+          <p:cNvPr id="12" name="TextBox 11"/>
+          <p:cNvSpPr txBox="1"/>
+          <p:nvPr/>
+        </p:nvSpPr>
+        <p:spPr>
+          <a:xfrm>
+            <a:off x="1399032" y="1554480"/>
+            <a:ext cx="4334256" cy="182880"/>
+          </a:xfrm>
+          <a:prstGeom prst="rect">
+            <a:avLst/>
+          </a:prstGeom>
+          <a:noFill/>
+        </p:spPr>
+        <p:txBody>
+          <a:bodyPr wrap="none" lIns="0" tIns="0" bIns="0" rIns="0">
+            <a:spAutoFit/>
+          </a:bodyPr>
+          <a:lstStyle/>
+          <a:p>
+            <a:pPr>
+              <a:defRPr sz="700">
+                <a:solidFill>
+                  <a:srgbClr val="AABED2"/>
+                </a:solidFill>
+                <a:latin typeface="Arial"/>
+              </a:defRPr>
+            </a:pPr>
+            <a:r>
+              <a:t>🔒  goldfields-bay.vercel.app/design-tokens</a:t>
+            </a:r>
+          </a:p>
+        </p:txBody>
+      </p:sp>
       <p:pic>
         <p:nvPicPr>
-          <p:cNvPr id="8" name="Picture 7" descr="design-system-tokens.png"/>
+          <p:cNvPr id="13" name="Picture 12" descr="design-system-tokens.png"/>
           <p:cNvPicPr>
             <a:picLocks noChangeAspect="1"/>
           </p:cNvPicPr>
@@ -4655,8 +5092,8 @@
         </p:blipFill>
         <p:spPr>
           <a:xfrm>
-            <a:off x="868680" y="1645920"/>
-            <a:ext cx="5394960" cy="3506724"/>
+            <a:off x="1123657" y="1755648"/>
+            <a:ext cx="4473526" cy="2907792"/>
           </a:xfrm>
           <a:prstGeom prst="rect">
             <a:avLst/>
@@ -4665,14 +5102,14 @@
       </p:pic>
       <p:sp>
         <p:nvSpPr>
-          <p:cNvPr id="9" name="TextBox 8"/>
+          <p:cNvPr id="14" name="TextBox 13"/>
           <p:cNvSpPr txBox="1"/>
           <p:nvPr/>
         </p:nvSpPr>
         <p:spPr>
           <a:xfrm>
-            <a:off x="868680" y="5349240"/>
-            <a:ext cx="5394960" cy="731520"/>
+            <a:off x="896112" y="4736592"/>
+            <a:ext cx="4928616" cy="1115568"/>
           </a:xfrm>
           <a:prstGeom prst="rect">
             <a:avLst/>
@@ -4686,7 +5123,7 @@
           <a:lstStyle/>
           <a:p>
             <a:pPr>
-              <a:defRPr sz="850" b="1">
+              <a:defRPr sz="800" b="1">
                 <a:solidFill>
                   <a:srgbClr val="00E5C0"/>
                 </a:solidFill>
@@ -4699,9 +5136,12 @@
           </a:p>
           <a:p>
             <a:pPr>
-              <a:defRPr sz="800">
-                <a:solidFill>
-                  <a:srgbClr val="A5B9CD"/>
+              <a:spcBef>
+                <a:spcPts val="200"/>
+              </a:spcBef>
+              <a:defRPr sz="750">
+                <a:solidFill>
+                  <a:srgbClr val="AABED2"/>
                 </a:solidFill>
                 <a:latin typeface="Arial"/>
               </a:defRPr>
@@ -4714,17 +5154,19 @@
       </p:sp>
       <p:sp>
         <p:nvSpPr>
-          <p:cNvPr id="10" name="Rounded Rectangle 9"/>
+          <p:cNvPr id="15" name="Rounded Rectangle 14"/>
           <p:cNvSpPr/>
           <p:nvPr/>
         </p:nvSpPr>
         <p:spPr>
           <a:xfrm>
-            <a:off x="6656832" y="1508760"/>
-            <a:ext cx="4800600" cy="4709160"/>
+            <a:off x="6199632" y="1371600"/>
+            <a:ext cx="5257800" cy="4572000"/>
           </a:xfrm>
           <a:prstGeom prst="roundRect">
-            <a:avLst/>
+            <a:avLst>
+              <a:gd name="adj" fmla="val 3000"/>
+            </a:avLst>
           </a:prstGeom>
           <a:solidFill>
             <a:srgbClr val="0B3052"/>
@@ -4759,14 +5201,14 @@
       </p:sp>
       <p:sp>
         <p:nvSpPr>
-          <p:cNvPr id="11" name="TextBox 10"/>
+          <p:cNvPr id="16" name="TextBox 15"/>
           <p:cNvSpPr txBox="1"/>
           <p:nvPr/>
         </p:nvSpPr>
         <p:spPr>
           <a:xfrm>
-            <a:off x="6903720" y="1691640"/>
-            <a:ext cx="4297680" cy="4343400"/>
+            <a:off x="6446520" y="1554480"/>
+            <a:ext cx="4754880" cy="4160520"/>
           </a:xfrm>
           <a:prstGeom prst="rect">
             <a:avLst/>
@@ -4794,9 +5236,9 @@
           <a:p>
             <a:pPr>
               <a:spcBef>
-                <a:spcPts val="600"/>
+                <a:spcPts val="400"/>
               </a:spcBef>
-              <a:defRPr sz="1050" b="1">
+              <a:defRPr sz="950" b="1">
                 <a:solidFill>
                   <a:srgbClr val="FFFFFF"/>
                 </a:solidFill>
@@ -4812,9 +5254,9 @@
               <a:spcBef>
                 <a:spcPts val="100"/>
               </a:spcBef>
-              <a:defRPr sz="850">
-                <a:solidFill>
-                  <a:srgbClr val="A5B9CD"/>
+              <a:defRPr sz="750">
+                <a:solidFill>
+                  <a:srgbClr val="AABED2"/>
                 </a:solidFill>
                 <a:latin typeface="Arial"/>
               </a:defRPr>
@@ -4826,9 +5268,9 @@
           <a:p>
             <a:pPr>
               <a:spcBef>
-                <a:spcPts val="600"/>
+                <a:spcPts val="400"/>
               </a:spcBef>
-              <a:defRPr sz="1050" b="1">
+              <a:defRPr sz="950" b="1">
                 <a:solidFill>
                   <a:srgbClr val="FFFFFF"/>
                 </a:solidFill>
@@ -4844,9 +5286,9 @@
               <a:spcBef>
                 <a:spcPts val="100"/>
               </a:spcBef>
-              <a:defRPr sz="850">
-                <a:solidFill>
-                  <a:srgbClr val="A5B9CD"/>
+              <a:defRPr sz="750">
+                <a:solidFill>
+                  <a:srgbClr val="AABED2"/>
                 </a:solidFill>
                 <a:latin typeface="Arial"/>
               </a:defRPr>
@@ -4858,9 +5300,9 @@
           <a:p>
             <a:pPr>
               <a:spcBef>
-                <a:spcPts val="600"/>
+                <a:spcPts val="400"/>
               </a:spcBef>
-              <a:defRPr sz="1050" b="1">
+              <a:defRPr sz="950" b="1">
                 <a:solidFill>
                   <a:srgbClr val="FFFFFF"/>
                 </a:solidFill>
@@ -4876,9 +5318,9 @@
               <a:spcBef>
                 <a:spcPts val="100"/>
               </a:spcBef>
-              <a:defRPr sz="850">
-                <a:solidFill>
-                  <a:srgbClr val="A5B9CD"/>
+              <a:defRPr sz="750">
+                <a:solidFill>
+                  <a:srgbClr val="AABED2"/>
                 </a:solidFill>
                 <a:latin typeface="Arial"/>
               </a:defRPr>
@@ -4890,9 +5332,9 @@
           <a:p>
             <a:pPr>
               <a:spcBef>
-                <a:spcPts val="600"/>
+                <a:spcPts val="400"/>
               </a:spcBef>
-              <a:defRPr sz="1050" b="1">
+              <a:defRPr sz="950" b="1">
                 <a:solidFill>
                   <a:srgbClr val="FFFFFF"/>
                 </a:solidFill>
@@ -4908,9 +5350,9 @@
               <a:spcBef>
                 <a:spcPts val="100"/>
               </a:spcBef>
-              <a:defRPr sz="850">
-                <a:solidFill>
-                  <a:srgbClr val="A5B9CD"/>
+              <a:defRPr sz="750">
+                <a:solidFill>
+                  <a:srgbClr val="AABED2"/>
                 </a:solidFill>
                 <a:latin typeface="Arial"/>
               </a:defRPr>
@@ -4922,9 +5364,9 @@
           <a:p>
             <a:pPr>
               <a:spcBef>
-                <a:spcPts val="600"/>
+                <a:spcPts val="400"/>
               </a:spcBef>
-              <a:defRPr sz="1050" b="1">
+              <a:defRPr sz="950" b="1">
                 <a:solidFill>
                   <a:srgbClr val="FFFFFF"/>
                 </a:solidFill>
@@ -4940,9 +5382,9 @@
               <a:spcBef>
                 <a:spcPts val="100"/>
               </a:spcBef>
-              <a:defRPr sz="850">
-                <a:solidFill>
-                  <a:srgbClr val="A5B9CD"/>
+              <a:defRPr sz="750">
+                <a:solidFill>
+                  <a:srgbClr val="AABED2"/>
                 </a:solidFill>
                 <a:latin typeface="Arial"/>
               </a:defRPr>
@@ -4955,13 +5397,13 @@
       </p:sp>
       <p:sp>
         <p:nvSpPr>
-          <p:cNvPr id="12" name="Rectangle 11"/>
+          <p:cNvPr id="17" name="Rectangle 16"/>
           <p:cNvSpPr/>
           <p:nvPr/>
         </p:nvSpPr>
         <p:spPr>
           <a:xfrm>
-            <a:off x="731520" y="6400800"/>
+            <a:off x="731520" y="6144768"/>
             <a:ext cx="10728655" cy="13716"/>
           </a:xfrm>
           <a:prstGeom prst="rect">
@@ -4998,13 +5440,13 @@
       </p:sp>
       <p:sp>
         <p:nvSpPr>
-          <p:cNvPr id="13" name="TextBox 12"/>
+          <p:cNvPr id="18" name="TextBox 17"/>
           <p:cNvSpPr txBox="1"/>
           <p:nvPr/>
         </p:nvSpPr>
         <p:spPr>
           <a:xfrm>
-            <a:off x="731520" y="6446520"/>
+            <a:off x="731520" y="6236208"/>
             <a:ext cx="8229600" cy="320040"/>
           </a:xfrm>
           <a:prstGeom prst="rect">
@@ -5019,9 +5461,9 @@
           <a:lstStyle/>
           <a:p>
             <a:pPr>
-              <a:defRPr sz="900">
-                <a:solidFill>
-                  <a:srgbClr val="A5B9CD"/>
+              <a:defRPr sz="850">
+                <a:solidFill>
+                  <a:srgbClr val="AABED2"/>
                 </a:solidFill>
                 <a:latin typeface="Arial"/>
               </a:defRPr>
@@ -5034,13 +5476,13 @@
       </p:sp>
       <p:sp>
         <p:nvSpPr>
-          <p:cNvPr id="14" name="TextBox 13"/>
+          <p:cNvPr id="19" name="TextBox 18"/>
           <p:cNvSpPr txBox="1"/>
           <p:nvPr/>
         </p:nvSpPr>
         <p:spPr>
           <a:xfrm>
-            <a:off x="9601200" y="6446520"/>
+            <a:off x="9601200" y="6236208"/>
             <a:ext cx="1858975" cy="320040"/>
           </a:xfrm>
           <a:prstGeom prst="rect">
@@ -5055,7 +5497,7 @@
           <a:lstStyle/>
           <a:p>
             <a:pPr algn="r">
-              <a:defRPr sz="900" b="1">
+              <a:defRPr sz="850" b="1">
                 <a:solidFill>
                   <a:srgbClr val="C8A064"/>
                 </a:solidFill>
@@ -5110,8 +5552,8 @@
         </p:blipFill>
         <p:spPr>
           <a:xfrm>
-            <a:off x="731520" y="365760"/>
-            <a:ext cx="1056315" cy="347472"/>
+            <a:off x="731520" y="320040"/>
+            <a:ext cx="889528" cy="292608"/>
           </a:xfrm>
           <a:prstGeom prst="rect">
             <a:avLst/>
@@ -5126,8 +5568,8 @@
         </p:nvSpPr>
         <p:spPr>
           <a:xfrm>
-            <a:off x="2011680" y="365760"/>
-            <a:ext cx="18288" cy="347472"/>
+            <a:off x="1920240" y="320040"/>
+            <a:ext cx="13716" cy="292608"/>
           </a:xfrm>
           <a:prstGeom prst="rect">
             <a:avLst/>
@@ -5169,8 +5611,8 @@
         </p:nvSpPr>
         <p:spPr>
           <a:xfrm>
-            <a:off x="2148840" y="365760"/>
-            <a:ext cx="4114800" cy="347472"/>
+            <a:off x="2057400" y="320040"/>
+            <a:ext cx="4114800" cy="292608"/>
           </a:xfrm>
           <a:prstGeom prst="rect">
             <a:avLst/>
@@ -5186,7 +5628,7 @@
             <a:pPr>
               <a:defRPr sz="850" b="1">
                 <a:solidFill>
-                  <a:srgbClr val="A5B9CD"/>
+                  <a:srgbClr val="AABED2"/>
                 </a:solidFill>
                 <a:latin typeface="Arial"/>
               </a:defRPr>
@@ -5205,11 +5647,13 @@
         </p:nvSpPr>
         <p:spPr>
           <a:xfrm>
-            <a:off x="8961120" y="329184"/>
-            <a:ext cx="2499055" cy="384048"/>
+            <a:off x="8961120" y="292608"/>
+            <a:ext cx="2499055" cy="329184"/>
           </a:xfrm>
           <a:prstGeom prst="roundRect">
-            <a:avLst/>
+            <a:avLst>
+              <a:gd name="adj" fmla="val 33333"/>
+            </a:avLst>
           </a:prstGeom>
           <a:solidFill>
             <a:srgbClr val="0B3052"/>
@@ -5235,7 +5679,7 @@
           </a:fontRef>
         </p:style>
         <p:txBody>
-          <a:bodyPr rtlCol="0" anchor="ctr" wrap="square" tIns="54864"/>
+          <a:bodyPr rtlCol="0" anchor="ctr" wrap="square" tIns="36576"/>
           <a:lstStyle/>
           <a:p>
             <a:pPr algn="ctr">
@@ -5260,8 +5704,8 @@
         </p:nvSpPr>
         <p:spPr>
           <a:xfrm>
-            <a:off x="731520" y="868680"/>
-            <a:ext cx="10728655" cy="594360"/>
+            <a:off x="731520" y="749808"/>
+            <a:ext cx="10728655" cy="438912"/>
           </a:xfrm>
           <a:prstGeom prst="rect">
             <a:avLst/>
@@ -5275,7 +5719,7 @@
           <a:lstStyle/>
           <a:p>
             <a:pPr>
-              <a:defRPr sz="2200" b="1">
+              <a:defRPr sz="2000" b="1">
                 <a:solidFill>
                   <a:srgbClr val="FFFFFF"/>
                 </a:solidFill>
@@ -5296,11 +5740,13 @@
         </p:nvSpPr>
         <p:spPr>
           <a:xfrm>
-            <a:off x="731520" y="1508760"/>
-            <a:ext cx="5669280" cy="4709160"/>
+            <a:off x="731520" y="1371600"/>
+            <a:ext cx="5257800" cy="4572000"/>
           </a:xfrm>
           <a:prstGeom prst="roundRect">
-            <a:avLst/>
+            <a:avLst>
+              <a:gd name="adj" fmla="val 3000"/>
+            </a:avLst>
           </a:prstGeom>
           <a:solidFill>
             <a:srgbClr val="0B3052"/>
@@ -5333,9 +5779,219 @@
           </a:p>
         </p:txBody>
       </p:sp>
+      <p:sp>
+        <p:nvSpPr>
+          <p:cNvPr id="8" name="Rectangle 7"/>
+          <p:cNvSpPr/>
+          <p:nvPr/>
+        </p:nvSpPr>
+        <p:spPr>
+          <a:xfrm>
+            <a:off x="896112" y="1536192"/>
+            <a:ext cx="4928616" cy="219456"/>
+          </a:xfrm>
+          <a:prstGeom prst="rect">
+            <a:avLst/>
+          </a:prstGeom>
+          <a:solidFill>
+            <a:srgbClr val="103A62"/>
+          </a:solidFill>
+          <a:ln w="9525">
+            <a:solidFill>
+              <a:srgbClr val="1A4B75"/>
+            </a:solidFill>
+          </a:ln>
+        </p:spPr>
+        <p:style>
+          <a:lnRef idx="1">
+            <a:schemeClr val="accent1"/>
+          </a:lnRef>
+          <a:fillRef idx="3">
+            <a:schemeClr val="accent1"/>
+          </a:fillRef>
+          <a:effectRef idx="2">
+            <a:schemeClr val="accent1"/>
+          </a:effectRef>
+          <a:fontRef idx="minor">
+            <a:schemeClr val="lt1"/>
+          </a:fontRef>
+        </p:style>
+        <p:txBody>
+          <a:bodyPr rtlCol="0" anchor="ctr"/>
+          <a:lstStyle/>
+          <a:p>
+            <a:pPr algn="ctr"/>
+          </a:p>
+        </p:txBody>
+      </p:sp>
+      <p:sp>
+        <p:nvSpPr>
+          <p:cNvPr id="9" name="Oval 8"/>
+          <p:cNvSpPr/>
+          <p:nvPr/>
+        </p:nvSpPr>
+        <p:spPr>
+          <a:xfrm>
+            <a:off x="987552" y="1609344"/>
+            <a:ext cx="73152" cy="73152"/>
+          </a:xfrm>
+          <a:prstGeom prst="ellipse">
+            <a:avLst/>
+          </a:prstGeom>
+          <a:solidFill>
+            <a:srgbClr val="EB5A50"/>
+          </a:solidFill>
+          <a:ln>
+            <a:noFill/>
+          </a:ln>
+        </p:spPr>
+        <p:style>
+          <a:lnRef idx="1">
+            <a:schemeClr val="accent1"/>
+          </a:lnRef>
+          <a:fillRef idx="3">
+            <a:schemeClr val="accent1"/>
+          </a:fillRef>
+          <a:effectRef idx="2">
+            <a:schemeClr val="accent1"/>
+          </a:effectRef>
+          <a:fontRef idx="minor">
+            <a:schemeClr val="lt1"/>
+          </a:fontRef>
+        </p:style>
+        <p:txBody>
+          <a:bodyPr rtlCol="0" anchor="ctr"/>
+          <a:lstStyle/>
+          <a:p>
+            <a:pPr algn="ctr"/>
+          </a:p>
+        </p:txBody>
+      </p:sp>
+      <p:sp>
+        <p:nvSpPr>
+          <p:cNvPr id="10" name="Oval 9"/>
+          <p:cNvSpPr/>
+          <p:nvPr/>
+        </p:nvSpPr>
+        <p:spPr>
+          <a:xfrm>
+            <a:off x="1115568" y="1609344"/>
+            <a:ext cx="73152" cy="73152"/>
+          </a:xfrm>
+          <a:prstGeom prst="ellipse">
+            <a:avLst/>
+          </a:prstGeom>
+          <a:solidFill>
+            <a:srgbClr val="F5B94B"/>
+          </a:solidFill>
+          <a:ln>
+            <a:noFill/>
+          </a:ln>
+        </p:spPr>
+        <p:style>
+          <a:lnRef idx="1">
+            <a:schemeClr val="accent1"/>
+          </a:lnRef>
+          <a:fillRef idx="3">
+            <a:schemeClr val="accent1"/>
+          </a:fillRef>
+          <a:effectRef idx="2">
+            <a:schemeClr val="accent1"/>
+          </a:effectRef>
+          <a:fontRef idx="minor">
+            <a:schemeClr val="lt1"/>
+          </a:fontRef>
+        </p:style>
+        <p:txBody>
+          <a:bodyPr rtlCol="0" anchor="ctr"/>
+          <a:lstStyle/>
+          <a:p>
+            <a:pPr algn="ctr"/>
+          </a:p>
+        </p:txBody>
+      </p:sp>
+      <p:sp>
+        <p:nvSpPr>
+          <p:cNvPr id="11" name="Oval 10"/>
+          <p:cNvSpPr/>
+          <p:nvPr/>
+        </p:nvSpPr>
+        <p:spPr>
+          <a:xfrm>
+            <a:off x="1243584" y="1609344"/>
+            <a:ext cx="73152" cy="73152"/>
+          </a:xfrm>
+          <a:prstGeom prst="ellipse">
+            <a:avLst/>
+          </a:prstGeom>
+          <a:solidFill>
+            <a:srgbClr val="2DC378"/>
+          </a:solidFill>
+          <a:ln>
+            <a:noFill/>
+          </a:ln>
+        </p:spPr>
+        <p:style>
+          <a:lnRef idx="1">
+            <a:schemeClr val="accent1"/>
+          </a:lnRef>
+          <a:fillRef idx="3">
+            <a:schemeClr val="accent1"/>
+          </a:fillRef>
+          <a:effectRef idx="2">
+            <a:schemeClr val="accent1"/>
+          </a:effectRef>
+          <a:fontRef idx="minor">
+            <a:schemeClr val="lt1"/>
+          </a:fontRef>
+        </p:style>
+        <p:txBody>
+          <a:bodyPr rtlCol="0" anchor="ctr"/>
+          <a:lstStyle/>
+          <a:p>
+            <a:pPr algn="ctr"/>
+          </a:p>
+        </p:txBody>
+      </p:sp>
+      <p:sp>
+        <p:nvSpPr>
+          <p:cNvPr id="12" name="TextBox 11"/>
+          <p:cNvSpPr txBox="1"/>
+          <p:nvPr/>
+        </p:nvSpPr>
+        <p:spPr>
+          <a:xfrm>
+            <a:off x="1399032" y="1554480"/>
+            <a:ext cx="4334256" cy="182880"/>
+          </a:xfrm>
+          <a:prstGeom prst="rect">
+            <a:avLst/>
+          </a:prstGeom>
+          <a:noFill/>
+        </p:spPr>
+        <p:txBody>
+          <a:bodyPr wrap="none" lIns="0" tIns="0" bIns="0" rIns="0">
+            <a:spAutoFit/>
+          </a:bodyPr>
+          <a:lstStyle/>
+          <a:p>
+            <a:pPr>
+              <a:defRPr sz="700">
+                <a:solidFill>
+                  <a:srgbClr val="AABED2"/>
+                </a:solidFill>
+                <a:latin typeface="Arial"/>
+              </a:defRPr>
+            </a:pPr>
+            <a:r>
+              <a:t>🔒  goldfields-bay.vercel.app/api/og</a:t>
+            </a:r>
+          </a:p>
+        </p:txBody>
+      </p:sp>
       <p:pic>
         <p:nvPicPr>
-          <p:cNvPr id="8" name="Picture 7" descr="goldfields-og-share.png"/>
+          <p:cNvPr id="13" name="Picture 12" descr="goldfields-og-share.png"/>
           <p:cNvPicPr>
             <a:picLocks noChangeAspect="1"/>
           </p:cNvPicPr>
@@ -5349,8 +6005,8 @@
         </p:blipFill>
         <p:spPr>
           <a:xfrm>
-            <a:off x="868680" y="1645920"/>
-            <a:ext cx="5394960" cy="2832354"/>
+            <a:off x="896112" y="1755648"/>
+            <a:ext cx="4928616" cy="2587523"/>
           </a:xfrm>
           <a:prstGeom prst="rect">
             <a:avLst/>
@@ -5359,14 +6015,14 @@
       </p:pic>
       <p:sp>
         <p:nvSpPr>
-          <p:cNvPr id="9" name="TextBox 8"/>
+          <p:cNvPr id="14" name="TextBox 13"/>
           <p:cNvSpPr txBox="1"/>
           <p:nvPr/>
         </p:nvSpPr>
         <p:spPr>
           <a:xfrm>
-            <a:off x="868680" y="5349240"/>
-            <a:ext cx="5394960" cy="731520"/>
+            <a:off x="896112" y="4736592"/>
+            <a:ext cx="4928616" cy="1115568"/>
           </a:xfrm>
           <a:prstGeom prst="rect">
             <a:avLst/>
@@ -5380,7 +6036,7 @@
           <a:lstStyle/>
           <a:p>
             <a:pPr>
-              <a:defRPr sz="850" b="1">
+              <a:defRPr sz="800" b="1">
                 <a:solidFill>
                   <a:srgbClr val="00E5C0"/>
                 </a:solidFill>
@@ -5393,9 +6049,12 @@
           </a:p>
           <a:p>
             <a:pPr>
-              <a:defRPr sz="800">
-                <a:solidFill>
-                  <a:srgbClr val="A5B9CD"/>
+              <a:spcBef>
+                <a:spcPts val="200"/>
+              </a:spcBef>
+              <a:defRPr sz="750">
+                <a:solidFill>
+                  <a:srgbClr val="AABED2"/>
                 </a:solidFill>
                 <a:latin typeface="Arial"/>
               </a:defRPr>
@@ -5408,17 +6067,19 @@
       </p:sp>
       <p:sp>
         <p:nvSpPr>
-          <p:cNvPr id="10" name="Rounded Rectangle 9"/>
+          <p:cNvPr id="15" name="Rounded Rectangle 14"/>
           <p:cNvSpPr/>
           <p:nvPr/>
         </p:nvSpPr>
         <p:spPr>
           <a:xfrm>
-            <a:off x="6656832" y="1508760"/>
-            <a:ext cx="4800600" cy="4709160"/>
+            <a:off x="6199632" y="1371600"/>
+            <a:ext cx="5257800" cy="4572000"/>
           </a:xfrm>
           <a:prstGeom prst="roundRect">
-            <a:avLst/>
+            <a:avLst>
+              <a:gd name="adj" fmla="val 3000"/>
+            </a:avLst>
           </a:prstGeom>
           <a:solidFill>
             <a:srgbClr val="0B3052"/>
@@ -5453,14 +6114,14 @@
       </p:sp>
       <p:sp>
         <p:nvSpPr>
-          <p:cNvPr id="11" name="TextBox 10"/>
+          <p:cNvPr id="16" name="TextBox 15"/>
           <p:cNvSpPr txBox="1"/>
           <p:nvPr/>
         </p:nvSpPr>
         <p:spPr>
           <a:xfrm>
-            <a:off x="6903720" y="1691640"/>
-            <a:ext cx="4297680" cy="4343400"/>
+            <a:off x="6446520" y="1554480"/>
+            <a:ext cx="4754880" cy="4160520"/>
           </a:xfrm>
           <a:prstGeom prst="rect">
             <a:avLst/>
@@ -5490,7 +6151,7 @@
               <a:spcBef>
                 <a:spcPts val="800"/>
               </a:spcBef>
-              <a:defRPr sz="1100" b="1">
+              <a:defRPr sz="1000" b="1">
                 <a:solidFill>
                   <a:srgbClr val="FFFFFF"/>
                 </a:solidFill>
@@ -5504,11 +6165,11 @@
           <a:p>
             <a:pPr>
               <a:spcBef>
-                <a:spcPts val="200"/>
+                <a:spcPts val="100"/>
               </a:spcBef>
-              <a:defRPr sz="900">
-                <a:solidFill>
-                  <a:srgbClr val="A5B9CD"/>
+              <a:defRPr sz="800">
+                <a:solidFill>
+                  <a:srgbClr val="AABED2"/>
                 </a:solidFill>
                 <a:latin typeface="Arial"/>
               </a:defRPr>
@@ -5522,7 +6183,7 @@
               <a:spcBef>
                 <a:spcPts val="800"/>
               </a:spcBef>
-              <a:defRPr sz="1100" b="1">
+              <a:defRPr sz="1000" b="1">
                 <a:solidFill>
                   <a:srgbClr val="FFFFFF"/>
                 </a:solidFill>
@@ -5536,11 +6197,11 @@
           <a:p>
             <a:pPr>
               <a:spcBef>
-                <a:spcPts val="200"/>
+                <a:spcPts val="100"/>
               </a:spcBef>
-              <a:defRPr sz="900">
-                <a:solidFill>
-                  <a:srgbClr val="A5B9CD"/>
+              <a:defRPr sz="800">
+                <a:solidFill>
+                  <a:srgbClr val="AABED2"/>
                 </a:solidFill>
                 <a:latin typeface="Arial"/>
               </a:defRPr>
@@ -5554,7 +6215,7 @@
               <a:spcBef>
                 <a:spcPts val="800"/>
               </a:spcBef>
-              <a:defRPr sz="1100" b="1">
+              <a:defRPr sz="1000" b="1">
                 <a:solidFill>
                   <a:srgbClr val="FFFFFF"/>
                 </a:solidFill>
@@ -5568,11 +6229,11 @@
           <a:p>
             <a:pPr>
               <a:spcBef>
-                <a:spcPts val="200"/>
+                <a:spcPts val="100"/>
               </a:spcBef>
-              <a:defRPr sz="900">
-                <a:solidFill>
-                  <a:srgbClr val="A5B9CD"/>
+              <a:defRPr sz="800">
+                <a:solidFill>
+                  <a:srgbClr val="AABED2"/>
                 </a:solidFill>
                 <a:latin typeface="Arial"/>
               </a:defRPr>
@@ -5586,7 +6247,7 @@
               <a:spcBef>
                 <a:spcPts val="800"/>
               </a:spcBef>
-              <a:defRPr sz="1100" b="1">
+              <a:defRPr sz="1000" b="1">
                 <a:solidFill>
                   <a:srgbClr val="FFFFFF"/>
                 </a:solidFill>
@@ -5600,11 +6261,11 @@
           <a:p>
             <a:pPr>
               <a:spcBef>
-                <a:spcPts val="200"/>
+                <a:spcPts val="100"/>
               </a:spcBef>
-              <a:defRPr sz="900">
-                <a:solidFill>
-                  <a:srgbClr val="A5B9CD"/>
+              <a:defRPr sz="800">
+                <a:solidFill>
+                  <a:srgbClr val="AABED2"/>
                 </a:solidFill>
                 <a:latin typeface="Arial"/>
               </a:defRPr>
@@ -5617,13 +6278,13 @@
       </p:sp>
       <p:sp>
         <p:nvSpPr>
-          <p:cNvPr id="12" name="Rectangle 11"/>
+          <p:cNvPr id="17" name="Rectangle 16"/>
           <p:cNvSpPr/>
           <p:nvPr/>
         </p:nvSpPr>
         <p:spPr>
           <a:xfrm>
-            <a:off x="731520" y="6400800"/>
+            <a:off x="731520" y="6144768"/>
             <a:ext cx="10728655" cy="13716"/>
           </a:xfrm>
           <a:prstGeom prst="rect">
@@ -5660,13 +6321,13 @@
       </p:sp>
       <p:sp>
         <p:nvSpPr>
-          <p:cNvPr id="13" name="TextBox 12"/>
+          <p:cNvPr id="18" name="TextBox 17"/>
           <p:cNvSpPr txBox="1"/>
           <p:nvPr/>
         </p:nvSpPr>
         <p:spPr>
           <a:xfrm>
-            <a:off x="731520" y="6446520"/>
+            <a:off x="731520" y="6236208"/>
             <a:ext cx="8229600" cy="320040"/>
           </a:xfrm>
           <a:prstGeom prst="rect">
@@ -5681,9 +6342,9 @@
           <a:lstStyle/>
           <a:p>
             <a:pPr>
-              <a:defRPr sz="900">
-                <a:solidFill>
-                  <a:srgbClr val="A5B9CD"/>
+              <a:defRPr sz="850">
+                <a:solidFill>
+                  <a:srgbClr val="AABED2"/>
                 </a:solidFill>
                 <a:latin typeface="Arial"/>
               </a:defRPr>
@@ -5696,13 +6357,13 @@
       </p:sp>
       <p:sp>
         <p:nvSpPr>
-          <p:cNvPr id="14" name="TextBox 13"/>
+          <p:cNvPr id="19" name="TextBox 18"/>
           <p:cNvSpPr txBox="1"/>
           <p:nvPr/>
         </p:nvSpPr>
         <p:spPr>
           <a:xfrm>
-            <a:off x="9601200" y="6446520"/>
+            <a:off x="9601200" y="6236208"/>
             <a:ext cx="1858975" cy="320040"/>
           </a:xfrm>
           <a:prstGeom prst="rect">
@@ -5717,7 +6378,7 @@
           <a:lstStyle/>
           <a:p>
             <a:pPr algn="r">
-              <a:defRPr sz="900" b="1">
+              <a:defRPr sz="850" b="1">
                 <a:solidFill>
                   <a:srgbClr val="C8A064"/>
                 </a:solidFill>
@@ -5772,8 +6433,8 @@
         </p:blipFill>
         <p:spPr>
           <a:xfrm>
-            <a:off x="731520" y="365760"/>
-            <a:ext cx="1056315" cy="347472"/>
+            <a:off x="731520" y="320040"/>
+            <a:ext cx="889528" cy="292608"/>
           </a:xfrm>
           <a:prstGeom prst="rect">
             <a:avLst/>
@@ -5788,8 +6449,8 @@
         </p:nvSpPr>
         <p:spPr>
           <a:xfrm>
-            <a:off x="2011680" y="365760"/>
-            <a:ext cx="18288" cy="347472"/>
+            <a:off x="1920240" y="320040"/>
+            <a:ext cx="13716" cy="292608"/>
           </a:xfrm>
           <a:prstGeom prst="rect">
             <a:avLst/>
@@ -5831,8 +6492,8 @@
         </p:nvSpPr>
         <p:spPr>
           <a:xfrm>
-            <a:off x="2148840" y="365760"/>
-            <a:ext cx="4114800" cy="347472"/>
+            <a:off x="2057400" y="320040"/>
+            <a:ext cx="4114800" cy="292608"/>
           </a:xfrm>
           <a:prstGeom prst="rect">
             <a:avLst/>
@@ -5848,7 +6509,7 @@
             <a:pPr>
               <a:defRPr sz="850" b="1">
                 <a:solidFill>
-                  <a:srgbClr val="A5B9CD"/>
+                  <a:srgbClr val="AABED2"/>
                 </a:solidFill>
                 <a:latin typeface="Arial"/>
               </a:defRPr>
@@ -5867,11 +6528,13 @@
         </p:nvSpPr>
         <p:spPr>
           <a:xfrm>
-            <a:off x="8961120" y="329184"/>
-            <a:ext cx="2499055" cy="384048"/>
+            <a:off x="8961120" y="292608"/>
+            <a:ext cx="2499055" cy="329184"/>
           </a:xfrm>
           <a:prstGeom prst="roundRect">
-            <a:avLst/>
+            <a:avLst>
+              <a:gd name="adj" fmla="val 33333"/>
+            </a:avLst>
           </a:prstGeom>
           <a:solidFill>
             <a:srgbClr val="0B3052"/>
@@ -5897,7 +6560,7 @@
           </a:fontRef>
         </p:style>
         <p:txBody>
-          <a:bodyPr rtlCol="0" anchor="ctr" wrap="square" tIns="54864"/>
+          <a:bodyPr rtlCol="0" anchor="ctr" wrap="square" tIns="36576"/>
           <a:lstStyle/>
           <a:p>
             <a:pPr algn="ctr">
@@ -5922,8 +6585,8 @@
         </p:nvSpPr>
         <p:spPr>
           <a:xfrm>
-            <a:off x="731520" y="868680"/>
-            <a:ext cx="10728655" cy="594360"/>
+            <a:off x="731520" y="749808"/>
+            <a:ext cx="10728655" cy="438912"/>
           </a:xfrm>
           <a:prstGeom prst="rect">
             <a:avLst/>
@@ -5937,7 +6600,7 @@
           <a:lstStyle/>
           <a:p>
             <a:pPr>
-              <a:defRPr sz="2200" b="1">
+              <a:defRPr sz="2000" b="1">
                 <a:solidFill>
                   <a:srgbClr val="FFFFFF"/>
                 </a:solidFill>
@@ -5958,11 +6621,13 @@
         </p:nvSpPr>
         <p:spPr>
           <a:xfrm>
-            <a:off x="731520" y="1508760"/>
-            <a:ext cx="5669280" cy="4709160"/>
+            <a:off x="731520" y="1371600"/>
+            <a:ext cx="5257800" cy="4572000"/>
           </a:xfrm>
           <a:prstGeom prst="roundRect">
-            <a:avLst/>
+            <a:avLst>
+              <a:gd name="adj" fmla="val 3000"/>
+            </a:avLst>
           </a:prstGeom>
           <a:solidFill>
             <a:srgbClr val="0B3052"/>
@@ -5995,9 +6660,219 @@
           </a:p>
         </p:txBody>
       </p:sp>
+      <p:sp>
+        <p:nvSpPr>
+          <p:cNvPr id="8" name="Rectangle 7"/>
+          <p:cNvSpPr/>
+          <p:nvPr/>
+        </p:nvSpPr>
+        <p:spPr>
+          <a:xfrm>
+            <a:off x="896112" y="1536192"/>
+            <a:ext cx="4928616" cy="219456"/>
+          </a:xfrm>
+          <a:prstGeom prst="rect">
+            <a:avLst/>
+          </a:prstGeom>
+          <a:solidFill>
+            <a:srgbClr val="103A62"/>
+          </a:solidFill>
+          <a:ln w="9525">
+            <a:solidFill>
+              <a:srgbClr val="1A4B75"/>
+            </a:solidFill>
+          </a:ln>
+        </p:spPr>
+        <p:style>
+          <a:lnRef idx="1">
+            <a:schemeClr val="accent1"/>
+          </a:lnRef>
+          <a:fillRef idx="3">
+            <a:schemeClr val="accent1"/>
+          </a:fillRef>
+          <a:effectRef idx="2">
+            <a:schemeClr val="accent1"/>
+          </a:effectRef>
+          <a:fontRef idx="minor">
+            <a:schemeClr val="lt1"/>
+          </a:fontRef>
+        </p:style>
+        <p:txBody>
+          <a:bodyPr rtlCol="0" anchor="ctr"/>
+          <a:lstStyle/>
+          <a:p>
+            <a:pPr algn="ctr"/>
+          </a:p>
+        </p:txBody>
+      </p:sp>
+      <p:sp>
+        <p:nvSpPr>
+          <p:cNvPr id="9" name="Oval 8"/>
+          <p:cNvSpPr/>
+          <p:nvPr/>
+        </p:nvSpPr>
+        <p:spPr>
+          <a:xfrm>
+            <a:off x="987552" y="1609344"/>
+            <a:ext cx="73152" cy="73152"/>
+          </a:xfrm>
+          <a:prstGeom prst="ellipse">
+            <a:avLst/>
+          </a:prstGeom>
+          <a:solidFill>
+            <a:srgbClr val="EB5A50"/>
+          </a:solidFill>
+          <a:ln>
+            <a:noFill/>
+          </a:ln>
+        </p:spPr>
+        <p:style>
+          <a:lnRef idx="1">
+            <a:schemeClr val="accent1"/>
+          </a:lnRef>
+          <a:fillRef idx="3">
+            <a:schemeClr val="accent1"/>
+          </a:fillRef>
+          <a:effectRef idx="2">
+            <a:schemeClr val="accent1"/>
+          </a:effectRef>
+          <a:fontRef idx="minor">
+            <a:schemeClr val="lt1"/>
+          </a:fontRef>
+        </p:style>
+        <p:txBody>
+          <a:bodyPr rtlCol="0" anchor="ctr"/>
+          <a:lstStyle/>
+          <a:p>
+            <a:pPr algn="ctr"/>
+          </a:p>
+        </p:txBody>
+      </p:sp>
+      <p:sp>
+        <p:nvSpPr>
+          <p:cNvPr id="10" name="Oval 9"/>
+          <p:cNvSpPr/>
+          <p:nvPr/>
+        </p:nvSpPr>
+        <p:spPr>
+          <a:xfrm>
+            <a:off x="1115568" y="1609344"/>
+            <a:ext cx="73152" cy="73152"/>
+          </a:xfrm>
+          <a:prstGeom prst="ellipse">
+            <a:avLst/>
+          </a:prstGeom>
+          <a:solidFill>
+            <a:srgbClr val="F5B94B"/>
+          </a:solidFill>
+          <a:ln>
+            <a:noFill/>
+          </a:ln>
+        </p:spPr>
+        <p:style>
+          <a:lnRef idx="1">
+            <a:schemeClr val="accent1"/>
+          </a:lnRef>
+          <a:fillRef idx="3">
+            <a:schemeClr val="accent1"/>
+          </a:fillRef>
+          <a:effectRef idx="2">
+            <a:schemeClr val="accent1"/>
+          </a:effectRef>
+          <a:fontRef idx="minor">
+            <a:schemeClr val="lt1"/>
+          </a:fontRef>
+        </p:style>
+        <p:txBody>
+          <a:bodyPr rtlCol="0" anchor="ctr"/>
+          <a:lstStyle/>
+          <a:p>
+            <a:pPr algn="ctr"/>
+          </a:p>
+        </p:txBody>
+      </p:sp>
+      <p:sp>
+        <p:nvSpPr>
+          <p:cNvPr id="11" name="Oval 10"/>
+          <p:cNvSpPr/>
+          <p:nvPr/>
+        </p:nvSpPr>
+        <p:spPr>
+          <a:xfrm>
+            <a:off x="1243584" y="1609344"/>
+            <a:ext cx="73152" cy="73152"/>
+          </a:xfrm>
+          <a:prstGeom prst="ellipse">
+            <a:avLst/>
+          </a:prstGeom>
+          <a:solidFill>
+            <a:srgbClr val="2DC378"/>
+          </a:solidFill>
+          <a:ln>
+            <a:noFill/>
+          </a:ln>
+        </p:spPr>
+        <p:style>
+          <a:lnRef idx="1">
+            <a:schemeClr val="accent1"/>
+          </a:lnRef>
+          <a:fillRef idx="3">
+            <a:schemeClr val="accent1"/>
+          </a:fillRef>
+          <a:effectRef idx="2">
+            <a:schemeClr val="accent1"/>
+          </a:effectRef>
+          <a:fontRef idx="minor">
+            <a:schemeClr val="lt1"/>
+          </a:fontRef>
+        </p:style>
+        <p:txBody>
+          <a:bodyPr rtlCol="0" anchor="ctr"/>
+          <a:lstStyle/>
+          <a:p>
+            <a:pPr algn="ctr"/>
+          </a:p>
+        </p:txBody>
+      </p:sp>
+      <p:sp>
+        <p:nvSpPr>
+          <p:cNvPr id="12" name="TextBox 11"/>
+          <p:cNvSpPr txBox="1"/>
+          <p:nvPr/>
+        </p:nvSpPr>
+        <p:spPr>
+          <a:xfrm>
+            <a:off x="1399032" y="1554480"/>
+            <a:ext cx="4334256" cy="182880"/>
+          </a:xfrm>
+          <a:prstGeom prst="rect">
+            <a:avLst/>
+          </a:prstGeom>
+          <a:noFill/>
+        </p:spPr>
+        <p:txBody>
+          <a:bodyPr wrap="none" lIns="0" tIns="0" bIns="0" rIns="0">
+            <a:spAutoFit/>
+          </a:bodyPr>
+          <a:lstStyle/>
+          <a:p>
+            <a:pPr>
+              <a:defRPr sz="700">
+                <a:solidFill>
+                  <a:srgbClr val="AABED2"/>
+                </a:solidFill>
+                <a:latin typeface="Arial"/>
+              </a:defRPr>
+            </a:pPr>
+            <a:r>
+              <a:t>🔒  goldfields-bay.vercel.app/admin/login</a:t>
+            </a:r>
+          </a:p>
+        </p:txBody>
+      </p:sp>
       <p:pic>
         <p:nvPicPr>
-          <p:cNvPr id="8" name="Picture 7" descr="media_1790576120565.png"/>
+          <p:cNvPr id="13" name="Picture 12" descr="clean_admin_login.png"/>
           <p:cNvPicPr>
             <a:picLocks noChangeAspect="1"/>
           </p:cNvPicPr>
@@ -6011,8 +6886,8 @@
         </p:blipFill>
         <p:spPr>
           <a:xfrm>
-            <a:off x="868680" y="1645920"/>
-            <a:ext cx="5394960" cy="4004072"/>
+            <a:off x="1179576" y="1755648"/>
+            <a:ext cx="4361688" cy="2907792"/>
           </a:xfrm>
           <a:prstGeom prst="rect">
             <a:avLst/>
@@ -6021,14 +6896,14 @@
       </p:pic>
       <p:sp>
         <p:nvSpPr>
-          <p:cNvPr id="9" name="TextBox 8"/>
+          <p:cNvPr id="14" name="TextBox 13"/>
           <p:cNvSpPr txBox="1"/>
           <p:nvPr/>
         </p:nvSpPr>
         <p:spPr>
           <a:xfrm>
-            <a:off x="868680" y="5349240"/>
-            <a:ext cx="5394960" cy="731520"/>
+            <a:off x="896112" y="4736592"/>
+            <a:ext cx="4928616" cy="1115568"/>
           </a:xfrm>
           <a:prstGeom prst="rect">
             <a:avLst/>
@@ -6042,7 +6917,7 @@
           <a:lstStyle/>
           <a:p>
             <a:pPr>
-              <a:defRPr sz="850" b="1">
+              <a:defRPr sz="800" b="1">
                 <a:solidFill>
                   <a:srgbClr val="00E5C0"/>
                 </a:solidFill>
@@ -6055,32 +6930,37 @@
           </a:p>
           <a:p>
             <a:pPr>
-              <a:defRPr sz="800">
-                <a:solidFill>
-                  <a:srgbClr val="A5B9CD"/>
-                </a:solidFill>
-                <a:latin typeface="Arial"/>
-              </a:defRPr>
-            </a:pPr>
-            <a:r>
-              <a:t>Bank-grade authentication with encrypted session cookies and automated serverless failover.</a:t>
-            </a:r>
-          </a:p>
-        </p:txBody>
-      </p:sp>
-      <p:sp>
-        <p:nvSpPr>
-          <p:cNvPr id="10" name="Rounded Rectangle 9"/>
+              <a:spcBef>
+                <a:spcPts val="200"/>
+              </a:spcBef>
+              <a:defRPr sz="750">
+                <a:solidFill>
+                  <a:srgbClr val="AABED2"/>
+                </a:solidFill>
+                <a:latin typeface="Arial"/>
+              </a:defRPr>
+            </a:pPr>
+            <a:r>
+              <a:t>Bank-grade authentication with 5 one-click RBAC test personas and automated serverless failover.</a:t>
+            </a:r>
+          </a:p>
+        </p:txBody>
+      </p:sp>
+      <p:sp>
+        <p:nvSpPr>
+          <p:cNvPr id="15" name="Rounded Rectangle 14"/>
           <p:cNvSpPr/>
           <p:nvPr/>
         </p:nvSpPr>
         <p:spPr>
           <a:xfrm>
-            <a:off x="6656832" y="1508760"/>
-            <a:ext cx="4800600" cy="4709160"/>
+            <a:off x="6199632" y="1371600"/>
+            <a:ext cx="5257800" cy="4572000"/>
           </a:xfrm>
           <a:prstGeom prst="roundRect">
-            <a:avLst/>
+            <a:avLst>
+              <a:gd name="adj" fmla="val 3000"/>
+            </a:avLst>
           </a:prstGeom>
           <a:solidFill>
             <a:srgbClr val="0B3052"/>
@@ -6115,14 +6995,14 @@
       </p:sp>
       <p:sp>
         <p:nvSpPr>
-          <p:cNvPr id="11" name="TextBox 10"/>
+          <p:cNvPr id="16" name="TextBox 15"/>
           <p:cNvSpPr txBox="1"/>
           <p:nvPr/>
         </p:nvSpPr>
         <p:spPr>
           <a:xfrm>
-            <a:off x="6903720" y="1691640"/>
-            <a:ext cx="4297680" cy="4343400"/>
+            <a:off x="6446520" y="1536192"/>
+            <a:ext cx="4754880" cy="292608"/>
           </a:xfrm>
           <a:prstGeom prst="rect">
             <a:avLst/>
@@ -6147,117 +7027,23 @@
               <a:t>VERIFIED LIVE ACCESS &amp; CREDENTIALS</a:t>
             </a:r>
           </a:p>
-          <a:p>
-            <a:pPr>
-              <a:spcBef>
-                <a:spcPts val="1000"/>
-              </a:spcBef>
-              <a:defRPr sz="1000" b="1">
-                <a:solidFill>
-                  <a:srgbClr val="FFFFFF"/>
-                </a:solidFill>
-                <a:latin typeface="Arial"/>
-              </a:defRPr>
-            </a:pPr>
-            <a:r>
-              <a:t>Next.js 15.5+ App Router Architecture</a:t>
-            </a:r>
-          </a:p>
-          <a:p>
-            <a:pPr>
-              <a:spcBef>
-                <a:spcPts val="200"/>
-              </a:spcBef>
-              <a:defRPr sz="850">
-                <a:solidFill>
-                  <a:srgbClr val="A5B9CD"/>
-                </a:solidFill>
-                <a:latin typeface="Arial"/>
-              </a:defRPr>
-            </a:pPr>
-            <a:r>
-              <a:t>Built on React 19 Server Components with zero legacy JavaScript bloat, guaranteeing instant first-paint performance.</a:t>
-            </a:r>
-          </a:p>
-          <a:p>
-            <a:pPr>
-              <a:spcBef>
-                <a:spcPts val="1000"/>
-              </a:spcBef>
-              <a:defRPr sz="1000" b="1">
-                <a:solidFill>
-                  <a:srgbClr val="FFFFFF"/>
-                </a:solidFill>
-                <a:latin typeface="Arial"/>
-              </a:defRPr>
-            </a:pPr>
-            <a:r>
-              <a:t>Vercel Global Edge Network</a:t>
-            </a:r>
-          </a:p>
-          <a:p>
-            <a:pPr>
-              <a:spcBef>
-                <a:spcPts val="200"/>
-              </a:spcBef>
-              <a:defRPr sz="850">
-                <a:solidFill>
-                  <a:srgbClr val="A5B9CD"/>
-                </a:solidFill>
-                <a:latin typeface="Arial"/>
-              </a:defRPr>
-            </a:pPr>
-            <a:r>
-              <a:t>Deployed across 300+ edge points-of-presence globally, delivering sub-100ms response times worldwide with automatic DDoS mitigation.</a:t>
-            </a:r>
-          </a:p>
-          <a:p>
-            <a:pPr>
-              <a:spcBef>
-                <a:spcPts val="1000"/>
-              </a:spcBef>
-              <a:defRPr sz="1000" b="1">
-                <a:solidFill>
-                  <a:srgbClr val="FFFFFF"/>
-                </a:solidFill>
-                <a:latin typeface="Arial"/>
-              </a:defRPr>
-            </a:pPr>
-            <a:r>
-              <a:t>Distributed LibSQL / SQLite Engine</a:t>
-            </a:r>
-          </a:p>
-          <a:p>
-            <a:pPr>
-              <a:spcBef>
-                <a:spcPts val="200"/>
-              </a:spcBef>
-              <a:defRPr sz="850">
-                <a:solidFill>
-                  <a:srgbClr val="A5B9CD"/>
-                </a:solidFill>
-                <a:latin typeface="Arial"/>
-              </a:defRPr>
-            </a:pPr>
-            <a:r>
-              <a:t>ACID compliant transactional storage with automated serverless initialization and encrypted session cookies.</a:t>
-            </a:r>
-          </a:p>
-        </p:txBody>
-      </p:sp>
-      <p:sp>
-        <p:nvSpPr>
-          <p:cNvPr id="12" name="Rounded Rectangle 11"/>
+        </p:txBody>
+      </p:sp>
+      <p:sp>
+        <p:nvSpPr>
+          <p:cNvPr id="17" name="Rounded Rectangle 16"/>
           <p:cNvSpPr/>
           <p:nvPr/>
         </p:nvSpPr>
         <p:spPr>
           <a:xfrm>
-            <a:off x="6858000" y="2011680"/>
-            <a:ext cx="4389120" cy="1371600"/>
+            <a:off x="6446520" y="1874519"/>
+            <a:ext cx="4754880" cy="1280160"/>
           </a:xfrm>
           <a:prstGeom prst="roundRect">
-            <a:avLst/>
+            <a:avLst>
+              <a:gd name="adj" fmla="val 8571"/>
+            </a:avLst>
           </a:prstGeom>
           <a:solidFill>
             <a:srgbClr val="103A62"/>
@@ -6292,14 +7078,14 @@
       </p:sp>
       <p:sp>
         <p:nvSpPr>
-          <p:cNvPr id="13" name="TextBox 12"/>
+          <p:cNvPr id="18" name="TextBox 17"/>
           <p:cNvSpPr txBox="1"/>
           <p:nvPr/>
         </p:nvSpPr>
         <p:spPr>
           <a:xfrm>
-            <a:off x="6995160" y="2103120"/>
-            <a:ext cx="4114800" cy="1188720"/>
+            <a:off x="6583680" y="1965960"/>
+            <a:ext cx="4480560" cy="1097280"/>
           </a:xfrm>
           <a:prstGeom prst="rect">
             <a:avLst/>
@@ -6329,7 +7115,7 @@
               <a:spcBef>
                 <a:spcPts val="300"/>
               </a:spcBef>
-              <a:defRPr sz="900">
+              <a:defRPr sz="850">
                 <a:solidFill>
                   <a:srgbClr val="FFFFFF"/>
                 </a:solidFill>
@@ -6356,13 +7142,129 @@
       </p:sp>
       <p:sp>
         <p:nvSpPr>
-          <p:cNvPr id="14" name="Rectangle 13"/>
+          <p:cNvPr id="19" name="TextBox 18"/>
+          <p:cNvSpPr txBox="1"/>
+          <p:nvPr/>
+        </p:nvSpPr>
+        <p:spPr>
+          <a:xfrm>
+            <a:off x="6446520" y="3291840"/>
+            <a:ext cx="4754880" cy="2514600"/>
+          </a:xfrm>
+          <a:prstGeom prst="rect">
+            <a:avLst/>
+          </a:prstGeom>
+          <a:noFill/>
+        </p:spPr>
+        <p:txBody>
+          <a:bodyPr wrap="square" lIns="0" tIns="0" bIns="0" rIns="0">
+            <a:spAutoFit/>
+          </a:bodyPr>
+          <a:lstStyle/>
+          <a:p>
+            <a:pPr>
+              <a:defRPr sz="950" b="1">
+                <a:solidFill>
+                  <a:srgbClr val="FFFFFF"/>
+                </a:solidFill>
+                <a:latin typeface="Arial"/>
+              </a:defRPr>
+            </a:pPr>
+            <a:r>
+              <a:t>Next.js 15.5+ App Router Architecture</a:t>
+            </a:r>
+          </a:p>
+          <a:p>
+            <a:pPr>
+              <a:spcBef>
+                <a:spcPts val="100"/>
+              </a:spcBef>
+              <a:defRPr sz="750">
+                <a:solidFill>
+                  <a:srgbClr val="AABED2"/>
+                </a:solidFill>
+                <a:latin typeface="Arial"/>
+              </a:defRPr>
+            </a:pPr>
+            <a:r>
+              <a:t>Built on React 19 Server Components with zero legacy JavaScript bloat, guaranteeing instant first-paint performance.</a:t>
+            </a:r>
+          </a:p>
+          <a:p>
+            <a:pPr>
+              <a:spcBef>
+                <a:spcPts val="800"/>
+              </a:spcBef>
+              <a:defRPr sz="950" b="1">
+                <a:solidFill>
+                  <a:srgbClr val="FFFFFF"/>
+                </a:solidFill>
+                <a:latin typeface="Arial"/>
+              </a:defRPr>
+            </a:pPr>
+            <a:r>
+              <a:t>Vercel Global Edge Network</a:t>
+            </a:r>
+          </a:p>
+          <a:p>
+            <a:pPr>
+              <a:spcBef>
+                <a:spcPts val="100"/>
+              </a:spcBef>
+              <a:defRPr sz="750">
+                <a:solidFill>
+                  <a:srgbClr val="AABED2"/>
+                </a:solidFill>
+                <a:latin typeface="Arial"/>
+              </a:defRPr>
+            </a:pPr>
+            <a:r>
+              <a:t>Deployed across 300+ edge points-of-presence globally, delivering sub-100ms response times worldwide with automatic DDoS mitigation.</a:t>
+            </a:r>
+          </a:p>
+          <a:p>
+            <a:pPr>
+              <a:spcBef>
+                <a:spcPts val="800"/>
+              </a:spcBef>
+              <a:defRPr sz="950" b="1">
+                <a:solidFill>
+                  <a:srgbClr val="FFFFFF"/>
+                </a:solidFill>
+                <a:latin typeface="Arial"/>
+              </a:defRPr>
+            </a:pPr>
+            <a:r>
+              <a:t>Distributed LibSQL / SQLite Engine</a:t>
+            </a:r>
+          </a:p>
+          <a:p>
+            <a:pPr>
+              <a:spcBef>
+                <a:spcPts val="100"/>
+              </a:spcBef>
+              <a:defRPr sz="750">
+                <a:solidFill>
+                  <a:srgbClr val="AABED2"/>
+                </a:solidFill>
+                <a:latin typeface="Arial"/>
+              </a:defRPr>
+            </a:pPr>
+            <a:r>
+              <a:t>ACID compliant transactional storage with automated serverless initialization and encrypted session cookies.</a:t>
+            </a:r>
+          </a:p>
+        </p:txBody>
+      </p:sp>
+      <p:sp>
+        <p:nvSpPr>
+          <p:cNvPr id="20" name="Rectangle 19"/>
           <p:cNvSpPr/>
           <p:nvPr/>
         </p:nvSpPr>
         <p:spPr>
           <a:xfrm>
-            <a:off x="731520" y="6400800"/>
+            <a:off x="731520" y="6144768"/>
             <a:ext cx="10728655" cy="13716"/>
           </a:xfrm>
           <a:prstGeom prst="rect">
@@ -6399,13 +7301,13 @@
       </p:sp>
       <p:sp>
         <p:nvSpPr>
-          <p:cNvPr id="15" name="TextBox 14"/>
+          <p:cNvPr id="21" name="TextBox 20"/>
           <p:cNvSpPr txBox="1"/>
           <p:nvPr/>
         </p:nvSpPr>
         <p:spPr>
           <a:xfrm>
-            <a:off x="731520" y="6446520"/>
+            <a:off x="731520" y="6236208"/>
             <a:ext cx="8229600" cy="320040"/>
           </a:xfrm>
           <a:prstGeom prst="rect">
@@ -6420,9 +7322,9 @@
           <a:lstStyle/>
           <a:p>
             <a:pPr>
-              <a:defRPr sz="900">
-                <a:solidFill>
-                  <a:srgbClr val="A5B9CD"/>
+              <a:defRPr sz="850">
+                <a:solidFill>
+                  <a:srgbClr val="AABED2"/>
                 </a:solidFill>
                 <a:latin typeface="Arial"/>
               </a:defRPr>
@@ -6435,13 +7337,13 @@
       </p:sp>
       <p:sp>
         <p:nvSpPr>
-          <p:cNvPr id="16" name="TextBox 15"/>
+          <p:cNvPr id="22" name="TextBox 21"/>
           <p:cNvSpPr txBox="1"/>
           <p:nvPr/>
         </p:nvSpPr>
         <p:spPr>
           <a:xfrm>
-            <a:off x="9601200" y="6446520"/>
+            <a:off x="9601200" y="6236208"/>
             <a:ext cx="1858975" cy="320040"/>
           </a:xfrm>
           <a:prstGeom prst="rect">
@@ -6456,7 +7358,7 @@
           <a:lstStyle/>
           <a:p>
             <a:pPr algn="r">
-              <a:defRPr sz="900" b="1">
+              <a:defRPr sz="850" b="1">
                 <a:solidFill>
                   <a:srgbClr val="C8A064"/>
                 </a:solidFill>
@@ -6511,8 +7413,8 @@
         </p:blipFill>
         <p:spPr>
           <a:xfrm>
-            <a:off x="731520" y="365760"/>
-            <a:ext cx="1056315" cy="347472"/>
+            <a:off x="731520" y="320040"/>
+            <a:ext cx="889528" cy="292608"/>
           </a:xfrm>
           <a:prstGeom prst="rect">
             <a:avLst/>
@@ -6527,8 +7429,8 @@
         </p:nvSpPr>
         <p:spPr>
           <a:xfrm>
-            <a:off x="2011680" y="365760"/>
-            <a:ext cx="18288" cy="347472"/>
+            <a:off x="1920240" y="320040"/>
+            <a:ext cx="13716" cy="292608"/>
           </a:xfrm>
           <a:prstGeom prst="rect">
             <a:avLst/>
@@ -6570,8 +7472,8 @@
         </p:nvSpPr>
         <p:spPr>
           <a:xfrm>
-            <a:off x="2148840" y="365760"/>
-            <a:ext cx="4114800" cy="347472"/>
+            <a:off x="2057400" y="320040"/>
+            <a:ext cx="4114800" cy="292608"/>
           </a:xfrm>
           <a:prstGeom prst="rect">
             <a:avLst/>
@@ -6587,7 +7489,7 @@
             <a:pPr>
               <a:defRPr sz="850" b="1">
                 <a:solidFill>
-                  <a:srgbClr val="A5B9CD"/>
+                  <a:srgbClr val="AABED2"/>
                 </a:solidFill>
                 <a:latin typeface="Arial"/>
               </a:defRPr>
@@ -6606,11 +7508,13 @@
         </p:nvSpPr>
         <p:spPr>
           <a:xfrm>
-            <a:off x="8961120" y="329184"/>
-            <a:ext cx="2499055" cy="384048"/>
+            <a:off x="8961120" y="292608"/>
+            <a:ext cx="2499055" cy="329184"/>
           </a:xfrm>
           <a:prstGeom prst="roundRect">
-            <a:avLst/>
+            <a:avLst>
+              <a:gd name="adj" fmla="val 33333"/>
+            </a:avLst>
           </a:prstGeom>
           <a:solidFill>
             <a:srgbClr val="0B3052"/>
@@ -6636,7 +7540,7 @@
           </a:fontRef>
         </p:style>
         <p:txBody>
-          <a:bodyPr rtlCol="0" anchor="ctr" wrap="square" tIns="54864"/>
+          <a:bodyPr rtlCol="0" anchor="ctr" wrap="square" tIns="36576"/>
           <a:lstStyle/>
           <a:p>
             <a:pPr algn="ctr">
@@ -6661,8 +7565,8 @@
         </p:nvSpPr>
         <p:spPr>
           <a:xfrm>
-            <a:off x="731520" y="868680"/>
-            <a:ext cx="10728655" cy="594360"/>
+            <a:off x="731520" y="749808"/>
+            <a:ext cx="10728655" cy="438912"/>
           </a:xfrm>
           <a:prstGeom prst="rect">
             <a:avLst/>
@@ -6676,7 +7580,7 @@
           <a:lstStyle/>
           <a:p>
             <a:pPr>
-              <a:defRPr sz="2200" b="1">
+              <a:defRPr sz="2000" b="1">
                 <a:solidFill>
                   <a:srgbClr val="FFFFFF"/>
                 </a:solidFill>
@@ -6697,11 +7601,13 @@
         </p:nvSpPr>
         <p:spPr>
           <a:xfrm>
-            <a:off x="731520" y="1508760"/>
+            <a:off x="731520" y="1371600"/>
             <a:ext cx="10728655" cy="2011680"/>
           </a:xfrm>
           <a:prstGeom prst="roundRect">
-            <a:avLst/>
+            <a:avLst>
+              <a:gd name="adj" fmla="val 6818"/>
+            </a:avLst>
           </a:prstGeom>
           <a:solidFill>
             <a:srgbClr val="0B3052"/>
@@ -6742,8 +7648,8 @@
         </p:nvSpPr>
         <p:spPr>
           <a:xfrm>
-            <a:off x="960120" y="1645920"/>
-            <a:ext cx="10241280" cy="1737360"/>
+            <a:off x="960120" y="1508760"/>
+            <a:ext cx="10241280" cy="274320"/>
           </a:xfrm>
           <a:prstGeom prst="rect">
             <a:avLst/>
@@ -6772,14 +7678,61 @@
       </p:sp>
       <p:sp>
         <p:nvSpPr>
-          <p:cNvPr id="9" name="TextBox 8"/>
+          <p:cNvPr id="9" name="Rounded Rectangle 8"/>
+          <p:cNvSpPr/>
+          <p:nvPr/>
+        </p:nvSpPr>
+        <p:spPr>
+          <a:xfrm>
+            <a:off x="960120" y="1847088"/>
+            <a:ext cx="4983480" cy="1371600"/>
+          </a:xfrm>
+          <a:prstGeom prst="roundRect">
+            <a:avLst>
+              <a:gd name="adj" fmla="val 8000"/>
+            </a:avLst>
+          </a:prstGeom>
+          <a:solidFill>
+            <a:srgbClr val="103A62"/>
+          </a:solidFill>
+          <a:ln w="12700">
+            <a:solidFill>
+              <a:srgbClr val="00E5C0"/>
+            </a:solidFill>
+          </a:ln>
+        </p:spPr>
+        <p:style>
+          <a:lnRef idx="1">
+            <a:schemeClr val="accent1"/>
+          </a:lnRef>
+          <a:fillRef idx="3">
+            <a:schemeClr val="accent1"/>
+          </a:fillRef>
+          <a:effectRef idx="2">
+            <a:schemeClr val="accent1"/>
+          </a:effectRef>
+          <a:fontRef idx="minor">
+            <a:schemeClr val="lt1"/>
+          </a:fontRef>
+        </p:style>
+        <p:txBody>
+          <a:bodyPr rtlCol="0" anchor="ctr"/>
+          <a:lstStyle/>
+          <a:p>
+            <a:pPr algn="ctr"/>
+          </a:p>
+        </p:txBody>
+      </p:sp>
+      <p:sp>
+        <p:nvSpPr>
+          <p:cNvPr id="10" name="TextBox 9"/>
           <p:cNvSpPr txBox="1"/>
           <p:nvPr/>
         </p:nvSpPr>
         <p:spPr>
           <a:xfrm>
-            <a:off x="960120" y="1965960"/>
-            <a:ext cx="4937760" cy="1371600"/>
+            <a:off x="1115568" y="1938528"/>
+            <a:ext cx="4663440" cy="1188720"/>
           </a:xfrm>
           <a:prstGeom prst="rect">
             <a:avLst/>
@@ -6793,7 +7746,7 @@
           <a:lstStyle/>
           <a:p>
             <a:pPr>
-              <a:defRPr sz="1050" b="1">
+              <a:defRPr sz="950" b="1">
                 <a:solidFill>
                   <a:srgbClr val="C8A064"/>
                 </a:solidFill>
@@ -6807,9 +7760,9 @@
           <a:p>
             <a:pPr>
               <a:spcBef>
-                <a:spcPts val="300"/>
+                <a:spcPts val="200"/>
               </a:spcBef>
-              <a:defRPr sz="850">
+              <a:defRPr sz="800">
                 <a:solidFill>
                   <a:srgbClr val="FFFFFF"/>
                 </a:solidFill>
@@ -6824,14 +7777,61 @@
       </p:sp>
       <p:sp>
         <p:nvSpPr>
-          <p:cNvPr id="10" name="TextBox 9"/>
+          <p:cNvPr id="11" name="Rounded Rectangle 10"/>
+          <p:cNvSpPr/>
+          <p:nvPr/>
+        </p:nvSpPr>
+        <p:spPr>
+          <a:xfrm>
+            <a:off x="6217920" y="1847088"/>
+            <a:ext cx="4983480" cy="1371600"/>
+          </a:xfrm>
+          <a:prstGeom prst="roundRect">
+            <a:avLst>
+              <a:gd name="adj" fmla="val 8000"/>
+            </a:avLst>
+          </a:prstGeom>
+          <a:solidFill>
+            <a:srgbClr val="103A62"/>
+          </a:solidFill>
+          <a:ln w="12700">
+            <a:solidFill>
+              <a:srgbClr val="C8A064"/>
+            </a:solidFill>
+          </a:ln>
+        </p:spPr>
+        <p:style>
+          <a:lnRef idx="1">
+            <a:schemeClr val="accent1"/>
+          </a:lnRef>
+          <a:fillRef idx="3">
+            <a:schemeClr val="accent1"/>
+          </a:fillRef>
+          <a:effectRef idx="2">
+            <a:schemeClr val="accent1"/>
+          </a:effectRef>
+          <a:fontRef idx="minor">
+            <a:schemeClr val="lt1"/>
+          </a:fontRef>
+        </p:style>
+        <p:txBody>
+          <a:bodyPr rtlCol="0" anchor="ctr"/>
+          <a:lstStyle/>
+          <a:p>
+            <a:pPr algn="ctr"/>
+          </a:p>
+        </p:txBody>
+      </p:sp>
+      <p:sp>
+        <p:nvSpPr>
+          <p:cNvPr id="12" name="TextBox 11"/>
           <p:cNvSpPr txBox="1"/>
           <p:nvPr/>
         </p:nvSpPr>
         <p:spPr>
           <a:xfrm>
-            <a:off x="6217920" y="1965960"/>
-            <a:ext cx="4937760" cy="1371600"/>
+            <a:off x="6382512" y="1938528"/>
+            <a:ext cx="4663440" cy="1188720"/>
           </a:xfrm>
           <a:prstGeom prst="rect">
             <a:avLst/>
@@ -6845,7 +7845,7 @@
           <a:lstStyle/>
           <a:p>
             <a:pPr>
-              <a:defRPr sz="1050" b="1">
+              <a:defRPr sz="950" b="1">
                 <a:solidFill>
                   <a:srgbClr val="00E5C0"/>
                 </a:solidFill>
@@ -6859,9 +7859,9 @@
           <a:p>
             <a:pPr>
               <a:spcBef>
-                <a:spcPts val="300"/>
+                <a:spcPts val="200"/>
               </a:spcBef>
-              <a:defRPr sz="850">
+              <a:defRPr sz="800">
                 <a:solidFill>
                   <a:srgbClr val="FFFFFF"/>
                 </a:solidFill>
@@ -6876,17 +7876,19 @@
       </p:sp>
       <p:sp>
         <p:nvSpPr>
-          <p:cNvPr id="11" name="Rounded Rectangle 10"/>
+          <p:cNvPr id="13" name="Rounded Rectangle 12"/>
           <p:cNvSpPr/>
           <p:nvPr/>
         </p:nvSpPr>
         <p:spPr>
           <a:xfrm>
-            <a:off x="731520" y="3703320"/>
-            <a:ext cx="10728655" cy="2514600"/>
+            <a:off x="731520" y="3566160"/>
+            <a:ext cx="10728655" cy="2423160"/>
           </a:xfrm>
           <a:prstGeom prst="roundRect">
-            <a:avLst/>
+            <a:avLst>
+              <a:gd name="adj" fmla="val 5660"/>
+            </a:avLst>
           </a:prstGeom>
           <a:solidFill>
             <a:srgbClr val="0B3052"/>
@@ -6921,14 +7923,14 @@
       </p:sp>
       <p:sp>
         <p:nvSpPr>
-          <p:cNvPr id="12" name="TextBox 11"/>
+          <p:cNvPr id="14" name="TextBox 13"/>
           <p:cNvSpPr txBox="1"/>
           <p:nvPr/>
         </p:nvSpPr>
         <p:spPr>
           <a:xfrm>
-            <a:off x="960120" y="3840480"/>
-            <a:ext cx="10241280" cy="548640"/>
+            <a:off x="960120" y="3703320"/>
+            <a:ext cx="10241280" cy="502920"/>
           </a:xfrm>
           <a:prstGeom prst="rect">
             <a:avLst/>
@@ -6958,32 +7960,34 @@
               <a:spcBef>
                 <a:spcPts val="200"/>
               </a:spcBef>
-              <a:defRPr sz="850">
-                <a:solidFill>
-                  <a:srgbClr val="A5B9CD"/>
-                </a:solidFill>
-                <a:latin typeface="Arial"/>
-              </a:defRPr>
-            </a:pPr>
-            <a:r>
-              <a:t>By executing this platform handover document, Gold Fields Limited acknowledges the successful engineering and deployment of the Next-Generation Digital Flagship and Studio OS CMS in accordance with the enterprise delivery specifications.</a:t>
-            </a:r>
-          </a:p>
-        </p:txBody>
-      </p:sp>
-      <p:sp>
-        <p:nvSpPr>
-          <p:cNvPr id="13" name="Rounded Rectangle 12"/>
+              <a:defRPr sz="800">
+                <a:solidFill>
+                  <a:srgbClr val="AABED2"/>
+                </a:solidFill>
+                <a:latin typeface="Arial"/>
+              </a:defRPr>
+            </a:pPr>
+            <a:r>
+              <a:t>By executing this platform handover document, Gold Fields Limited acknowledges the successful engineering and deployment of the Next-Generation Digital Flagship and Studio OS CMS in accordance with enterprise delivery specifications.</a:t>
+            </a:r>
+          </a:p>
+        </p:txBody>
+      </p:sp>
+      <p:sp>
+        <p:nvSpPr>
+          <p:cNvPr id="15" name="Rounded Rectangle 14"/>
           <p:cNvSpPr/>
           <p:nvPr/>
         </p:nvSpPr>
         <p:spPr>
           <a:xfrm>
-            <a:off x="960120" y="4434840"/>
-            <a:ext cx="4937760" cy="1600200"/>
+            <a:off x="960120" y="4297680"/>
+            <a:ext cx="4983480" cy="1508760"/>
           </a:xfrm>
           <a:prstGeom prst="roundRect">
-            <a:avLst/>
+            <a:avLst>
+              <a:gd name="adj" fmla="val 7272"/>
+            </a:avLst>
           </a:prstGeom>
           <a:solidFill>
             <a:srgbClr val="103A62"/>
@@ -7018,14 +8022,14 @@
       </p:sp>
       <p:sp>
         <p:nvSpPr>
-          <p:cNvPr id="14" name="TextBox 13"/>
+          <p:cNvPr id="16" name="TextBox 15"/>
           <p:cNvSpPr txBox="1"/>
           <p:nvPr/>
         </p:nvSpPr>
         <p:spPr>
           <a:xfrm>
-            <a:off x="1143000" y="4526280"/>
-            <a:ext cx="4572000" cy="1371600"/>
+            <a:off x="1143000" y="4389120"/>
+            <a:ext cx="4572000" cy="1325880"/>
           </a:xfrm>
           <a:prstGeom prst="rect">
             <a:avLst/>
@@ -7039,7 +8043,7 @@
           <a:lstStyle/>
           <a:p>
             <a:pPr>
-              <a:defRPr sz="1100" b="1">
+              <a:defRPr sz="1000" b="1">
                 <a:solidFill>
                   <a:srgbClr val="C8A064"/>
                 </a:solidFill>
@@ -7053,9 +8057,9 @@
           <a:p>
             <a:pPr>
               <a:spcBef>
-                <a:spcPts val="400"/>
+                <a:spcPts val="300"/>
               </a:spcBef>
-              <a:defRPr sz="1600" b="1">
+              <a:defRPr sz="1500" b="1">
                 <a:solidFill>
                   <a:srgbClr val="FFFFFF"/>
                 </a:solidFill>
@@ -7070,13 +8074,13 @@
       </p:sp>
       <p:sp>
         <p:nvSpPr>
-          <p:cNvPr id="15" name="Rectangle 14"/>
+          <p:cNvPr id="17" name="Rectangle 16"/>
           <p:cNvSpPr/>
           <p:nvPr/>
         </p:nvSpPr>
         <p:spPr>
           <a:xfrm>
-            <a:off x="1143000" y="5349240"/>
+            <a:off x="1143000" y="5212080"/>
             <a:ext cx="4389120" cy="13716"/>
           </a:xfrm>
           <a:prstGeom prst="rect">
@@ -7113,14 +8117,14 @@
       </p:sp>
       <p:sp>
         <p:nvSpPr>
-          <p:cNvPr id="16" name="TextBox 15"/>
+          <p:cNvPr id="18" name="TextBox 17"/>
           <p:cNvSpPr txBox="1"/>
           <p:nvPr/>
         </p:nvSpPr>
         <p:spPr>
           <a:xfrm>
-            <a:off x="1143000" y="5440680"/>
-            <a:ext cx="4389120" cy="365760"/>
+            <a:off x="1143000" y="5303520"/>
+            <a:ext cx="4389120" cy="320040"/>
           </a:xfrm>
           <a:prstGeom prst="rect">
             <a:avLst/>
@@ -7134,9 +8138,9 @@
           <a:lstStyle/>
           <a:p>
             <a:pPr>
-              <a:defRPr sz="850">
-                <a:solidFill>
-                  <a:srgbClr val="A5B9CD"/>
+              <a:defRPr sz="800">
+                <a:solidFill>
+                  <a:srgbClr val="00E5C0"/>
                 </a:solidFill>
                 <a:latin typeface="Arial"/>
               </a:defRPr>
@@ -7149,17 +8153,19 @@
       </p:sp>
       <p:sp>
         <p:nvSpPr>
-          <p:cNvPr id="17" name="Rounded Rectangle 16"/>
+          <p:cNvPr id="19" name="Rounded Rectangle 18"/>
           <p:cNvSpPr/>
           <p:nvPr/>
         </p:nvSpPr>
         <p:spPr>
           <a:xfrm>
-            <a:off x="6217920" y="4434840"/>
-            <a:ext cx="4937760" cy="1600200"/>
+            <a:off x="6217920" y="4297680"/>
+            <a:ext cx="4983480" cy="1508760"/>
           </a:xfrm>
           <a:prstGeom prst="roundRect">
-            <a:avLst/>
+            <a:avLst>
+              <a:gd name="adj" fmla="val 7272"/>
+            </a:avLst>
           </a:prstGeom>
           <a:solidFill>
             <a:srgbClr val="103A62"/>
@@ -7194,14 +8200,14 @@
       </p:sp>
       <p:sp>
         <p:nvSpPr>
-          <p:cNvPr id="18" name="TextBox 17"/>
+          <p:cNvPr id="20" name="TextBox 19"/>
           <p:cNvSpPr txBox="1"/>
           <p:nvPr/>
         </p:nvSpPr>
         <p:spPr>
           <a:xfrm>
-            <a:off x="6400800" y="4526280"/>
-            <a:ext cx="4572000" cy="1371600"/>
+            <a:off x="6400800" y="4389120"/>
+            <a:ext cx="4572000" cy="1325880"/>
           </a:xfrm>
           <a:prstGeom prst="rect">
             <a:avLst/>
@@ -7215,7 +8221,7 @@
           <a:lstStyle/>
           <a:p>
             <a:pPr>
-              <a:defRPr sz="1100" b="1">
+              <a:defRPr sz="1000" b="1">
                 <a:solidFill>
                   <a:srgbClr val="00E5C0"/>
                 </a:solidFill>
@@ -7229,9 +8235,9 @@
           <a:p>
             <a:pPr>
               <a:spcBef>
-                <a:spcPts val="400"/>
+                <a:spcPts val="300"/>
               </a:spcBef>
-              <a:defRPr sz="1500" b="1">
+              <a:defRPr sz="1400" b="1">
                 <a:solidFill>
                   <a:srgbClr val="FFFFFF"/>
                 </a:solidFill>
@@ -7246,13 +8252,13 @@
       </p:sp>
       <p:sp>
         <p:nvSpPr>
-          <p:cNvPr id="19" name="Rectangle 18"/>
+          <p:cNvPr id="21" name="Rectangle 20"/>
           <p:cNvSpPr/>
           <p:nvPr/>
         </p:nvSpPr>
         <p:spPr>
           <a:xfrm>
-            <a:off x="6400800" y="5349240"/>
+            <a:off x="6400800" y="5212080"/>
             <a:ext cx="4389120" cy="13716"/>
           </a:xfrm>
           <a:prstGeom prst="rect">
@@ -7289,14 +8295,14 @@
       </p:sp>
       <p:sp>
         <p:nvSpPr>
-          <p:cNvPr id="20" name="TextBox 19"/>
+          <p:cNvPr id="22" name="TextBox 21"/>
           <p:cNvSpPr txBox="1"/>
           <p:nvPr/>
         </p:nvSpPr>
         <p:spPr>
           <a:xfrm>
-            <a:off x="6400800" y="5440680"/>
-            <a:ext cx="4389120" cy="365760"/>
+            <a:off x="6400800" y="5303520"/>
+            <a:ext cx="4389120" cy="320040"/>
           </a:xfrm>
           <a:prstGeom prst="rect">
             <a:avLst/>
@@ -7310,9 +8316,9 @@
           <a:lstStyle/>
           <a:p>
             <a:pPr>
-              <a:defRPr sz="850">
-                <a:solidFill>
-                  <a:srgbClr val="A5B9CD"/>
+              <a:defRPr sz="800">
+                <a:solidFill>
+                  <a:srgbClr val="AABED2"/>
                 </a:solidFill>
                 <a:latin typeface="Arial"/>
               </a:defRPr>
@@ -7325,13 +8331,13 @@
       </p:sp>
       <p:sp>
         <p:nvSpPr>
-          <p:cNvPr id="21" name="Rectangle 20"/>
+          <p:cNvPr id="23" name="Rectangle 22"/>
           <p:cNvSpPr/>
           <p:nvPr/>
         </p:nvSpPr>
         <p:spPr>
           <a:xfrm>
-            <a:off x="731520" y="6400800"/>
+            <a:off x="731520" y="6144768"/>
             <a:ext cx="10728655" cy="13716"/>
           </a:xfrm>
           <a:prstGeom prst="rect">
@@ -7368,13 +8374,13 @@
       </p:sp>
       <p:sp>
         <p:nvSpPr>
-          <p:cNvPr id="22" name="TextBox 21"/>
+          <p:cNvPr id="24" name="TextBox 23"/>
           <p:cNvSpPr txBox="1"/>
           <p:nvPr/>
         </p:nvSpPr>
         <p:spPr>
           <a:xfrm>
-            <a:off x="731520" y="6446520"/>
+            <a:off x="731520" y="6236208"/>
             <a:ext cx="8229600" cy="320040"/>
           </a:xfrm>
           <a:prstGeom prst="rect">
@@ -7389,9 +8395,9 @@
           <a:lstStyle/>
           <a:p>
             <a:pPr>
-              <a:defRPr sz="900">
-                <a:solidFill>
-                  <a:srgbClr val="A5B9CD"/>
+              <a:defRPr sz="850">
+                <a:solidFill>
+                  <a:srgbClr val="AABED2"/>
                 </a:solidFill>
                 <a:latin typeface="Arial"/>
               </a:defRPr>
@@ -7404,13 +8410,13 @@
       </p:sp>
       <p:sp>
         <p:nvSpPr>
-          <p:cNvPr id="23" name="TextBox 22"/>
+          <p:cNvPr id="25" name="TextBox 24"/>
           <p:cNvSpPr txBox="1"/>
           <p:nvPr/>
         </p:nvSpPr>
         <p:spPr>
           <a:xfrm>
-            <a:off x="9601200" y="6446520"/>
+            <a:off x="9601200" y="6236208"/>
             <a:ext cx="1858975" cy="320040"/>
           </a:xfrm>
           <a:prstGeom prst="rect">
@@ -7425,7 +8431,7 @@
           <a:lstStyle/>
           <a:p>
             <a:pPr algn="r">
-              <a:defRPr sz="900" b="1">
+              <a:defRPr sz="850" b="1">
                 <a:solidFill>
                   <a:srgbClr val="C8A064"/>
                 </a:solidFill>
@@ -7480,8 +8486,8 @@
         </p:blipFill>
         <p:spPr>
           <a:xfrm>
-            <a:off x="731520" y="365760"/>
-            <a:ext cx="1056315" cy="347472"/>
+            <a:off x="731520" y="320040"/>
+            <a:ext cx="889528" cy="292608"/>
           </a:xfrm>
           <a:prstGeom prst="rect">
             <a:avLst/>
@@ -7496,8 +8502,8 @@
         </p:nvSpPr>
         <p:spPr>
           <a:xfrm>
-            <a:off x="2011680" y="365760"/>
-            <a:ext cx="18288" cy="347472"/>
+            <a:off x="1920240" y="320040"/>
+            <a:ext cx="13716" cy="292608"/>
           </a:xfrm>
           <a:prstGeom prst="rect">
             <a:avLst/>
@@ -7539,8 +8545,8 @@
         </p:nvSpPr>
         <p:spPr>
           <a:xfrm>
-            <a:off x="2148840" y="365760"/>
-            <a:ext cx="4114800" cy="347472"/>
+            <a:off x="2057400" y="320040"/>
+            <a:ext cx="4114800" cy="292608"/>
           </a:xfrm>
           <a:prstGeom prst="rect">
             <a:avLst/>
@@ -7556,7 +8562,7 @@
             <a:pPr>
               <a:defRPr sz="850" b="1">
                 <a:solidFill>
-                  <a:srgbClr val="A5B9CD"/>
+                  <a:srgbClr val="AABED2"/>
                 </a:solidFill>
                 <a:latin typeface="Arial"/>
               </a:defRPr>
@@ -7575,11 +8581,13 @@
         </p:nvSpPr>
         <p:spPr>
           <a:xfrm>
-            <a:off x="8961120" y="329184"/>
-            <a:ext cx="2499055" cy="384048"/>
+            <a:off x="8961120" y="292608"/>
+            <a:ext cx="2499055" cy="329184"/>
           </a:xfrm>
           <a:prstGeom prst="roundRect">
-            <a:avLst/>
+            <a:avLst>
+              <a:gd name="adj" fmla="val 33333"/>
+            </a:avLst>
           </a:prstGeom>
           <a:solidFill>
             <a:srgbClr val="0B3052"/>
@@ -7605,7 +8613,7 @@
           </a:fontRef>
         </p:style>
         <p:txBody>
-          <a:bodyPr rtlCol="0" anchor="ctr" wrap="square" tIns="54864"/>
+          <a:bodyPr rtlCol="0" anchor="ctr" wrap="square" tIns="36576"/>
           <a:lstStyle/>
           <a:p>
             <a:pPr algn="ctr">
@@ -7630,8 +8638,8 @@
         </p:nvSpPr>
         <p:spPr>
           <a:xfrm>
-            <a:off x="731520" y="868680"/>
-            <a:ext cx="10728655" cy="594360"/>
+            <a:off x="731520" y="749808"/>
+            <a:ext cx="10728655" cy="438912"/>
           </a:xfrm>
           <a:prstGeom prst="rect">
             <a:avLst/>
@@ -7645,7 +8653,7 @@
           <a:lstStyle/>
           <a:p>
             <a:pPr>
-              <a:defRPr sz="2200" b="1">
+              <a:defRPr sz="2000" b="1">
                 <a:solidFill>
                   <a:srgbClr val="FFFFFF"/>
                 </a:solidFill>
@@ -7666,18 +8674,20 @@
         </p:nvSpPr>
         <p:spPr>
           <a:xfrm>
-            <a:off x="731520" y="1508760"/>
-            <a:ext cx="6217920" cy="4709160"/>
+            <a:off x="731520" y="1371600"/>
+            <a:ext cx="10728655" cy="868680"/>
           </a:xfrm>
           <a:prstGeom prst="roundRect">
-            <a:avLst/>
+            <a:avLst>
+              <a:gd name="adj" fmla="val 15789"/>
+            </a:avLst>
           </a:prstGeom>
           <a:solidFill>
             <a:srgbClr val="0B3052"/>
           </a:solidFill>
           <a:ln w="12700">
             <a:solidFill>
-              <a:srgbClr val="1A4B75"/>
+              <a:srgbClr val="00E5C0"/>
             </a:solidFill>
           </a:ln>
         </p:spPr>
@@ -7711,8 +8721,8 @@
         </p:nvSpPr>
         <p:spPr>
           <a:xfrm>
-            <a:off x="960120" y="1691640"/>
-            <a:ext cx="5760720" cy="4343400"/>
+            <a:off x="960120" y="1444752"/>
+            <a:ext cx="10241280" cy="731520"/>
           </a:xfrm>
           <a:prstGeom prst="rect">
             <a:avLst/>
@@ -7726,7 +8736,7 @@
           <a:lstStyle/>
           <a:p>
             <a:pPr>
-              <a:defRPr sz="950" b="1">
+              <a:defRPr sz="850" b="1">
                 <a:solidFill>
                   <a:srgbClr val="00E5C0"/>
                 </a:solidFill>
@@ -7740,161 +8750,17 @@
           <a:p>
             <a:pPr>
               <a:spcBef>
-                <a:spcPts val="400"/>
+                <a:spcPts val="200"/>
               </a:spcBef>
               <a:defRPr sz="1000">
                 <a:solidFill>
                   <a:srgbClr val="FFFFFF"/>
                 </a:solidFill>
-                <a:latin typeface="Arial"/>
-              </a:defRPr>
-            </a:pPr>
-            <a:r>
-              <a:t>Gold Fields Limited operates ten premier mining assets across six sovereign jurisdictions. Yet, corporate communications have historically been throttled by legacy agency turnaround times, static PDF disclosures, and rigid web infrastructure.</a:t>
-            </a:r>
-          </a:p>
-          <a:p>
-            <a:pPr>
-              <a:spcBef>
-                <a:spcPts val="400"/>
-              </a:spcBef>
-              <a:defRPr sz="1000">
-                <a:solidFill>
-                  <a:srgbClr val="A5B9CD"/>
-                </a:solidFill>
-                <a:latin typeface="Arial"/>
-              </a:defRPr>
-            </a:pPr>
-            <a:r>
-              <a:t>BastionGroup has engineered an enterprise-grade digital flagship coupled with the proprietary Studio OS Content Management Engine. This platform equips Gold Fields with four transformative capabilities:</a:t>
-            </a:r>
-          </a:p>
-          <a:p>
-            <a:pPr>
-              <a:spcBef>
-                <a:spcPts val="800"/>
-              </a:spcBef>
-              <a:defRPr sz="1050" b="1">
-                <a:solidFill>
-                  <a:srgbClr val="C8A064"/>
-                </a:solidFill>
-                <a:latin typeface="Arial"/>
-              </a:defRPr>
-            </a:pPr>
-            <a:r>
-              <a:t>01. Content Autonomy Without Code</a:t>
-            </a:r>
-          </a:p>
-          <a:p>
-            <a:pPr>
-              <a:spcBef>
-                <a:spcPts val="100"/>
-              </a:spcBef>
-              <a:defRPr sz="900">
-                <a:solidFill>
-                  <a:srgbClr val="FFFFFF"/>
-                </a:solidFill>
-                <a:latin typeface="Arial"/>
-              </a:defRPr>
-            </a:pPr>
-            <a:r>
-              <a:t>Corporate Affairs, PR, and IR teams can compose, update, and publish modular flagship sections in under 60 seconds with zero developer dependency.</a:t>
-            </a:r>
-          </a:p>
-          <a:p>
-            <a:pPr>
-              <a:spcBef>
-                <a:spcPts val="800"/>
-              </a:spcBef>
-              <a:defRPr sz="1050" b="1">
-                <a:solidFill>
-                  <a:srgbClr val="C8A064"/>
-                </a:solidFill>
-                <a:latin typeface="Arial"/>
-              </a:defRPr>
-            </a:pPr>
-            <a:r>
-              <a:t>02. Real-Time Operational &amp; Market Telemetry</a:t>
-            </a:r>
-          </a:p>
-          <a:p>
-            <a:pPr>
-              <a:spcBef>
-                <a:spcPts val="100"/>
-              </a:spcBef>
-              <a:defRPr sz="900">
-                <a:solidFill>
-                  <a:srgbClr val="FFFFFF"/>
-                </a:solidFill>
-                <a:latin typeface="Arial"/>
-              </a:defRPr>
-            </a:pPr>
-            <a:r>
-              <a:t>Live stock tracking (JSE &amp; NYSE: GFI), operational cost benchmarks (AISC $1,385/oz), and renewable power metrics (54%) streamed dynamically to stakeholders.</a:t>
-            </a:r>
-          </a:p>
-          <a:p>
-            <a:pPr>
-              <a:spcBef>
-                <a:spcPts val="800"/>
-              </a:spcBef>
-              <a:defRPr sz="1050" b="1">
-                <a:solidFill>
-                  <a:srgbClr val="C8A064"/>
-                </a:solidFill>
-                <a:latin typeface="Arial"/>
-              </a:defRPr>
-            </a:pPr>
-            <a:r>
-              <a:t>03. Institutional Capital Markets Experience</a:t>
-            </a:r>
-          </a:p>
-          <a:p>
-            <a:pPr>
-              <a:spcBef>
-                <a:spcPts val="100"/>
-              </a:spcBef>
-              <a:defRPr sz="900">
-                <a:solidFill>
-                  <a:srgbClr val="FFFFFF"/>
-                </a:solidFill>
-                <a:latin typeface="Arial"/>
-              </a:defRPr>
-            </a:pPr>
-            <a:r>
-              <a:t>Interactive H1 2026 earnings booklets, automated SENS/SEC regulatory feeds, and an AI Knowledge Copilot providing instant, cited answers to analyst queries.</a:t>
-            </a:r>
-          </a:p>
-          <a:p>
-            <a:pPr>
-              <a:spcBef>
-                <a:spcPts val="800"/>
-              </a:spcBef>
-              <a:defRPr sz="1050" b="1">
-                <a:solidFill>
-                  <a:srgbClr val="C8A064"/>
-                </a:solidFill>
-                <a:latin typeface="Arial"/>
-              </a:defRPr>
-            </a:pPr>
-            <a:r>
-              <a:t>04. 2030 ESG Accountability &amp; Geospatial Tracking</a:t>
-            </a:r>
-          </a:p>
-          <a:p>
-            <a:pPr>
-              <a:spcBef>
-                <a:spcPts val="100"/>
-              </a:spcBef>
-              <a:defRPr sz="900">
-                <a:solidFill>
-                  <a:srgbClr val="FFFFFF"/>
-                </a:solidFill>
-                <a:latin typeface="Arial"/>
-              </a:defRPr>
-            </a:pPr>
-            <a:r>
-              <a:t>Transparent tracking of all six 2030 ESG targets paired with a photorealistic 3D WebGL Earth Globe mapping all 10 operations.</a:t>
+                <a:latin typeface="Georgia"/>
+              </a:defRPr>
+            </a:pPr>
+            <a:r>
+              <a:t>Gold Fields operates 10 premier assets across 6 sovereign nations. BastionGroup has engineered an enterprise digital flagship that eliminates slow external agency retainers, replacing bottlenecks with instant in-house publishing, live operational telemetry, and bank-grade regulatory compliance.</a:t>
             </a:r>
           </a:p>
         </p:txBody>
@@ -7907,11 +8773,112 @@
         </p:nvSpPr>
         <p:spPr>
           <a:xfrm>
-            <a:off x="7178040" y="1508760"/>
-            <a:ext cx="2029968" cy="1371600"/>
+            <a:off x="731520" y="2377440"/>
+            <a:ext cx="5257800" cy="822960"/>
           </a:xfrm>
           <a:prstGeom prst="roundRect">
-            <a:avLst/>
+            <a:avLst>
+              <a:gd name="adj" fmla="val 16666"/>
+            </a:avLst>
+          </a:prstGeom>
+          <a:solidFill>
+            <a:srgbClr val="0B3052"/>
+          </a:solidFill>
+          <a:ln w="12700">
+            <a:solidFill>
+              <a:srgbClr val="00E5C0"/>
+            </a:solidFill>
+          </a:ln>
+        </p:spPr>
+        <p:style>
+          <a:lnRef idx="1">
+            <a:schemeClr val="accent1"/>
+          </a:lnRef>
+          <a:fillRef idx="3">
+            <a:schemeClr val="accent1"/>
+          </a:fillRef>
+          <a:effectRef idx="2">
+            <a:schemeClr val="accent1"/>
+          </a:effectRef>
+          <a:fontRef idx="minor">
+            <a:schemeClr val="lt1"/>
+          </a:fontRef>
+        </p:style>
+        <p:txBody>
+          <a:bodyPr rtlCol="0" anchor="ctr"/>
+          <a:lstStyle/>
+          <a:p>
+            <a:pPr algn="ctr"/>
+          </a:p>
+        </p:txBody>
+      </p:sp>
+      <p:sp>
+        <p:nvSpPr>
+          <p:cNvPr id="10" name="TextBox 9"/>
+          <p:cNvSpPr txBox="1"/>
+          <p:nvPr/>
+        </p:nvSpPr>
+        <p:spPr>
+          <a:xfrm>
+            <a:off x="896112" y="2468880"/>
+            <a:ext cx="4919472" cy="640080"/>
+          </a:xfrm>
+          <a:prstGeom prst="rect">
+            <a:avLst/>
+          </a:prstGeom>
+          <a:noFill/>
+        </p:spPr>
+        <p:txBody>
+          <a:bodyPr wrap="square" lIns="0" tIns="0" bIns="0" rIns="0">
+            <a:spAutoFit/>
+          </a:bodyPr>
+          <a:lstStyle/>
+          <a:p>
+            <a:pPr>
+              <a:defRPr sz="1000" b="1">
+                <a:solidFill>
+                  <a:srgbClr val="00E5C0"/>
+                </a:solidFill>
+                <a:latin typeface="Arial"/>
+              </a:defRPr>
+            </a:pPr>
+            <a:r>
+              <a:t>01. Content Autonomy (&lt; 60s)</a:t>
+            </a:r>
+          </a:p>
+          <a:p>
+            <a:pPr>
+              <a:spcBef>
+                <a:spcPts val="200"/>
+              </a:spcBef>
+              <a:defRPr sz="850">
+                <a:solidFill>
+                  <a:srgbClr val="FFFFFF"/>
+                </a:solidFill>
+                <a:latin typeface="Arial"/>
+              </a:defRPr>
+            </a:pPr>
+            <a:r>
+              <a:t>Corporate Affairs &amp; IR publish press releases, disclosures, and board bios without developer tickets.</a:t>
+            </a:r>
+          </a:p>
+        </p:txBody>
+      </p:sp>
+      <p:sp>
+        <p:nvSpPr>
+          <p:cNvPr id="11" name="Rounded Rectangle 10"/>
+          <p:cNvSpPr/>
+          <p:nvPr/>
+        </p:nvSpPr>
+        <p:spPr>
+          <a:xfrm>
+            <a:off x="731520" y="3310128"/>
+            <a:ext cx="5257800" cy="822960"/>
+          </a:xfrm>
+          <a:prstGeom prst="roundRect">
+            <a:avLst>
+              <a:gd name="adj" fmla="val 16666"/>
+            </a:avLst>
           </a:prstGeom>
           <a:solidFill>
             <a:srgbClr val="0B3052"/>
@@ -7946,14 +8913,14 @@
       </p:sp>
       <p:sp>
         <p:nvSpPr>
-          <p:cNvPr id="10" name="TextBox 9"/>
+          <p:cNvPr id="12" name="TextBox 11"/>
           <p:cNvSpPr txBox="1"/>
           <p:nvPr/>
         </p:nvSpPr>
         <p:spPr>
           <a:xfrm>
-            <a:off x="7315200" y="1618488"/>
-            <a:ext cx="1755648" cy="1152144"/>
+            <a:off x="896112" y="3401568"/>
+            <a:ext cx="4919472" cy="640080"/>
           </a:xfrm>
           <a:prstGeom prst="rect">
             <a:avLst/>
@@ -7967,15 +8934,15 @@
           <a:lstStyle/>
           <a:p>
             <a:pPr>
-              <a:defRPr sz="2200" b="1">
-                <a:solidFill>
-                  <a:srgbClr val="00E5C0"/>
-                </a:solidFill>
-                <a:latin typeface="Georgia"/>
-              </a:defRPr>
-            </a:pPr>
-            <a:r>
-              <a:t>&lt; 60s</a:t>
+              <a:defRPr sz="1000" b="1">
+                <a:solidFill>
+                  <a:srgbClr val="C8A064"/>
+                </a:solidFill>
+                <a:latin typeface="Arial"/>
+              </a:defRPr>
+            </a:pPr>
+            <a:r>
+              <a:t>02. Real-Time Telemetry Bar</a:t>
             </a:r>
           </a:p>
           <a:p>
@@ -7983,7 +8950,7 @@
               <a:spcBef>
                 <a:spcPts val="200"/>
               </a:spcBef>
-              <a:defRPr sz="850" b="1">
+              <a:defRPr sz="850">
                 <a:solidFill>
                   <a:srgbClr val="FFFFFF"/>
                 </a:solidFill>
@@ -7991,7 +8958,90 @@
               </a:defRPr>
             </a:pPr>
             <a:r>
-              <a:t>PUBLISHING VELOCITY</a:t>
+              <a:t>Live JSE &amp; NYSE share price, AISC cost guidance ($1,385/oz), and 54% renewable energy mix.</a:t>
+            </a:r>
+          </a:p>
+        </p:txBody>
+      </p:sp>
+      <p:sp>
+        <p:nvSpPr>
+          <p:cNvPr id="13" name="Rounded Rectangle 12"/>
+          <p:cNvSpPr/>
+          <p:nvPr/>
+        </p:nvSpPr>
+        <p:spPr>
+          <a:xfrm>
+            <a:off x="731520" y="4242816"/>
+            <a:ext cx="5257800" cy="822960"/>
+          </a:xfrm>
+          <a:prstGeom prst="roundRect">
+            <a:avLst>
+              <a:gd name="adj" fmla="val 16666"/>
+            </a:avLst>
+          </a:prstGeom>
+          <a:solidFill>
+            <a:srgbClr val="0B3052"/>
+          </a:solidFill>
+          <a:ln w="12700">
+            <a:solidFill>
+              <a:srgbClr val="00E5C0"/>
+            </a:solidFill>
+          </a:ln>
+        </p:spPr>
+        <p:style>
+          <a:lnRef idx="1">
+            <a:schemeClr val="accent1"/>
+          </a:lnRef>
+          <a:fillRef idx="3">
+            <a:schemeClr val="accent1"/>
+          </a:fillRef>
+          <a:effectRef idx="2">
+            <a:schemeClr val="accent1"/>
+          </a:effectRef>
+          <a:fontRef idx="minor">
+            <a:schemeClr val="lt1"/>
+          </a:fontRef>
+        </p:style>
+        <p:txBody>
+          <a:bodyPr rtlCol="0" anchor="ctr"/>
+          <a:lstStyle/>
+          <a:p>
+            <a:pPr algn="ctr"/>
+          </a:p>
+        </p:txBody>
+      </p:sp>
+      <p:sp>
+        <p:nvSpPr>
+          <p:cNvPr id="14" name="TextBox 13"/>
+          <p:cNvSpPr txBox="1"/>
+          <p:nvPr/>
+        </p:nvSpPr>
+        <p:spPr>
+          <a:xfrm>
+            <a:off x="896112" y="4334256"/>
+            <a:ext cx="4919472" cy="640080"/>
+          </a:xfrm>
+          <a:prstGeom prst="rect">
+            <a:avLst/>
+          </a:prstGeom>
+          <a:noFill/>
+        </p:spPr>
+        <p:txBody>
+          <a:bodyPr wrap="square" lIns="0" tIns="0" bIns="0" rIns="0">
+            <a:spAutoFit/>
+          </a:bodyPr>
+          <a:lstStyle/>
+          <a:p>
+            <a:pPr>
+              <a:defRPr sz="1000" b="1">
+                <a:solidFill>
+                  <a:srgbClr val="00E5C0"/>
+                </a:solidFill>
+                <a:latin typeface="Arial"/>
+              </a:defRPr>
+            </a:pPr>
+            <a:r>
+              <a:t>03. Institutional Capital Hub</a:t>
             </a:r>
           </a:p>
           <a:p>
@@ -7999,32 +9049,133 @@
               <a:spcBef>
                 <a:spcPts val="200"/>
               </a:spcBef>
-              <a:defRPr sz="750">
-                <a:solidFill>
-                  <a:srgbClr val="A5B9CD"/>
-                </a:solidFill>
-                <a:latin typeface="Arial"/>
-              </a:defRPr>
-            </a:pPr>
-            <a:r>
-              <a:t>From editorial draft to global edge CDN propagation</a:t>
-            </a:r>
-          </a:p>
-        </p:txBody>
-      </p:sp>
-      <p:sp>
-        <p:nvSpPr>
-          <p:cNvPr id="11" name="Rounded Rectangle 10"/>
+              <a:defRPr sz="850">
+                <a:solidFill>
+                  <a:srgbClr val="FFFFFF"/>
+                </a:solidFill>
+                <a:latin typeface="Arial"/>
+              </a:defRPr>
+            </a:pPr>
+            <a:r>
+              <a:t>Interactive H1 2026 earnings booklets, automated SENS/SEC wire, and an AI Knowledge Copilot.</a:t>
+            </a:r>
+          </a:p>
+        </p:txBody>
+      </p:sp>
+      <p:sp>
+        <p:nvSpPr>
+          <p:cNvPr id="15" name="Rounded Rectangle 14"/>
           <p:cNvSpPr/>
           <p:nvPr/>
         </p:nvSpPr>
         <p:spPr>
           <a:xfrm>
-            <a:off x="9400032" y="1508760"/>
-            <a:ext cx="2029968" cy="1371600"/>
+            <a:off x="731520" y="5175504"/>
+            <a:ext cx="5257800" cy="822960"/>
           </a:xfrm>
           <a:prstGeom prst="roundRect">
-            <a:avLst/>
+            <a:avLst>
+              <a:gd name="adj" fmla="val 16666"/>
+            </a:avLst>
+          </a:prstGeom>
+          <a:solidFill>
+            <a:srgbClr val="0B3052"/>
+          </a:solidFill>
+          <a:ln w="12700">
+            <a:solidFill>
+              <a:srgbClr val="1F6E43"/>
+            </a:solidFill>
+          </a:ln>
+        </p:spPr>
+        <p:style>
+          <a:lnRef idx="1">
+            <a:schemeClr val="accent1"/>
+          </a:lnRef>
+          <a:fillRef idx="3">
+            <a:schemeClr val="accent1"/>
+          </a:fillRef>
+          <a:effectRef idx="2">
+            <a:schemeClr val="accent1"/>
+          </a:effectRef>
+          <a:fontRef idx="minor">
+            <a:schemeClr val="lt1"/>
+          </a:fontRef>
+        </p:style>
+        <p:txBody>
+          <a:bodyPr rtlCol="0" anchor="ctr"/>
+          <a:lstStyle/>
+          <a:p>
+            <a:pPr algn="ctr"/>
+          </a:p>
+        </p:txBody>
+      </p:sp>
+      <p:sp>
+        <p:nvSpPr>
+          <p:cNvPr id="16" name="TextBox 15"/>
+          <p:cNvSpPr txBox="1"/>
+          <p:nvPr/>
+        </p:nvSpPr>
+        <p:spPr>
+          <a:xfrm>
+            <a:off x="896112" y="5266944"/>
+            <a:ext cx="4919472" cy="640080"/>
+          </a:xfrm>
+          <a:prstGeom prst="rect">
+            <a:avLst/>
+          </a:prstGeom>
+          <a:noFill/>
+        </p:spPr>
+        <p:txBody>
+          <a:bodyPr wrap="square" lIns="0" tIns="0" bIns="0" rIns="0">
+            <a:spAutoFit/>
+          </a:bodyPr>
+          <a:lstStyle/>
+          <a:p>
+            <a:pPr>
+              <a:defRPr sz="1000" b="1">
+                <a:solidFill>
+                  <a:srgbClr val="1F6E43"/>
+                </a:solidFill>
+                <a:latin typeface="Arial"/>
+              </a:defRPr>
+            </a:pPr>
+            <a:r>
+              <a:t>04. 2030 ESG Tracking Command</a:t>
+            </a:r>
+          </a:p>
+          <a:p>
+            <a:pPr>
+              <a:spcBef>
+                <a:spcPts val="200"/>
+              </a:spcBef>
+              <a:defRPr sz="850">
+                <a:solidFill>
+                  <a:srgbClr val="FFFFFF"/>
+                </a:solidFill>
+                <a:latin typeface="Arial"/>
+              </a:defRPr>
+            </a:pPr>
+            <a:r>
+              <a:t>Transparent milestone tracking across decarbonization, 50MW Khanyisa solar, and 100% GISTM tailings safety.</a:t>
+            </a:r>
+          </a:p>
+        </p:txBody>
+      </p:sp>
+      <p:sp>
+        <p:nvSpPr>
+          <p:cNvPr id="17" name="Rounded Rectangle 16"/>
+          <p:cNvSpPr/>
+          <p:nvPr/>
+        </p:nvSpPr>
+        <p:spPr>
+          <a:xfrm>
+            <a:off x="6199632" y="2377440"/>
+            <a:ext cx="2542032" cy="1188720"/>
+          </a:xfrm>
+          <a:prstGeom prst="roundRect">
+            <a:avLst>
+              <a:gd name="adj" fmla="val 11538"/>
+            </a:avLst>
           </a:prstGeom>
           <a:solidFill>
             <a:srgbClr val="0B3052"/>
@@ -8059,14 +9210,14 @@
       </p:sp>
       <p:sp>
         <p:nvSpPr>
-          <p:cNvPr id="12" name="TextBox 11"/>
+          <p:cNvPr id="18" name="TextBox 17"/>
           <p:cNvSpPr txBox="1"/>
           <p:nvPr/>
         </p:nvSpPr>
         <p:spPr>
           <a:xfrm>
-            <a:off x="9537192" y="1618488"/>
-            <a:ext cx="1755648" cy="1152144"/>
+            <a:off x="6336792" y="2468880"/>
+            <a:ext cx="2267712" cy="1005840"/>
           </a:xfrm>
           <a:prstGeom prst="rect">
             <a:avLst/>
@@ -8080,7 +9231,7 @@
           <a:lstStyle/>
           <a:p>
             <a:pPr>
-              <a:defRPr sz="2200" b="1">
+              <a:defRPr sz="2000" b="1">
                 <a:solidFill>
                   <a:srgbClr val="00E5C0"/>
                 </a:solidFill>
@@ -8088,15 +9239,15 @@
               </a:defRPr>
             </a:pPr>
             <a:r>
-              <a:t>0.8s</a:t>
+              <a:t>&lt; 60s</a:t>
             </a:r>
           </a:p>
           <a:p>
             <a:pPr>
               <a:spcBef>
-                <a:spcPts val="200"/>
+                <a:spcPts val="100"/>
               </a:spcBef>
-              <a:defRPr sz="850" b="1">
+              <a:defRPr sz="800" b="1">
                 <a:solidFill>
                   <a:srgbClr val="FFFFFF"/>
                 </a:solidFill>
@@ -8104,40 +9255,42 @@
               </a:defRPr>
             </a:pPr>
             <a:r>
-              <a:t>GLOBAL PAGE SPEED</a:t>
+              <a:t>PUBLISHING VELOCITY</a:t>
             </a:r>
           </a:p>
           <a:p>
             <a:pPr>
               <a:spcBef>
-                <a:spcPts val="200"/>
+                <a:spcPts val="100"/>
               </a:spcBef>
               <a:defRPr sz="750">
                 <a:solidFill>
-                  <a:srgbClr val="A5B9CD"/>
-                </a:solidFill>
-                <a:latin typeface="Arial"/>
-              </a:defRPr>
-            </a:pPr>
-            <a:r>
-              <a:t>Sub-second LCP benchmark across Johannesburg, London &amp; NY</a:t>
-            </a:r>
-          </a:p>
-        </p:txBody>
-      </p:sp>
-      <p:sp>
-        <p:nvSpPr>
-          <p:cNvPr id="13" name="Rounded Rectangle 12"/>
+                  <a:srgbClr val="AABED2"/>
+                </a:solidFill>
+                <a:latin typeface="Arial"/>
+              </a:defRPr>
+            </a:pPr>
+            <a:r>
+              <a:t>In-house release to global edge CDN</a:t>
+            </a:r>
+          </a:p>
+        </p:txBody>
+      </p:sp>
+      <p:sp>
+        <p:nvSpPr>
+          <p:cNvPr id="19" name="Rounded Rectangle 18"/>
           <p:cNvSpPr/>
           <p:nvPr/>
         </p:nvSpPr>
         <p:spPr>
           <a:xfrm>
-            <a:off x="7178040" y="3017520"/>
-            <a:ext cx="2029968" cy="1371600"/>
+            <a:off x="8915400" y="2377440"/>
+            <a:ext cx="2542032" cy="1188720"/>
           </a:xfrm>
           <a:prstGeom prst="roundRect">
-            <a:avLst/>
+            <a:avLst>
+              <a:gd name="adj" fmla="val 11538"/>
+            </a:avLst>
           </a:prstGeom>
           <a:solidFill>
             <a:srgbClr val="0B3052"/>
@@ -8172,14 +9325,14 @@
       </p:sp>
       <p:sp>
         <p:nvSpPr>
-          <p:cNvPr id="14" name="TextBox 13"/>
+          <p:cNvPr id="20" name="TextBox 19"/>
           <p:cNvSpPr txBox="1"/>
           <p:nvPr/>
         </p:nvSpPr>
         <p:spPr>
           <a:xfrm>
-            <a:off x="7315200" y="3127248"/>
-            <a:ext cx="1755648" cy="1152144"/>
+            <a:off x="9052560" y="2468880"/>
+            <a:ext cx="2267712" cy="1005840"/>
           </a:xfrm>
           <a:prstGeom prst="rect">
             <a:avLst/>
@@ -8193,7 +9346,7 @@
           <a:lstStyle/>
           <a:p>
             <a:pPr>
-              <a:defRPr sz="2200" b="1">
+              <a:defRPr sz="2000" b="1">
                 <a:solidFill>
                   <a:srgbClr val="00E5C0"/>
                 </a:solidFill>
@@ -8201,15 +9354,15 @@
               </a:defRPr>
             </a:pPr>
             <a:r>
-              <a:t>10 Mines</a:t>
+              <a:t>0.8s</a:t>
             </a:r>
           </a:p>
           <a:p>
             <a:pPr>
               <a:spcBef>
-                <a:spcPts val="200"/>
+                <a:spcPts val="100"/>
               </a:spcBef>
-              <a:defRPr sz="850" b="1">
+              <a:defRPr sz="800" b="1">
                 <a:solidFill>
                   <a:srgbClr val="FFFFFF"/>
                 </a:solidFill>
@@ -8217,40 +9370,42 @@
               </a:defRPr>
             </a:pPr>
             <a:r>
-              <a:t>GEOSPATIAL ASSETS</a:t>
+              <a:t>GLOBAL PAGE SPEED</a:t>
             </a:r>
           </a:p>
           <a:p>
             <a:pPr>
               <a:spcBef>
-                <a:spcPts val="200"/>
+                <a:spcPts val="100"/>
               </a:spcBef>
               <a:defRPr sz="750">
                 <a:solidFill>
-                  <a:srgbClr val="A5B9CD"/>
-                </a:solidFill>
-                <a:latin typeface="Arial"/>
-              </a:defRPr>
-            </a:pPr>
-            <a:r>
-              <a:t>Interactive 3D WebGL mapping across 6 sovereign nations</a:t>
-            </a:r>
-          </a:p>
-        </p:txBody>
-      </p:sp>
-      <p:sp>
-        <p:nvSpPr>
-          <p:cNvPr id="15" name="Rounded Rectangle 14"/>
+                  <a:srgbClr val="AABED2"/>
+                </a:solidFill>
+                <a:latin typeface="Arial"/>
+              </a:defRPr>
+            </a:pPr>
+            <a:r>
+              <a:t>Sub-second LCP benchmark across global capital hubs</a:t>
+            </a:r>
+          </a:p>
+        </p:txBody>
+      </p:sp>
+      <p:sp>
+        <p:nvSpPr>
+          <p:cNvPr id="21" name="Rounded Rectangle 20"/>
           <p:cNvSpPr/>
           <p:nvPr/>
         </p:nvSpPr>
         <p:spPr>
           <a:xfrm>
-            <a:off x="9400032" y="3017520"/>
-            <a:ext cx="2029968" cy="1371600"/>
+            <a:off x="6199632" y="3675888"/>
+            <a:ext cx="2542032" cy="1188720"/>
           </a:xfrm>
           <a:prstGeom prst="roundRect">
-            <a:avLst/>
+            <a:avLst>
+              <a:gd name="adj" fmla="val 11538"/>
+            </a:avLst>
           </a:prstGeom>
           <a:solidFill>
             <a:srgbClr val="0B3052"/>
@@ -8285,14 +9440,14 @@
       </p:sp>
       <p:sp>
         <p:nvSpPr>
-          <p:cNvPr id="16" name="TextBox 15"/>
+          <p:cNvPr id="22" name="TextBox 21"/>
           <p:cNvSpPr txBox="1"/>
           <p:nvPr/>
         </p:nvSpPr>
         <p:spPr>
           <a:xfrm>
-            <a:off x="9537192" y="3127248"/>
-            <a:ext cx="1755648" cy="1152144"/>
+            <a:off x="6336792" y="3767328"/>
+            <a:ext cx="2267712" cy="1005840"/>
           </a:xfrm>
           <a:prstGeom prst="rect">
             <a:avLst/>
@@ -8306,7 +9461,7 @@
           <a:lstStyle/>
           <a:p>
             <a:pPr>
-              <a:defRPr sz="2200" b="1">
+              <a:defRPr sz="2000" b="1">
                 <a:solidFill>
                   <a:srgbClr val="00E5C0"/>
                 </a:solidFill>
@@ -8314,15 +9469,15 @@
               </a:defRPr>
             </a:pPr>
             <a:r>
-              <a:t>100%</a:t>
+              <a:t>10 Mines</a:t>
             </a:r>
           </a:p>
           <a:p>
             <a:pPr>
               <a:spcBef>
-                <a:spcPts val="200"/>
+                <a:spcPts val="100"/>
               </a:spcBef>
-              <a:defRPr sz="850" b="1">
+              <a:defRPr sz="800" b="1">
                 <a:solidFill>
                   <a:srgbClr val="FFFFFF"/>
                 </a:solidFill>
@@ -8330,40 +9485,157 @@
               </a:defRPr>
             </a:pPr>
             <a:r>
-              <a:t>REGULATORY READY</a:t>
+              <a:t>GEOSPATIAL ASSETS</a:t>
             </a:r>
           </a:p>
           <a:p>
             <a:pPr>
               <a:spcBef>
-                <a:spcPts val="200"/>
+                <a:spcPts val="100"/>
               </a:spcBef>
               <a:defRPr sz="750">
                 <a:solidFill>
-                  <a:srgbClr val="A5B9CD"/>
-                </a:solidFill>
-                <a:latin typeface="Arial"/>
-              </a:defRPr>
-            </a:pPr>
-            <a:r>
-              <a:t>SENS / SEC compliance with SHA-256 cryptographic audit logs</a:t>
-            </a:r>
-          </a:p>
-        </p:txBody>
-      </p:sp>
-      <p:sp>
-        <p:nvSpPr>
-          <p:cNvPr id="17" name="Rounded Rectangle 16"/>
+                  <a:srgbClr val="AABED2"/>
+                </a:solidFill>
+                <a:latin typeface="Arial"/>
+              </a:defRPr>
+            </a:pPr>
+            <a:r>
+              <a:t>Interactive 3D WebGL mapping across 6 nations</a:t>
+            </a:r>
+          </a:p>
+        </p:txBody>
+      </p:sp>
+      <p:sp>
+        <p:nvSpPr>
+          <p:cNvPr id="23" name="Rounded Rectangle 22"/>
           <p:cNvSpPr/>
           <p:nvPr/>
         </p:nvSpPr>
         <p:spPr>
           <a:xfrm>
-            <a:off x="7178040" y="4663440"/>
-            <a:ext cx="4279392" cy="1554480"/>
+            <a:off x="8915400" y="3675888"/>
+            <a:ext cx="2542032" cy="1188720"/>
           </a:xfrm>
           <a:prstGeom prst="roundRect">
-            <a:avLst/>
+            <a:avLst>
+              <a:gd name="adj" fmla="val 11538"/>
+            </a:avLst>
+          </a:prstGeom>
+          <a:solidFill>
+            <a:srgbClr val="0B3052"/>
+          </a:solidFill>
+          <a:ln w="12700">
+            <a:solidFill>
+              <a:srgbClr val="C8A064"/>
+            </a:solidFill>
+          </a:ln>
+        </p:spPr>
+        <p:style>
+          <a:lnRef idx="1">
+            <a:schemeClr val="accent1"/>
+          </a:lnRef>
+          <a:fillRef idx="3">
+            <a:schemeClr val="accent1"/>
+          </a:fillRef>
+          <a:effectRef idx="2">
+            <a:schemeClr val="accent1"/>
+          </a:effectRef>
+          <a:fontRef idx="minor">
+            <a:schemeClr val="lt1"/>
+          </a:fontRef>
+        </p:style>
+        <p:txBody>
+          <a:bodyPr rtlCol="0" anchor="ctr"/>
+          <a:lstStyle/>
+          <a:p>
+            <a:pPr algn="ctr"/>
+          </a:p>
+        </p:txBody>
+      </p:sp>
+      <p:sp>
+        <p:nvSpPr>
+          <p:cNvPr id="24" name="TextBox 23"/>
+          <p:cNvSpPr txBox="1"/>
+          <p:nvPr/>
+        </p:nvSpPr>
+        <p:spPr>
+          <a:xfrm>
+            <a:off x="9052560" y="3767328"/>
+            <a:ext cx="2267712" cy="1005840"/>
+          </a:xfrm>
+          <a:prstGeom prst="rect">
+            <a:avLst/>
+          </a:prstGeom>
+          <a:noFill/>
+        </p:spPr>
+        <p:txBody>
+          <a:bodyPr wrap="square" lIns="0" tIns="0" bIns="0" rIns="0">
+            <a:spAutoFit/>
+          </a:bodyPr>
+          <a:lstStyle/>
+          <a:p>
+            <a:pPr>
+              <a:defRPr sz="2000" b="1">
+                <a:solidFill>
+                  <a:srgbClr val="00E5C0"/>
+                </a:solidFill>
+                <a:latin typeface="Georgia"/>
+              </a:defRPr>
+            </a:pPr>
+            <a:r>
+              <a:t>100%</a:t>
+            </a:r>
+          </a:p>
+          <a:p>
+            <a:pPr>
+              <a:spcBef>
+                <a:spcPts val="100"/>
+              </a:spcBef>
+              <a:defRPr sz="800" b="1">
+                <a:solidFill>
+                  <a:srgbClr val="FFFFFF"/>
+                </a:solidFill>
+                <a:latin typeface="Arial"/>
+              </a:defRPr>
+            </a:pPr>
+            <a:r>
+              <a:t>REGULATORY READY</a:t>
+            </a:r>
+          </a:p>
+          <a:p>
+            <a:pPr>
+              <a:spcBef>
+                <a:spcPts val="100"/>
+              </a:spcBef>
+              <a:defRPr sz="750">
+                <a:solidFill>
+                  <a:srgbClr val="AABED2"/>
+                </a:solidFill>
+                <a:latin typeface="Arial"/>
+              </a:defRPr>
+            </a:pPr>
+            <a:r>
+              <a:t>SENS / SEC compliance with cryptographic audit logs</a:t>
+            </a:r>
+          </a:p>
+        </p:txBody>
+      </p:sp>
+      <p:sp>
+        <p:nvSpPr>
+          <p:cNvPr id="25" name="Rounded Rectangle 24"/>
+          <p:cNvSpPr/>
+          <p:nvPr/>
+        </p:nvSpPr>
+        <p:spPr>
+          <a:xfrm>
+            <a:off x="6199632" y="5010912"/>
+            <a:ext cx="5257800" cy="1051560"/>
+          </a:xfrm>
+          <a:prstGeom prst="roundRect">
+            <a:avLst>
+              <a:gd name="adj" fmla="val 13043"/>
+            </a:avLst>
           </a:prstGeom>
           <a:solidFill>
             <a:srgbClr val="103A62"/>
@@ -8398,14 +9670,14 @@
       </p:sp>
       <p:sp>
         <p:nvSpPr>
-          <p:cNvPr id="18" name="TextBox 17"/>
+          <p:cNvPr id="26" name="TextBox 25"/>
           <p:cNvSpPr txBox="1"/>
           <p:nvPr/>
         </p:nvSpPr>
         <p:spPr>
           <a:xfrm>
-            <a:off x="7360920" y="4800600"/>
-            <a:ext cx="3913632" cy="1280160"/>
+            <a:off x="6382512" y="5084064"/>
+            <a:ext cx="4892040" cy="868680"/>
           </a:xfrm>
           <a:prstGeom prst="rect">
             <a:avLst/>
@@ -8419,7 +9691,7 @@
           <a:lstStyle/>
           <a:p>
             <a:pPr>
-              <a:defRPr sz="900" b="1">
+              <a:defRPr sz="850" b="1">
                 <a:solidFill>
                   <a:srgbClr val="C8A064"/>
                 </a:solidFill>
@@ -8427,15 +9699,15 @@
               </a:defRPr>
             </a:pPr>
             <a:r>
-              <a:t>BASTIONGROUP PARTNERSHIP COMMITMENT</a:t>
+              <a:t>BASTIONGROUP EXECUTIVE COMMITMENT</a:t>
             </a:r>
           </a:p>
           <a:p>
             <a:pPr>
               <a:spcBef>
-                <a:spcPts val="400"/>
+                <a:spcPts val="200"/>
               </a:spcBef>
-              <a:defRPr sz="900">
+              <a:defRPr sz="800">
                 <a:solidFill>
                   <a:srgbClr val="FFFFFF"/>
                 </a:solidFill>
@@ -8443,20 +9715,20 @@
               </a:defRPr>
             </a:pPr>
             <a:r>
-              <a:t>As South Africa's trusted corporate communications and investor reporting provider, BastionGroup considers itself an extension of your executive team. We combine battle-tested JSE blue-chip reporting rigour with bleeding-edge digital engineering.</a:t>
-            </a:r>
-          </a:p>
-        </p:txBody>
-      </p:sp>
-      <p:sp>
-        <p:nvSpPr>
-          <p:cNvPr id="19" name="Rectangle 18"/>
+              <a:t>As South Africa's trusted corporate communications and reporting partner, BastionGroup provides Gold Fields with an ongoing extension to your team — uniting JSE/NYSE reporting rigour with bleeding-edge digital engineering.</a:t>
+            </a:r>
+          </a:p>
+        </p:txBody>
+      </p:sp>
+      <p:sp>
+        <p:nvSpPr>
+          <p:cNvPr id="27" name="Rectangle 26"/>
           <p:cNvSpPr/>
           <p:nvPr/>
         </p:nvSpPr>
         <p:spPr>
           <a:xfrm>
-            <a:off x="731520" y="6400800"/>
+            <a:off x="731520" y="6144768"/>
             <a:ext cx="10728655" cy="13716"/>
           </a:xfrm>
           <a:prstGeom prst="rect">
@@ -8493,13 +9765,13 @@
       </p:sp>
       <p:sp>
         <p:nvSpPr>
-          <p:cNvPr id="20" name="TextBox 19"/>
+          <p:cNvPr id="28" name="TextBox 27"/>
           <p:cNvSpPr txBox="1"/>
           <p:nvPr/>
         </p:nvSpPr>
         <p:spPr>
           <a:xfrm>
-            <a:off x="731520" y="6446520"/>
+            <a:off x="731520" y="6236208"/>
             <a:ext cx="8229600" cy="320040"/>
           </a:xfrm>
           <a:prstGeom prst="rect">
@@ -8514,9 +9786,9 @@
           <a:lstStyle/>
           <a:p>
             <a:pPr>
-              <a:defRPr sz="900">
-                <a:solidFill>
-                  <a:srgbClr val="A5B9CD"/>
+              <a:defRPr sz="850">
+                <a:solidFill>
+                  <a:srgbClr val="AABED2"/>
                 </a:solidFill>
                 <a:latin typeface="Arial"/>
               </a:defRPr>
@@ -8529,13 +9801,13 @@
       </p:sp>
       <p:sp>
         <p:nvSpPr>
-          <p:cNvPr id="21" name="TextBox 20"/>
+          <p:cNvPr id="29" name="TextBox 28"/>
           <p:cNvSpPr txBox="1"/>
           <p:nvPr/>
         </p:nvSpPr>
         <p:spPr>
           <a:xfrm>
-            <a:off x="9601200" y="6446520"/>
+            <a:off x="9601200" y="6236208"/>
             <a:ext cx="1858975" cy="320040"/>
           </a:xfrm>
           <a:prstGeom prst="rect">
@@ -8550,7 +9822,7 @@
           <a:lstStyle/>
           <a:p>
             <a:pPr algn="r">
-              <a:defRPr sz="900" b="1">
+              <a:defRPr sz="850" b="1">
                 <a:solidFill>
                   <a:srgbClr val="C8A064"/>
                 </a:solidFill>
@@ -8605,8 +9877,8 @@
         </p:blipFill>
         <p:spPr>
           <a:xfrm>
-            <a:off x="731520" y="365760"/>
-            <a:ext cx="1056315" cy="347472"/>
+            <a:off x="731520" y="320040"/>
+            <a:ext cx="889528" cy="292608"/>
           </a:xfrm>
           <a:prstGeom prst="rect">
             <a:avLst/>
@@ -8621,8 +9893,8 @@
         </p:nvSpPr>
         <p:spPr>
           <a:xfrm>
-            <a:off x="2011680" y="365760"/>
-            <a:ext cx="18288" cy="347472"/>
+            <a:off x="1920240" y="320040"/>
+            <a:ext cx="13716" cy="292608"/>
           </a:xfrm>
           <a:prstGeom prst="rect">
             <a:avLst/>
@@ -8664,8 +9936,8 @@
         </p:nvSpPr>
         <p:spPr>
           <a:xfrm>
-            <a:off x="2148840" y="365760"/>
-            <a:ext cx="4114800" cy="347472"/>
+            <a:off x="2057400" y="320040"/>
+            <a:ext cx="4114800" cy="292608"/>
           </a:xfrm>
           <a:prstGeom prst="rect">
             <a:avLst/>
@@ -8681,7 +9953,7 @@
             <a:pPr>
               <a:defRPr sz="850" b="1">
                 <a:solidFill>
-                  <a:srgbClr val="A5B9CD"/>
+                  <a:srgbClr val="AABED2"/>
                 </a:solidFill>
                 <a:latin typeface="Arial"/>
               </a:defRPr>
@@ -8700,11 +9972,13 @@
         </p:nvSpPr>
         <p:spPr>
           <a:xfrm>
-            <a:off x="8961120" y="329184"/>
-            <a:ext cx="2499055" cy="384048"/>
+            <a:off x="8961120" y="292608"/>
+            <a:ext cx="2499055" cy="329184"/>
           </a:xfrm>
           <a:prstGeom prst="roundRect">
-            <a:avLst/>
+            <a:avLst>
+              <a:gd name="adj" fmla="val 33333"/>
+            </a:avLst>
           </a:prstGeom>
           <a:solidFill>
             <a:srgbClr val="0B3052"/>
@@ -8730,7 +10004,7 @@
           </a:fontRef>
         </p:style>
         <p:txBody>
-          <a:bodyPr rtlCol="0" anchor="ctr" wrap="square" tIns="54864"/>
+          <a:bodyPr rtlCol="0" anchor="ctr" wrap="square" tIns="36576"/>
           <a:lstStyle/>
           <a:p>
             <a:pPr algn="ctr">
@@ -8755,8 +10029,8 @@
         </p:nvSpPr>
         <p:spPr>
           <a:xfrm>
-            <a:off x="731520" y="868680"/>
-            <a:ext cx="10728655" cy="594360"/>
+            <a:off x="731520" y="749808"/>
+            <a:ext cx="10728655" cy="438912"/>
           </a:xfrm>
           <a:prstGeom prst="rect">
             <a:avLst/>
@@ -8770,7 +10044,7 @@
           <a:lstStyle/>
           <a:p>
             <a:pPr>
-              <a:defRPr sz="2200" b="1">
+              <a:defRPr sz="2000" b="1">
                 <a:solidFill>
                   <a:srgbClr val="FFFFFF"/>
                 </a:solidFill>
@@ -8791,11 +10065,13 @@
         </p:nvSpPr>
         <p:spPr>
           <a:xfrm>
-            <a:off x="731520" y="1508760"/>
-            <a:ext cx="10728655" cy="713232"/>
+            <a:off x="731520" y="1371600"/>
+            <a:ext cx="10728655" cy="658368"/>
           </a:xfrm>
           <a:prstGeom prst="roundRect">
-            <a:avLst/>
+            <a:avLst>
+              <a:gd name="adj" fmla="val 20833"/>
+            </a:avLst>
           </a:prstGeom>
           <a:solidFill>
             <a:srgbClr val="0B3052"/>
@@ -8836,8 +10112,8 @@
         </p:nvSpPr>
         <p:spPr>
           <a:xfrm>
-            <a:off x="914400" y="1618488"/>
-            <a:ext cx="2286000" cy="502920"/>
+            <a:off x="914400" y="1481328"/>
+            <a:ext cx="2194560" cy="457200"/>
           </a:xfrm>
           <a:prstGeom prst="rect">
             <a:avLst/>
@@ -8851,7 +10127,7 @@
           <a:lstStyle/>
           <a:p>
             <a:pPr>
-              <a:defRPr sz="1100" b="1">
+              <a:defRPr sz="1050" b="1">
                 <a:solidFill>
                   <a:srgbClr val="00E5C0"/>
                 </a:solidFill>
@@ -8872,8 +10148,8 @@
         </p:nvSpPr>
         <p:spPr>
           <a:xfrm>
-            <a:off x="3291840" y="1600200"/>
-            <a:ext cx="3566160" cy="530352"/>
+            <a:off x="3200400" y="1444752"/>
+            <a:ext cx="3657600" cy="502920"/>
           </a:xfrm>
           <a:prstGeom prst="rect">
             <a:avLst/>
@@ -8889,7 +10165,7 @@
             <a:pPr>
               <a:defRPr sz="750" b="1">
                 <a:solidFill>
-                  <a:srgbClr val="DC6464"/>
+                  <a:srgbClr val="E66464"/>
                 </a:solidFill>
                 <a:latin typeface="Arial"/>
               </a:defRPr>
@@ -8903,9 +10179,9 @@
               <a:spcBef>
                 <a:spcPts val="100"/>
               </a:spcBef>
-              <a:defRPr sz="850">
-                <a:solidFill>
-                  <a:srgbClr val="A5B9CD"/>
+              <a:defRPr sz="800">
+                <a:solidFill>
+                  <a:srgbClr val="AABED2"/>
                 </a:solidFill>
                 <a:latin typeface="Arial"/>
               </a:defRPr>
@@ -8924,8 +10200,8 @@
         </p:nvSpPr>
         <p:spPr>
           <a:xfrm>
-            <a:off x="6949440" y="1764792"/>
-            <a:ext cx="228600" cy="164592"/>
+            <a:off x="6949440" y="1591056"/>
+            <a:ext cx="201168" cy="146304"/>
           </a:xfrm>
           <a:prstGeom prst="rightArrow">
             <a:avLst/>
@@ -8967,8 +10243,8 @@
         </p:nvSpPr>
         <p:spPr>
           <a:xfrm>
-            <a:off x="7315200" y="1600200"/>
-            <a:ext cx="3931920" cy="530352"/>
+            <a:off x="7269480" y="1444752"/>
+            <a:ext cx="3977639" cy="502920"/>
           </a:xfrm>
           <a:prstGeom prst="rect">
             <a:avLst/>
@@ -8998,7 +10274,7 @@
               <a:spcBef>
                 <a:spcPts val="100"/>
               </a:spcBef>
-              <a:defRPr sz="850">
+              <a:defRPr sz="800">
                 <a:solidFill>
                   <a:srgbClr val="FFFFFF"/>
                 </a:solidFill>
@@ -9019,11 +10295,13 @@
         </p:nvSpPr>
         <p:spPr>
           <a:xfrm>
-            <a:off x="731520" y="2286000"/>
-            <a:ext cx="10728655" cy="713232"/>
+            <a:off x="731520" y="2148840"/>
+            <a:ext cx="10728655" cy="658368"/>
           </a:xfrm>
           <a:prstGeom prst="roundRect">
-            <a:avLst/>
+            <a:avLst>
+              <a:gd name="adj" fmla="val 20833"/>
+            </a:avLst>
           </a:prstGeom>
           <a:solidFill>
             <a:srgbClr val="0B3052"/>
@@ -9064,8 +10342,8 @@
         </p:nvSpPr>
         <p:spPr>
           <a:xfrm>
-            <a:off x="914400" y="2395728"/>
-            <a:ext cx="2286000" cy="502920"/>
+            <a:off x="914400" y="2258568"/>
+            <a:ext cx="2194560" cy="457200"/>
           </a:xfrm>
           <a:prstGeom prst="rect">
             <a:avLst/>
@@ -9079,7 +10357,7 @@
           <a:lstStyle/>
           <a:p>
             <a:pPr>
-              <a:defRPr sz="1100" b="1">
+              <a:defRPr sz="1050" b="1">
                 <a:solidFill>
                   <a:srgbClr val="00E5C0"/>
                 </a:solidFill>
@@ -9100,8 +10378,8 @@
         </p:nvSpPr>
         <p:spPr>
           <a:xfrm>
-            <a:off x="3291840" y="2377440"/>
-            <a:ext cx="3566160" cy="530352"/>
+            <a:off x="3200400" y="2221992"/>
+            <a:ext cx="3657600" cy="502920"/>
           </a:xfrm>
           <a:prstGeom prst="rect">
             <a:avLst/>
@@ -9117,7 +10395,7 @@
             <a:pPr>
               <a:defRPr sz="750" b="1">
                 <a:solidFill>
-                  <a:srgbClr val="DC6464"/>
+                  <a:srgbClr val="E66464"/>
                 </a:solidFill>
                 <a:latin typeface="Arial"/>
               </a:defRPr>
@@ -9131,9 +10409,9 @@
               <a:spcBef>
                 <a:spcPts val="100"/>
               </a:spcBef>
-              <a:defRPr sz="850">
-                <a:solidFill>
-                  <a:srgbClr val="A5B9CD"/>
+              <a:defRPr sz="800">
+                <a:solidFill>
+                  <a:srgbClr val="AABED2"/>
                 </a:solidFill>
                 <a:latin typeface="Arial"/>
               </a:defRPr>
@@ -9152,8 +10430,8 @@
         </p:nvSpPr>
         <p:spPr>
           <a:xfrm>
-            <a:off x="6949440" y="2542032"/>
-            <a:ext cx="228600" cy="164592"/>
+            <a:off x="6949440" y="2368296"/>
+            <a:ext cx="201168" cy="146304"/>
           </a:xfrm>
           <a:prstGeom prst="rightArrow">
             <a:avLst/>
@@ -9195,8 +10473,8 @@
         </p:nvSpPr>
         <p:spPr>
           <a:xfrm>
-            <a:off x="7315200" y="2377440"/>
-            <a:ext cx="3931920" cy="530352"/>
+            <a:off x="7269480" y="2221992"/>
+            <a:ext cx="3977639" cy="502920"/>
           </a:xfrm>
           <a:prstGeom prst="rect">
             <a:avLst/>
@@ -9226,7 +10504,7 @@
               <a:spcBef>
                 <a:spcPts val="100"/>
               </a:spcBef>
-              <a:defRPr sz="850">
+              <a:defRPr sz="800">
                 <a:solidFill>
                   <a:srgbClr val="FFFFFF"/>
                 </a:solidFill>
@@ -9247,11 +10525,13 @@
         </p:nvSpPr>
         <p:spPr>
           <a:xfrm>
-            <a:off x="731520" y="3063240"/>
-            <a:ext cx="10728655" cy="713232"/>
+            <a:off x="731520" y="2926080"/>
+            <a:ext cx="10728655" cy="658368"/>
           </a:xfrm>
           <a:prstGeom prst="roundRect">
-            <a:avLst/>
+            <a:avLst>
+              <a:gd name="adj" fmla="val 20833"/>
+            </a:avLst>
           </a:prstGeom>
           <a:solidFill>
             <a:srgbClr val="0B3052"/>
@@ -9292,8 +10572,8 @@
         </p:nvSpPr>
         <p:spPr>
           <a:xfrm>
-            <a:off x="914400" y="3172968"/>
-            <a:ext cx="2286000" cy="502920"/>
+            <a:off x="914400" y="3035808"/>
+            <a:ext cx="2194560" cy="457200"/>
           </a:xfrm>
           <a:prstGeom prst="rect">
             <a:avLst/>
@@ -9307,7 +10587,7 @@
           <a:lstStyle/>
           <a:p>
             <a:pPr>
-              <a:defRPr sz="1100" b="1">
+              <a:defRPr sz="1050" b="1">
                 <a:solidFill>
                   <a:srgbClr val="C8A064"/>
                 </a:solidFill>
@@ -9328,8 +10608,8 @@
         </p:nvSpPr>
         <p:spPr>
           <a:xfrm>
-            <a:off x="3291840" y="3154680"/>
-            <a:ext cx="3566160" cy="530352"/>
+            <a:off x="3200400" y="2999232"/>
+            <a:ext cx="3657600" cy="502920"/>
           </a:xfrm>
           <a:prstGeom prst="rect">
             <a:avLst/>
@@ -9345,7 +10625,7 @@
             <a:pPr>
               <a:defRPr sz="750" b="1">
                 <a:solidFill>
-                  <a:srgbClr val="DC6464"/>
+                  <a:srgbClr val="E66464"/>
                 </a:solidFill>
                 <a:latin typeface="Arial"/>
               </a:defRPr>
@@ -9359,9 +10639,9 @@
               <a:spcBef>
                 <a:spcPts val="100"/>
               </a:spcBef>
-              <a:defRPr sz="850">
-                <a:solidFill>
-                  <a:srgbClr val="A5B9CD"/>
+              <a:defRPr sz="800">
+                <a:solidFill>
+                  <a:srgbClr val="AABED2"/>
                 </a:solidFill>
                 <a:latin typeface="Arial"/>
               </a:defRPr>
@@ -9380,8 +10660,8 @@
         </p:nvSpPr>
         <p:spPr>
           <a:xfrm>
-            <a:off x="6949440" y="3319272"/>
-            <a:ext cx="228600" cy="164592"/>
+            <a:off x="6949440" y="3145536"/>
+            <a:ext cx="201168" cy="146304"/>
           </a:xfrm>
           <a:prstGeom prst="rightArrow">
             <a:avLst/>
@@ -9423,8 +10703,8 @@
         </p:nvSpPr>
         <p:spPr>
           <a:xfrm>
-            <a:off x="7315200" y="3154680"/>
-            <a:ext cx="3931920" cy="530352"/>
+            <a:off x="7269480" y="2999232"/>
+            <a:ext cx="3977639" cy="502920"/>
           </a:xfrm>
           <a:prstGeom prst="rect">
             <a:avLst/>
@@ -9454,7 +10734,7 @@
               <a:spcBef>
                 <a:spcPts val="100"/>
               </a:spcBef>
-              <a:defRPr sz="850">
+              <a:defRPr sz="800">
                 <a:solidFill>
                   <a:srgbClr val="FFFFFF"/>
                 </a:solidFill>
@@ -9475,11 +10755,13 @@
         </p:nvSpPr>
         <p:spPr>
           <a:xfrm>
-            <a:off x="731520" y="3840480"/>
-            <a:ext cx="10728655" cy="713232"/>
+            <a:off x="731520" y="3703320"/>
+            <a:ext cx="10728655" cy="658368"/>
           </a:xfrm>
           <a:prstGeom prst="roundRect">
-            <a:avLst/>
+            <a:avLst>
+              <a:gd name="adj" fmla="val 20833"/>
+            </a:avLst>
           </a:prstGeom>
           <a:solidFill>
             <a:srgbClr val="0B3052"/>
@@ -9520,8 +10802,8 @@
         </p:nvSpPr>
         <p:spPr>
           <a:xfrm>
-            <a:off x="914400" y="3950208"/>
-            <a:ext cx="2286000" cy="502920"/>
+            <a:off x="914400" y="3813048"/>
+            <a:ext cx="2194560" cy="457200"/>
           </a:xfrm>
           <a:prstGeom prst="rect">
             <a:avLst/>
@@ -9535,7 +10817,7 @@
           <a:lstStyle/>
           <a:p>
             <a:pPr>
-              <a:defRPr sz="1100" b="1">
+              <a:defRPr sz="1050" b="1">
                 <a:solidFill>
                   <a:srgbClr val="1F6E43"/>
                 </a:solidFill>
@@ -9556,8 +10838,8 @@
         </p:nvSpPr>
         <p:spPr>
           <a:xfrm>
-            <a:off x="3291840" y="3931920"/>
-            <a:ext cx="3566160" cy="530352"/>
+            <a:off x="3200400" y="3776472"/>
+            <a:ext cx="3657600" cy="502920"/>
           </a:xfrm>
           <a:prstGeom prst="rect">
             <a:avLst/>
@@ -9573,7 +10855,7 @@
             <a:pPr>
               <a:defRPr sz="750" b="1">
                 <a:solidFill>
-                  <a:srgbClr val="DC6464"/>
+                  <a:srgbClr val="E66464"/>
                 </a:solidFill>
                 <a:latin typeface="Arial"/>
               </a:defRPr>
@@ -9587,9 +10869,9 @@
               <a:spcBef>
                 <a:spcPts val="100"/>
               </a:spcBef>
-              <a:defRPr sz="850">
-                <a:solidFill>
-                  <a:srgbClr val="A5B9CD"/>
+              <a:defRPr sz="800">
+                <a:solidFill>
+                  <a:srgbClr val="AABED2"/>
                 </a:solidFill>
                 <a:latin typeface="Arial"/>
               </a:defRPr>
@@ -9608,8 +10890,8 @@
         </p:nvSpPr>
         <p:spPr>
           <a:xfrm>
-            <a:off x="6949440" y="4096512"/>
-            <a:ext cx="228600" cy="164592"/>
+            <a:off x="6949440" y="3922776"/>
+            <a:ext cx="201168" cy="146304"/>
           </a:xfrm>
           <a:prstGeom prst="rightArrow">
             <a:avLst/>
@@ -9651,8 +10933,8 @@
         </p:nvSpPr>
         <p:spPr>
           <a:xfrm>
-            <a:off x="7315200" y="3931920"/>
-            <a:ext cx="3931920" cy="530352"/>
+            <a:off x="7269480" y="3776472"/>
+            <a:ext cx="3977639" cy="502920"/>
           </a:xfrm>
           <a:prstGeom prst="rect">
             <a:avLst/>
@@ -9682,7 +10964,7 @@
               <a:spcBef>
                 <a:spcPts val="100"/>
               </a:spcBef>
-              <a:defRPr sz="850">
+              <a:defRPr sz="800">
                 <a:solidFill>
                   <a:srgbClr val="FFFFFF"/>
                 </a:solidFill>
@@ -9703,11 +10985,13 @@
         </p:nvSpPr>
         <p:spPr>
           <a:xfrm>
-            <a:off x="731520" y="4617720"/>
-            <a:ext cx="10728655" cy="713232"/>
+            <a:off x="731520" y="4480560"/>
+            <a:ext cx="10728655" cy="658368"/>
           </a:xfrm>
           <a:prstGeom prst="roundRect">
-            <a:avLst/>
+            <a:avLst>
+              <a:gd name="adj" fmla="val 20833"/>
+            </a:avLst>
           </a:prstGeom>
           <a:solidFill>
             <a:srgbClr val="0B3052"/>
@@ -9748,8 +11032,8 @@
         </p:nvSpPr>
         <p:spPr>
           <a:xfrm>
-            <a:off x="914400" y="4727448"/>
-            <a:ext cx="2286000" cy="502920"/>
+            <a:off x="914400" y="4590288"/>
+            <a:ext cx="2194560" cy="457200"/>
           </a:xfrm>
           <a:prstGeom prst="rect">
             <a:avLst/>
@@ -9763,7 +11047,7 @@
           <a:lstStyle/>
           <a:p>
             <a:pPr>
-              <a:defRPr sz="1100" b="1">
+              <a:defRPr sz="1050" b="1">
                 <a:solidFill>
                   <a:srgbClr val="00E5C0"/>
                 </a:solidFill>
@@ -9784,8 +11068,8 @@
         </p:nvSpPr>
         <p:spPr>
           <a:xfrm>
-            <a:off x="3291840" y="4709160"/>
-            <a:ext cx="3566160" cy="530352"/>
+            <a:off x="3200400" y="4553712"/>
+            <a:ext cx="3657600" cy="502920"/>
           </a:xfrm>
           <a:prstGeom prst="rect">
             <a:avLst/>
@@ -9801,7 +11085,7 @@
             <a:pPr>
               <a:defRPr sz="750" b="1">
                 <a:solidFill>
-                  <a:srgbClr val="DC6464"/>
+                  <a:srgbClr val="E66464"/>
                 </a:solidFill>
                 <a:latin typeface="Arial"/>
               </a:defRPr>
@@ -9815,9 +11099,9 @@
               <a:spcBef>
                 <a:spcPts val="100"/>
               </a:spcBef>
-              <a:defRPr sz="850">
-                <a:solidFill>
-                  <a:srgbClr val="A5B9CD"/>
+              <a:defRPr sz="800">
+                <a:solidFill>
+                  <a:srgbClr val="AABED2"/>
                 </a:solidFill>
                 <a:latin typeface="Arial"/>
               </a:defRPr>
@@ -9836,8 +11120,8 @@
         </p:nvSpPr>
         <p:spPr>
           <a:xfrm>
-            <a:off x="6949440" y="4873752"/>
-            <a:ext cx="228600" cy="164592"/>
+            <a:off x="6949440" y="4700016"/>
+            <a:ext cx="201168" cy="146304"/>
           </a:xfrm>
           <a:prstGeom prst="rightArrow">
             <a:avLst/>
@@ -9879,8 +11163,8 @@
         </p:nvSpPr>
         <p:spPr>
           <a:xfrm>
-            <a:off x="7315200" y="4709160"/>
-            <a:ext cx="3931920" cy="530352"/>
+            <a:off x="7269480" y="4553712"/>
+            <a:ext cx="3977639" cy="502920"/>
           </a:xfrm>
           <a:prstGeom prst="rect">
             <a:avLst/>
@@ -9910,7 +11194,7 @@
               <a:spcBef>
                 <a:spcPts val="100"/>
               </a:spcBef>
-              <a:defRPr sz="850">
+              <a:defRPr sz="800">
                 <a:solidFill>
                   <a:srgbClr val="FFFFFF"/>
                 </a:solidFill>
@@ -9931,11 +11215,13 @@
         </p:nvSpPr>
         <p:spPr>
           <a:xfrm>
-            <a:off x="731520" y="5394960"/>
-            <a:ext cx="10728655" cy="713232"/>
+            <a:off x="731520" y="5257800"/>
+            <a:ext cx="10728655" cy="658368"/>
           </a:xfrm>
           <a:prstGeom prst="roundRect">
-            <a:avLst/>
+            <a:avLst>
+              <a:gd name="adj" fmla="val 20833"/>
+            </a:avLst>
           </a:prstGeom>
           <a:solidFill>
             <a:srgbClr val="0B3052"/>
@@ -9976,8 +11262,8 @@
         </p:nvSpPr>
         <p:spPr>
           <a:xfrm>
-            <a:off x="914400" y="5504688"/>
-            <a:ext cx="2286000" cy="502920"/>
+            <a:off x="914400" y="5367528"/>
+            <a:ext cx="2194560" cy="457200"/>
           </a:xfrm>
           <a:prstGeom prst="rect">
             <a:avLst/>
@@ -9991,7 +11277,7 @@
           <a:lstStyle/>
           <a:p>
             <a:pPr>
-              <a:defRPr sz="1100" b="1">
+              <a:defRPr sz="1050" b="1">
                 <a:solidFill>
                   <a:srgbClr val="C8A064"/>
                 </a:solidFill>
@@ -10012,8 +11298,8 @@
         </p:nvSpPr>
         <p:spPr>
           <a:xfrm>
-            <a:off x="3291840" y="5486400"/>
-            <a:ext cx="3566160" cy="530352"/>
+            <a:off x="3200400" y="5330952"/>
+            <a:ext cx="3657600" cy="502920"/>
           </a:xfrm>
           <a:prstGeom prst="rect">
             <a:avLst/>
@@ -10029,7 +11315,7 @@
             <a:pPr>
               <a:defRPr sz="750" b="1">
                 <a:solidFill>
-                  <a:srgbClr val="DC6464"/>
+                  <a:srgbClr val="E66464"/>
                 </a:solidFill>
                 <a:latin typeface="Arial"/>
               </a:defRPr>
@@ -10043,9 +11329,9 @@
               <a:spcBef>
                 <a:spcPts val="100"/>
               </a:spcBef>
-              <a:defRPr sz="850">
-                <a:solidFill>
-                  <a:srgbClr val="A5B9CD"/>
+              <a:defRPr sz="800">
+                <a:solidFill>
+                  <a:srgbClr val="AABED2"/>
                 </a:solidFill>
                 <a:latin typeface="Arial"/>
               </a:defRPr>
@@ -10064,8 +11350,8 @@
         </p:nvSpPr>
         <p:spPr>
           <a:xfrm>
-            <a:off x="6949440" y="5650992"/>
-            <a:ext cx="228600" cy="164592"/>
+            <a:off x="6949440" y="5477256"/>
+            <a:ext cx="201168" cy="146304"/>
           </a:xfrm>
           <a:prstGeom prst="rightArrow">
             <a:avLst/>
@@ -10107,8 +11393,8 @@
         </p:nvSpPr>
         <p:spPr>
           <a:xfrm>
-            <a:off x="7315200" y="5486400"/>
-            <a:ext cx="3931920" cy="530352"/>
+            <a:off x="7269480" y="5330952"/>
+            <a:ext cx="3977639" cy="502920"/>
           </a:xfrm>
           <a:prstGeom prst="rect">
             <a:avLst/>
@@ -10138,7 +11424,7 @@
               <a:spcBef>
                 <a:spcPts val="100"/>
               </a:spcBef>
-              <a:defRPr sz="850">
+              <a:defRPr sz="800">
                 <a:solidFill>
                   <a:srgbClr val="FFFFFF"/>
                 </a:solidFill>
@@ -10159,7 +11445,7 @@
         </p:nvSpPr>
         <p:spPr>
           <a:xfrm>
-            <a:off x="731520" y="6400800"/>
+            <a:off x="731520" y="6144768"/>
             <a:ext cx="10728655" cy="13716"/>
           </a:xfrm>
           <a:prstGeom prst="rect">
@@ -10202,7 +11488,7 @@
         </p:nvSpPr>
         <p:spPr>
           <a:xfrm>
-            <a:off x="731520" y="6446520"/>
+            <a:off x="731520" y="6236208"/>
             <a:ext cx="8229600" cy="320040"/>
           </a:xfrm>
           <a:prstGeom prst="rect">
@@ -10217,9 +11503,9 @@
           <a:lstStyle/>
           <a:p>
             <a:pPr>
-              <a:defRPr sz="900">
-                <a:solidFill>
-                  <a:srgbClr val="A5B9CD"/>
+              <a:defRPr sz="850">
+                <a:solidFill>
+                  <a:srgbClr val="AABED2"/>
                 </a:solidFill>
                 <a:latin typeface="Arial"/>
               </a:defRPr>
@@ -10238,7 +11524,7 @@
         </p:nvSpPr>
         <p:spPr>
           <a:xfrm>
-            <a:off x="9601200" y="6446520"/>
+            <a:off x="9601200" y="6236208"/>
             <a:ext cx="1858975" cy="320040"/>
           </a:xfrm>
           <a:prstGeom prst="rect">
@@ -10253,7 +11539,7 @@
           <a:lstStyle/>
           <a:p>
             <a:pPr algn="r">
-              <a:defRPr sz="900" b="1">
+              <a:defRPr sz="850" b="1">
                 <a:solidFill>
                   <a:srgbClr val="C8A064"/>
                 </a:solidFill>
@@ -10308,8 +11594,8 @@
         </p:blipFill>
         <p:spPr>
           <a:xfrm>
-            <a:off x="731520" y="365760"/>
-            <a:ext cx="1056315" cy="347472"/>
+            <a:off x="731520" y="320040"/>
+            <a:ext cx="889528" cy="292608"/>
           </a:xfrm>
           <a:prstGeom prst="rect">
             <a:avLst/>
@@ -10324,8 +11610,8 @@
         </p:nvSpPr>
         <p:spPr>
           <a:xfrm>
-            <a:off x="2011680" y="365760"/>
-            <a:ext cx="18288" cy="347472"/>
+            <a:off x="1920240" y="320040"/>
+            <a:ext cx="13716" cy="292608"/>
           </a:xfrm>
           <a:prstGeom prst="rect">
             <a:avLst/>
@@ -10367,8 +11653,8 @@
         </p:nvSpPr>
         <p:spPr>
           <a:xfrm>
-            <a:off x="2148840" y="365760"/>
-            <a:ext cx="4114800" cy="347472"/>
+            <a:off x="2057400" y="320040"/>
+            <a:ext cx="4114800" cy="292608"/>
           </a:xfrm>
           <a:prstGeom prst="rect">
             <a:avLst/>
@@ -10384,7 +11670,7 @@
             <a:pPr>
               <a:defRPr sz="850" b="1">
                 <a:solidFill>
-                  <a:srgbClr val="A5B9CD"/>
+                  <a:srgbClr val="AABED2"/>
                 </a:solidFill>
                 <a:latin typeface="Arial"/>
               </a:defRPr>
@@ -10403,11 +11689,13 @@
         </p:nvSpPr>
         <p:spPr>
           <a:xfrm>
-            <a:off x="8961120" y="329184"/>
-            <a:ext cx="2499055" cy="384048"/>
+            <a:off x="8961120" y="292608"/>
+            <a:ext cx="2499055" cy="329184"/>
           </a:xfrm>
           <a:prstGeom prst="roundRect">
-            <a:avLst/>
+            <a:avLst>
+              <a:gd name="adj" fmla="val 33333"/>
+            </a:avLst>
           </a:prstGeom>
           <a:solidFill>
             <a:srgbClr val="0B3052"/>
@@ -10433,7 +11721,7 @@
           </a:fontRef>
         </p:style>
         <p:txBody>
-          <a:bodyPr rtlCol="0" anchor="ctr" wrap="square" tIns="54864"/>
+          <a:bodyPr rtlCol="0" anchor="ctr" wrap="square" tIns="36576"/>
           <a:lstStyle/>
           <a:p>
             <a:pPr algn="ctr">
@@ -10458,8 +11746,8 @@
         </p:nvSpPr>
         <p:spPr>
           <a:xfrm>
-            <a:off x="731520" y="868680"/>
-            <a:ext cx="10728655" cy="594360"/>
+            <a:off x="731520" y="749808"/>
+            <a:ext cx="10728655" cy="438912"/>
           </a:xfrm>
           <a:prstGeom prst="rect">
             <a:avLst/>
@@ -10473,7 +11761,7 @@
           <a:lstStyle/>
           <a:p>
             <a:pPr>
-              <a:defRPr sz="2200" b="1">
+              <a:defRPr sz="2000" b="1">
                 <a:solidFill>
                   <a:srgbClr val="FFFFFF"/>
                 </a:solidFill>
@@ -10494,11 +11782,13 @@
         </p:nvSpPr>
         <p:spPr>
           <a:xfrm>
-            <a:off x="731520" y="1508760"/>
-            <a:ext cx="5669280" cy="4709160"/>
+            <a:off x="731520" y="1371600"/>
+            <a:ext cx="5257800" cy="4572000"/>
           </a:xfrm>
           <a:prstGeom prst="roundRect">
-            <a:avLst/>
+            <a:avLst>
+              <a:gd name="adj" fmla="val 3000"/>
+            </a:avLst>
           </a:prstGeom>
           <a:solidFill>
             <a:srgbClr val="0B3052"/>
@@ -10531,9 +11821,219 @@
           </a:p>
         </p:txBody>
       </p:sp>
+      <p:sp>
+        <p:nvSpPr>
+          <p:cNvPr id="8" name="Rectangle 7"/>
+          <p:cNvSpPr/>
+          <p:nvPr/>
+        </p:nvSpPr>
+        <p:spPr>
+          <a:xfrm>
+            <a:off x="896112" y="1536192"/>
+            <a:ext cx="4928616" cy="219456"/>
+          </a:xfrm>
+          <a:prstGeom prst="rect">
+            <a:avLst/>
+          </a:prstGeom>
+          <a:solidFill>
+            <a:srgbClr val="103A62"/>
+          </a:solidFill>
+          <a:ln w="9525">
+            <a:solidFill>
+              <a:srgbClr val="1A4B75"/>
+            </a:solidFill>
+          </a:ln>
+        </p:spPr>
+        <p:style>
+          <a:lnRef idx="1">
+            <a:schemeClr val="accent1"/>
+          </a:lnRef>
+          <a:fillRef idx="3">
+            <a:schemeClr val="accent1"/>
+          </a:fillRef>
+          <a:effectRef idx="2">
+            <a:schemeClr val="accent1"/>
+          </a:effectRef>
+          <a:fontRef idx="minor">
+            <a:schemeClr val="lt1"/>
+          </a:fontRef>
+        </p:style>
+        <p:txBody>
+          <a:bodyPr rtlCol="0" anchor="ctr"/>
+          <a:lstStyle/>
+          <a:p>
+            <a:pPr algn="ctr"/>
+          </a:p>
+        </p:txBody>
+      </p:sp>
+      <p:sp>
+        <p:nvSpPr>
+          <p:cNvPr id="9" name="Oval 8"/>
+          <p:cNvSpPr/>
+          <p:nvPr/>
+        </p:nvSpPr>
+        <p:spPr>
+          <a:xfrm>
+            <a:off x="987552" y="1609344"/>
+            <a:ext cx="73152" cy="73152"/>
+          </a:xfrm>
+          <a:prstGeom prst="ellipse">
+            <a:avLst/>
+          </a:prstGeom>
+          <a:solidFill>
+            <a:srgbClr val="EB5A50"/>
+          </a:solidFill>
+          <a:ln>
+            <a:noFill/>
+          </a:ln>
+        </p:spPr>
+        <p:style>
+          <a:lnRef idx="1">
+            <a:schemeClr val="accent1"/>
+          </a:lnRef>
+          <a:fillRef idx="3">
+            <a:schemeClr val="accent1"/>
+          </a:fillRef>
+          <a:effectRef idx="2">
+            <a:schemeClr val="accent1"/>
+          </a:effectRef>
+          <a:fontRef idx="minor">
+            <a:schemeClr val="lt1"/>
+          </a:fontRef>
+        </p:style>
+        <p:txBody>
+          <a:bodyPr rtlCol="0" anchor="ctr"/>
+          <a:lstStyle/>
+          <a:p>
+            <a:pPr algn="ctr"/>
+          </a:p>
+        </p:txBody>
+      </p:sp>
+      <p:sp>
+        <p:nvSpPr>
+          <p:cNvPr id="10" name="Oval 9"/>
+          <p:cNvSpPr/>
+          <p:nvPr/>
+        </p:nvSpPr>
+        <p:spPr>
+          <a:xfrm>
+            <a:off x="1115568" y="1609344"/>
+            <a:ext cx="73152" cy="73152"/>
+          </a:xfrm>
+          <a:prstGeom prst="ellipse">
+            <a:avLst/>
+          </a:prstGeom>
+          <a:solidFill>
+            <a:srgbClr val="F5B94B"/>
+          </a:solidFill>
+          <a:ln>
+            <a:noFill/>
+          </a:ln>
+        </p:spPr>
+        <p:style>
+          <a:lnRef idx="1">
+            <a:schemeClr val="accent1"/>
+          </a:lnRef>
+          <a:fillRef idx="3">
+            <a:schemeClr val="accent1"/>
+          </a:fillRef>
+          <a:effectRef idx="2">
+            <a:schemeClr val="accent1"/>
+          </a:effectRef>
+          <a:fontRef idx="minor">
+            <a:schemeClr val="lt1"/>
+          </a:fontRef>
+        </p:style>
+        <p:txBody>
+          <a:bodyPr rtlCol="0" anchor="ctr"/>
+          <a:lstStyle/>
+          <a:p>
+            <a:pPr algn="ctr"/>
+          </a:p>
+        </p:txBody>
+      </p:sp>
+      <p:sp>
+        <p:nvSpPr>
+          <p:cNvPr id="11" name="Oval 10"/>
+          <p:cNvSpPr/>
+          <p:nvPr/>
+        </p:nvSpPr>
+        <p:spPr>
+          <a:xfrm>
+            <a:off x="1243584" y="1609344"/>
+            <a:ext cx="73152" cy="73152"/>
+          </a:xfrm>
+          <a:prstGeom prst="ellipse">
+            <a:avLst/>
+          </a:prstGeom>
+          <a:solidFill>
+            <a:srgbClr val="2DC378"/>
+          </a:solidFill>
+          <a:ln>
+            <a:noFill/>
+          </a:ln>
+        </p:spPr>
+        <p:style>
+          <a:lnRef idx="1">
+            <a:schemeClr val="accent1"/>
+          </a:lnRef>
+          <a:fillRef idx="3">
+            <a:schemeClr val="accent1"/>
+          </a:fillRef>
+          <a:effectRef idx="2">
+            <a:schemeClr val="accent1"/>
+          </a:effectRef>
+          <a:fontRef idx="minor">
+            <a:schemeClr val="lt1"/>
+          </a:fontRef>
+        </p:style>
+        <p:txBody>
+          <a:bodyPr rtlCol="0" anchor="ctr"/>
+          <a:lstStyle/>
+          <a:p>
+            <a:pPr algn="ctr"/>
+          </a:p>
+        </p:txBody>
+      </p:sp>
+      <p:sp>
+        <p:nvSpPr>
+          <p:cNvPr id="12" name="TextBox 11"/>
+          <p:cNvSpPr txBox="1"/>
+          <p:nvPr/>
+        </p:nvSpPr>
+        <p:spPr>
+          <a:xfrm>
+            <a:off x="1399032" y="1554480"/>
+            <a:ext cx="4334256" cy="182880"/>
+          </a:xfrm>
+          <a:prstGeom prst="rect">
+            <a:avLst/>
+          </a:prstGeom>
+          <a:noFill/>
+        </p:spPr>
+        <p:txBody>
+          <a:bodyPr wrap="none" lIns="0" tIns="0" bIns="0" rIns="0">
+            <a:spAutoFit/>
+          </a:bodyPr>
+          <a:lstStyle/>
+          <a:p>
+            <a:pPr>
+              <a:defRPr sz="700">
+                <a:solidFill>
+                  <a:srgbClr val="AABED2"/>
+                </a:solidFill>
+                <a:latin typeface="Arial"/>
+              </a:defRPr>
+            </a:pPr>
+            <a:r>
+              <a:t>🔒  goldfields-bay.vercel.app</a:t>
+            </a:r>
+          </a:p>
+        </p:txBody>
+      </p:sp>
       <p:pic>
         <p:nvPicPr>
-          <p:cNvPr id="8" name="Picture 7" descr="media_1790576282836.png"/>
+          <p:cNvPr id="13" name="Picture 12" descr="media_1790576282836.png"/>
           <p:cNvPicPr>
             <a:picLocks noChangeAspect="1"/>
           </p:cNvPicPr>
@@ -10547,8 +12047,8 @@
         </p:blipFill>
         <p:spPr>
           <a:xfrm>
-            <a:off x="868680" y="1645920"/>
-            <a:ext cx="5394960" cy="3429804"/>
+            <a:off x="1073493" y="1755648"/>
+            <a:ext cx="4573854" cy="2907792"/>
           </a:xfrm>
           <a:prstGeom prst="rect">
             <a:avLst/>
@@ -10557,14 +12057,14 @@
       </p:pic>
       <p:sp>
         <p:nvSpPr>
-          <p:cNvPr id="9" name="TextBox 8"/>
+          <p:cNvPr id="14" name="TextBox 13"/>
           <p:cNvSpPr txBox="1"/>
           <p:nvPr/>
         </p:nvSpPr>
         <p:spPr>
           <a:xfrm>
-            <a:off x="868680" y="5349240"/>
-            <a:ext cx="5394960" cy="731520"/>
+            <a:off x="896112" y="4736592"/>
+            <a:ext cx="4928616" cy="1115568"/>
           </a:xfrm>
           <a:prstGeom prst="rect">
             <a:avLst/>
@@ -10578,7 +12078,7 @@
           <a:lstStyle/>
           <a:p>
             <a:pPr>
-              <a:defRPr sz="850" b="1">
+              <a:defRPr sz="800" b="1">
                 <a:solidFill>
                   <a:srgbClr val="00E5C0"/>
                 </a:solidFill>
@@ -10586,14 +12086,17 @@
               </a:defRPr>
             </a:pPr>
             <a:r>
-              <a:t>LIVE PRODUCTION HERO: 'beyond mining.' WITH REAL-TIME TELEMETRY STRIP</a:t>
-            </a:r>
-          </a:p>
-          <a:p>
-            <a:pPr>
-              <a:defRPr sz="800">
-                <a:solidFill>
-                  <a:srgbClr val="A5B9CD"/>
+              <a:t>LIVE PRODUCTION HERO: 'beyond mining.' WITH REAL-TIME TELEMETRY</a:t>
+            </a:r>
+          </a:p>
+          <a:p>
+            <a:pPr>
+              <a:spcBef>
+                <a:spcPts val="200"/>
+              </a:spcBef>
+              <a:defRPr sz="750">
+                <a:solidFill>
+                  <a:srgbClr val="AABED2"/>
                 </a:solidFill>
                 <a:latin typeface="Arial"/>
               </a:defRPr>
@@ -10606,17 +12109,19 @@
       </p:sp>
       <p:sp>
         <p:nvSpPr>
-          <p:cNvPr id="10" name="Rounded Rectangle 9"/>
+          <p:cNvPr id="15" name="Rounded Rectangle 14"/>
           <p:cNvSpPr/>
           <p:nvPr/>
         </p:nvSpPr>
         <p:spPr>
           <a:xfrm>
-            <a:off x="6656832" y="1508760"/>
-            <a:ext cx="4800600" cy="4709160"/>
+            <a:off x="6199632" y="1371600"/>
+            <a:ext cx="5257800" cy="4572000"/>
           </a:xfrm>
           <a:prstGeom prst="roundRect">
-            <a:avLst/>
+            <a:avLst>
+              <a:gd name="adj" fmla="val 3000"/>
+            </a:avLst>
           </a:prstGeom>
           <a:solidFill>
             <a:srgbClr val="0B3052"/>
@@ -10651,14 +12156,14 @@
       </p:sp>
       <p:sp>
         <p:nvSpPr>
-          <p:cNvPr id="11" name="TextBox 10"/>
+          <p:cNvPr id="16" name="TextBox 15"/>
           <p:cNvSpPr txBox="1"/>
           <p:nvPr/>
         </p:nvSpPr>
         <p:spPr>
           <a:xfrm>
-            <a:off x="6903720" y="1691640"/>
-            <a:ext cx="4297680" cy="4343400"/>
+            <a:off x="6446520" y="1554480"/>
+            <a:ext cx="4754880" cy="4160520"/>
           </a:xfrm>
           <a:prstGeom prst="rect">
             <a:avLst/>
@@ -10688,7 +12193,7 @@
               <a:spcBef>
                 <a:spcPts val="800"/>
               </a:spcBef>
-              <a:defRPr sz="1100" b="1">
+              <a:defRPr sz="1000" b="1">
                 <a:solidFill>
                   <a:srgbClr val="FFFFFF"/>
                 </a:solidFill>
@@ -10702,11 +12207,11 @@
           <a:p>
             <a:pPr>
               <a:spcBef>
-                <a:spcPts val="200"/>
+                <a:spcPts val="100"/>
               </a:spcBef>
-              <a:defRPr sz="900">
-                <a:solidFill>
-                  <a:srgbClr val="A5B9CD"/>
+              <a:defRPr sz="800">
+                <a:solidFill>
+                  <a:srgbClr val="AABED2"/>
                 </a:solidFill>
                 <a:latin typeface="Arial"/>
               </a:defRPr>
@@ -10720,7 +12225,7 @@
               <a:spcBef>
                 <a:spcPts val="800"/>
               </a:spcBef>
-              <a:defRPr sz="1100" b="1">
+              <a:defRPr sz="1000" b="1">
                 <a:solidFill>
                   <a:srgbClr val="FFFFFF"/>
                 </a:solidFill>
@@ -10734,11 +12239,11 @@
           <a:p>
             <a:pPr>
               <a:spcBef>
-                <a:spcPts val="200"/>
+                <a:spcPts val="100"/>
               </a:spcBef>
-              <a:defRPr sz="900">
-                <a:solidFill>
-                  <a:srgbClr val="A5B9CD"/>
+              <a:defRPr sz="800">
+                <a:solidFill>
+                  <a:srgbClr val="AABED2"/>
                 </a:solidFill>
                 <a:latin typeface="Arial"/>
               </a:defRPr>
@@ -10752,7 +12257,7 @@
               <a:spcBef>
                 <a:spcPts val="800"/>
               </a:spcBef>
-              <a:defRPr sz="1100" b="1">
+              <a:defRPr sz="1000" b="1">
                 <a:solidFill>
                   <a:srgbClr val="FFFFFF"/>
                 </a:solidFill>
@@ -10766,11 +12271,11 @@
           <a:p>
             <a:pPr>
               <a:spcBef>
-                <a:spcPts val="200"/>
+                <a:spcPts val="100"/>
               </a:spcBef>
-              <a:defRPr sz="900">
-                <a:solidFill>
-                  <a:srgbClr val="A5B9CD"/>
+              <a:defRPr sz="800">
+                <a:solidFill>
+                  <a:srgbClr val="AABED2"/>
                 </a:solidFill>
                 <a:latin typeface="Arial"/>
               </a:defRPr>
@@ -10784,7 +12289,7 @@
               <a:spcBef>
                 <a:spcPts val="800"/>
               </a:spcBef>
-              <a:defRPr sz="1100" b="1">
+              <a:defRPr sz="1000" b="1">
                 <a:solidFill>
                   <a:srgbClr val="FFFFFF"/>
                 </a:solidFill>
@@ -10798,11 +12303,11 @@
           <a:p>
             <a:pPr>
               <a:spcBef>
-                <a:spcPts val="200"/>
+                <a:spcPts val="100"/>
               </a:spcBef>
-              <a:defRPr sz="900">
-                <a:solidFill>
-                  <a:srgbClr val="A5B9CD"/>
+              <a:defRPr sz="800">
+                <a:solidFill>
+                  <a:srgbClr val="AABED2"/>
                 </a:solidFill>
                 <a:latin typeface="Arial"/>
               </a:defRPr>
@@ -10815,13 +12320,13 @@
       </p:sp>
       <p:sp>
         <p:nvSpPr>
-          <p:cNvPr id="12" name="Rectangle 11"/>
+          <p:cNvPr id="17" name="Rectangle 16"/>
           <p:cNvSpPr/>
           <p:nvPr/>
         </p:nvSpPr>
         <p:spPr>
           <a:xfrm>
-            <a:off x="731520" y="6400800"/>
+            <a:off x="731520" y="6144768"/>
             <a:ext cx="10728655" cy="13716"/>
           </a:xfrm>
           <a:prstGeom prst="rect">
@@ -10858,13 +12363,13 @@
       </p:sp>
       <p:sp>
         <p:nvSpPr>
-          <p:cNvPr id="13" name="TextBox 12"/>
+          <p:cNvPr id="18" name="TextBox 17"/>
           <p:cNvSpPr txBox="1"/>
           <p:nvPr/>
         </p:nvSpPr>
         <p:spPr>
           <a:xfrm>
-            <a:off x="731520" y="6446520"/>
+            <a:off x="731520" y="6236208"/>
             <a:ext cx="8229600" cy="320040"/>
           </a:xfrm>
           <a:prstGeom prst="rect">
@@ -10879,9 +12384,9 @@
           <a:lstStyle/>
           <a:p>
             <a:pPr>
-              <a:defRPr sz="900">
-                <a:solidFill>
-                  <a:srgbClr val="A5B9CD"/>
+              <a:defRPr sz="850">
+                <a:solidFill>
+                  <a:srgbClr val="AABED2"/>
                 </a:solidFill>
                 <a:latin typeface="Arial"/>
               </a:defRPr>
@@ -10894,13 +12399,13 @@
       </p:sp>
       <p:sp>
         <p:nvSpPr>
-          <p:cNvPr id="14" name="TextBox 13"/>
+          <p:cNvPr id="19" name="TextBox 18"/>
           <p:cNvSpPr txBox="1"/>
           <p:nvPr/>
         </p:nvSpPr>
         <p:spPr>
           <a:xfrm>
-            <a:off x="9601200" y="6446520"/>
+            <a:off x="9601200" y="6236208"/>
             <a:ext cx="1858975" cy="320040"/>
           </a:xfrm>
           <a:prstGeom prst="rect">
@@ -10915,7 +12420,7 @@
           <a:lstStyle/>
           <a:p>
             <a:pPr algn="r">
-              <a:defRPr sz="900" b="1">
+              <a:defRPr sz="850" b="1">
                 <a:solidFill>
                   <a:srgbClr val="C8A064"/>
                 </a:solidFill>
@@ -10970,8 +12475,8 @@
         </p:blipFill>
         <p:spPr>
           <a:xfrm>
-            <a:off x="731520" y="365760"/>
-            <a:ext cx="1056315" cy="347472"/>
+            <a:off x="731520" y="320040"/>
+            <a:ext cx="889528" cy="292608"/>
           </a:xfrm>
           <a:prstGeom prst="rect">
             <a:avLst/>
@@ -10986,8 +12491,8 @@
         </p:nvSpPr>
         <p:spPr>
           <a:xfrm>
-            <a:off x="2011680" y="365760"/>
-            <a:ext cx="18288" cy="347472"/>
+            <a:off x="1920240" y="320040"/>
+            <a:ext cx="13716" cy="292608"/>
           </a:xfrm>
           <a:prstGeom prst="rect">
             <a:avLst/>
@@ -11029,8 +12534,8 @@
         </p:nvSpPr>
         <p:spPr>
           <a:xfrm>
-            <a:off x="2148840" y="365760"/>
-            <a:ext cx="4114800" cy="347472"/>
+            <a:off x="2057400" y="320040"/>
+            <a:ext cx="4114800" cy="292608"/>
           </a:xfrm>
           <a:prstGeom prst="rect">
             <a:avLst/>
@@ -11046,7 +12551,7 @@
             <a:pPr>
               <a:defRPr sz="850" b="1">
                 <a:solidFill>
-                  <a:srgbClr val="A5B9CD"/>
+                  <a:srgbClr val="AABED2"/>
                 </a:solidFill>
                 <a:latin typeface="Arial"/>
               </a:defRPr>
@@ -11065,11 +12570,13 @@
         </p:nvSpPr>
         <p:spPr>
           <a:xfrm>
-            <a:off x="8961120" y="329184"/>
-            <a:ext cx="2499055" cy="384048"/>
+            <a:off x="8961120" y="292608"/>
+            <a:ext cx="2499055" cy="329184"/>
           </a:xfrm>
           <a:prstGeom prst="roundRect">
-            <a:avLst/>
+            <a:avLst>
+              <a:gd name="adj" fmla="val 33333"/>
+            </a:avLst>
           </a:prstGeom>
           <a:solidFill>
             <a:srgbClr val="0B3052"/>
@@ -11095,7 +12602,7 @@
           </a:fontRef>
         </p:style>
         <p:txBody>
-          <a:bodyPr rtlCol="0" anchor="ctr" wrap="square" tIns="54864"/>
+          <a:bodyPr rtlCol="0" anchor="ctr" wrap="square" tIns="36576"/>
           <a:lstStyle/>
           <a:p>
             <a:pPr algn="ctr">
@@ -11120,8 +12627,8 @@
         </p:nvSpPr>
         <p:spPr>
           <a:xfrm>
-            <a:off x="731520" y="868680"/>
-            <a:ext cx="10728655" cy="594360"/>
+            <a:off x="731520" y="749808"/>
+            <a:ext cx="10728655" cy="438912"/>
           </a:xfrm>
           <a:prstGeom prst="rect">
             <a:avLst/>
@@ -11135,7 +12642,7 @@
           <a:lstStyle/>
           <a:p>
             <a:pPr>
-              <a:defRPr sz="2200" b="1">
+              <a:defRPr sz="2000" b="1">
                 <a:solidFill>
                   <a:srgbClr val="FFFFFF"/>
                 </a:solidFill>
@@ -11156,11 +12663,13 @@
         </p:nvSpPr>
         <p:spPr>
           <a:xfrm>
-            <a:off x="731520" y="1508760"/>
-            <a:ext cx="5120640" cy="4709160"/>
+            <a:off x="731520" y="1371600"/>
+            <a:ext cx="5257800" cy="4572000"/>
           </a:xfrm>
           <a:prstGeom prst="roundRect">
-            <a:avLst/>
+            <a:avLst>
+              <a:gd name="adj" fmla="val 3000"/>
+            </a:avLst>
           </a:prstGeom>
           <a:solidFill>
             <a:srgbClr val="0B3052"/>
@@ -11201,8 +12710,8 @@
         </p:nvSpPr>
         <p:spPr>
           <a:xfrm>
-            <a:off x="960120" y="1691640"/>
-            <a:ext cx="4663440" cy="4343400"/>
+            <a:off x="960120" y="1554480"/>
+            <a:ext cx="4754880" cy="4160520"/>
           </a:xfrm>
           <a:prstGeom prst="rect">
             <a:avLst/>
@@ -11232,7 +12741,7 @@
               <a:spcBef>
                 <a:spcPts val="800"/>
               </a:spcBef>
-              <a:defRPr sz="1100" b="1">
+              <a:defRPr sz="1000" b="1">
                 <a:solidFill>
                   <a:srgbClr val="C8A064"/>
                 </a:solidFill>
@@ -11246,9 +12755,9 @@
           <a:p>
             <a:pPr>
               <a:spcBef>
-                <a:spcPts val="200"/>
+                <a:spcPts val="100"/>
               </a:spcBef>
-              <a:defRPr sz="900">
+              <a:defRPr sz="800">
                 <a:solidFill>
                   <a:srgbClr val="FFFFFF"/>
                 </a:solidFill>
@@ -11264,7 +12773,7 @@
               <a:spcBef>
                 <a:spcPts val="800"/>
               </a:spcBef>
-              <a:defRPr sz="1100" b="1">
+              <a:defRPr sz="1000" b="1">
                 <a:solidFill>
                   <a:srgbClr val="C8A064"/>
                 </a:solidFill>
@@ -11278,9 +12787,9 @@
           <a:p>
             <a:pPr>
               <a:spcBef>
-                <a:spcPts val="200"/>
+                <a:spcPts val="100"/>
               </a:spcBef>
-              <a:defRPr sz="900">
+              <a:defRPr sz="800">
                 <a:solidFill>
                   <a:srgbClr val="FFFFFF"/>
                 </a:solidFill>
@@ -11296,7 +12805,7 @@
               <a:spcBef>
                 <a:spcPts val="800"/>
               </a:spcBef>
-              <a:defRPr sz="1100" b="1">
+              <a:defRPr sz="1000" b="1">
                 <a:solidFill>
                   <a:srgbClr val="C8A064"/>
                 </a:solidFill>
@@ -11310,9 +12819,9 @@
           <a:p>
             <a:pPr>
               <a:spcBef>
-                <a:spcPts val="200"/>
+                <a:spcPts val="100"/>
               </a:spcBef>
-              <a:defRPr sz="900">
+              <a:defRPr sz="800">
                 <a:solidFill>
                   <a:srgbClr val="FFFFFF"/>
                 </a:solidFill>
@@ -11328,7 +12837,7 @@
               <a:spcBef>
                 <a:spcPts val="800"/>
               </a:spcBef>
-              <a:defRPr sz="1100" b="1">
+              <a:defRPr sz="1000" b="1">
                 <a:solidFill>
                   <a:srgbClr val="C8A064"/>
                 </a:solidFill>
@@ -11342,9 +12851,9 @@
           <a:p>
             <a:pPr>
               <a:spcBef>
-                <a:spcPts val="200"/>
+                <a:spcPts val="100"/>
               </a:spcBef>
-              <a:defRPr sz="900">
+              <a:defRPr sz="800">
                 <a:solidFill>
                   <a:srgbClr val="FFFFFF"/>
                 </a:solidFill>
@@ -11365,14 +12874,16 @@
         </p:nvSpPr>
         <p:spPr>
           <a:xfrm>
-            <a:off x="6108192" y="1508760"/>
-            <a:ext cx="5349240" cy="4709160"/>
+            <a:off x="6199632" y="1371600"/>
+            <a:ext cx="5257800" cy="4572000"/>
           </a:xfrm>
           <a:prstGeom prst="roundRect">
-            <a:avLst/>
+            <a:avLst>
+              <a:gd name="adj" fmla="val 3000"/>
+            </a:avLst>
           </a:prstGeom>
           <a:solidFill>
-            <a:srgbClr val="103A62"/>
+            <a:srgbClr val="0B3052"/>
           </a:solidFill>
           <a:ln w="19050">
             <a:solidFill>
@@ -11410,8 +12921,8 @@
         </p:nvSpPr>
         <p:spPr>
           <a:xfrm>
-            <a:off x="6355080" y="1691640"/>
-            <a:ext cx="4846320" cy="4343400"/>
+            <a:off x="6400800" y="1508760"/>
+            <a:ext cx="4846320" cy="365760"/>
           </a:xfrm>
           <a:prstGeom prst="rect">
             <a:avLst/>
@@ -11433,15 +12944,304 @@
               </a:defRPr>
             </a:pPr>
             <a:r>
-              <a:t>COPILOT INTERACTION SIMULATION</a:t>
+              <a:t>REAL COPILOT INTERACTION: LIVE VERIFIED RESPONSE</a:t>
+            </a:r>
+          </a:p>
+        </p:txBody>
+      </p:sp>
+      <p:pic>
+        <p:nvPicPr>
+          <p:cNvPr id="11" name="Picture 10" descr="chat_crop_q_and_a.png"/>
+          <p:cNvPicPr>
+            <a:picLocks noChangeAspect="1"/>
+          </p:cNvPicPr>
+          <p:nvPr/>
+        </p:nvPicPr>
+        <p:blipFill>
+          <a:blip r:embed="rId3"/>
+          <a:stretch>
+            <a:fillRect/>
+          </a:stretch>
+        </p:blipFill>
+        <p:spPr>
+          <a:xfrm>
+            <a:off x="6400800" y="1938528"/>
+            <a:ext cx="2600130" cy="3822191"/>
+          </a:xfrm>
+          <a:prstGeom prst="rect">
+            <a:avLst/>
+          </a:prstGeom>
+        </p:spPr>
+      </p:pic>
+      <p:sp>
+        <p:nvSpPr>
+          <p:cNvPr id="12" name="Rounded Rectangle 11"/>
+          <p:cNvSpPr/>
+          <p:nvPr/>
+        </p:nvSpPr>
+        <p:spPr>
+          <a:xfrm>
+            <a:off x="9098280" y="1938528"/>
+            <a:ext cx="2176272" cy="877824"/>
+          </a:xfrm>
+          <a:prstGeom prst="roundRect">
+            <a:avLst>
+              <a:gd name="adj" fmla="val 10416"/>
+            </a:avLst>
+          </a:prstGeom>
+          <a:solidFill>
+            <a:srgbClr val="103A62"/>
+          </a:solidFill>
+          <a:ln w="12700">
+            <a:solidFill>
+              <a:srgbClr val="1A4B75"/>
+            </a:solidFill>
+          </a:ln>
+        </p:spPr>
+        <p:style>
+          <a:lnRef idx="1">
+            <a:schemeClr val="accent1"/>
+          </a:lnRef>
+          <a:fillRef idx="3">
+            <a:schemeClr val="accent1"/>
+          </a:fillRef>
+          <a:effectRef idx="2">
+            <a:schemeClr val="accent1"/>
+          </a:effectRef>
+          <a:fontRef idx="minor">
+            <a:schemeClr val="lt1"/>
+          </a:fontRef>
+        </p:style>
+        <p:txBody>
+          <a:bodyPr rtlCol="0" anchor="ctr"/>
+          <a:lstStyle/>
+          <a:p>
+            <a:pPr algn="ctr"/>
+          </a:p>
+        </p:txBody>
+      </p:sp>
+      <p:sp>
+        <p:nvSpPr>
+          <p:cNvPr id="13" name="TextBox 12"/>
+          <p:cNvSpPr txBox="1"/>
+          <p:nvPr/>
+        </p:nvSpPr>
+        <p:spPr>
+          <a:xfrm>
+            <a:off x="9217152" y="2011680"/>
+            <a:ext cx="1938528" cy="731520"/>
+          </a:xfrm>
+          <a:prstGeom prst="rect">
+            <a:avLst/>
+          </a:prstGeom>
+          <a:noFill/>
+        </p:spPr>
+        <p:txBody>
+          <a:bodyPr wrap="square" lIns="0" tIns="0" bIns="0" rIns="0">
+            <a:spAutoFit/>
+          </a:bodyPr>
+          <a:lstStyle/>
+          <a:p>
+            <a:pPr>
+              <a:defRPr sz="750" b="1">
+                <a:solidFill>
+                  <a:srgbClr val="00E5C0"/>
+                </a:solidFill>
+                <a:latin typeface="Arial"/>
+              </a:defRPr>
+            </a:pPr>
+            <a:r>
+              <a:t>DETERMINISTIC LLM GROUNDING</a:t>
             </a:r>
           </a:p>
           <a:p>
             <a:pPr>
               <a:spcBef>
-                <a:spcPts val="800"/>
+                <a:spcPts val="100"/>
               </a:spcBef>
-              <a:defRPr sz="900" b="1">
+              <a:defRPr sz="700">
+                <a:solidFill>
+                  <a:srgbClr val="AABED2"/>
+                </a:solidFill>
+                <a:latin typeface="Arial"/>
+              </a:defRPr>
+            </a:pPr>
+            <a:r>
+              <a:t>Constrained strictly to audited annual reports; zero generative drift or hallucination.</a:t>
+            </a:r>
+          </a:p>
+        </p:txBody>
+      </p:sp>
+      <p:sp>
+        <p:nvSpPr>
+          <p:cNvPr id="14" name="Rounded Rectangle 13"/>
+          <p:cNvSpPr/>
+          <p:nvPr/>
+        </p:nvSpPr>
+        <p:spPr>
+          <a:xfrm>
+            <a:off x="9098280" y="2889504"/>
+            <a:ext cx="2176272" cy="877824"/>
+          </a:xfrm>
+          <a:prstGeom prst="roundRect">
+            <a:avLst>
+              <a:gd name="adj" fmla="val 10416"/>
+            </a:avLst>
+          </a:prstGeom>
+          <a:solidFill>
+            <a:srgbClr val="103A62"/>
+          </a:solidFill>
+          <a:ln w="12700">
+            <a:solidFill>
+              <a:srgbClr val="1A4B75"/>
+            </a:solidFill>
+          </a:ln>
+        </p:spPr>
+        <p:style>
+          <a:lnRef idx="1">
+            <a:schemeClr val="accent1"/>
+          </a:lnRef>
+          <a:fillRef idx="3">
+            <a:schemeClr val="accent1"/>
+          </a:fillRef>
+          <a:effectRef idx="2">
+            <a:schemeClr val="accent1"/>
+          </a:effectRef>
+          <a:fontRef idx="minor">
+            <a:schemeClr val="lt1"/>
+          </a:fontRef>
+        </p:style>
+        <p:txBody>
+          <a:bodyPr rtlCol="0" anchor="ctr"/>
+          <a:lstStyle/>
+          <a:p>
+            <a:pPr algn="ctr"/>
+          </a:p>
+        </p:txBody>
+      </p:sp>
+      <p:sp>
+        <p:nvSpPr>
+          <p:cNvPr id="15" name="TextBox 14"/>
+          <p:cNvSpPr txBox="1"/>
+          <p:nvPr/>
+        </p:nvSpPr>
+        <p:spPr>
+          <a:xfrm>
+            <a:off x="9217152" y="2962656"/>
+            <a:ext cx="1938528" cy="731520"/>
+          </a:xfrm>
+          <a:prstGeom prst="rect">
+            <a:avLst/>
+          </a:prstGeom>
+          <a:noFill/>
+        </p:spPr>
+        <p:txBody>
+          <a:bodyPr wrap="square" lIns="0" tIns="0" bIns="0" rIns="0">
+            <a:spAutoFit/>
+          </a:bodyPr>
+          <a:lstStyle/>
+          <a:p>
+            <a:pPr>
+              <a:defRPr sz="750" b="1">
+                <a:solidFill>
+                  <a:srgbClr val="C8A064"/>
+                </a:solidFill>
+                <a:latin typeface="Arial"/>
+              </a:defRPr>
+            </a:pPr>
+            <a:r>
+              <a:t>PAGE-LEVEL CITATIONS</a:t>
+            </a:r>
+          </a:p>
+          <a:p>
+            <a:pPr>
+              <a:spcBef>
+                <a:spcPts val="100"/>
+              </a:spcBef>
+              <a:defRPr sz="700">
+                <a:solidFill>
+                  <a:srgbClr val="AABED2"/>
+                </a:solidFill>
+                <a:latin typeface="Arial"/>
+              </a:defRPr>
+            </a:pPr>
+            <a:r>
+              <a:t>Clickable citations link directly to primary PDF source pages for regulatory verification.</a:t>
+            </a:r>
+          </a:p>
+        </p:txBody>
+      </p:sp>
+      <p:sp>
+        <p:nvSpPr>
+          <p:cNvPr id="16" name="Rounded Rectangle 15"/>
+          <p:cNvSpPr/>
+          <p:nvPr/>
+        </p:nvSpPr>
+        <p:spPr>
+          <a:xfrm>
+            <a:off x="9098280" y="3840480"/>
+            <a:ext cx="2176272" cy="877824"/>
+          </a:xfrm>
+          <a:prstGeom prst="roundRect">
+            <a:avLst>
+              <a:gd name="adj" fmla="val 10416"/>
+            </a:avLst>
+          </a:prstGeom>
+          <a:solidFill>
+            <a:srgbClr val="103A62"/>
+          </a:solidFill>
+          <a:ln w="12700">
+            <a:solidFill>
+              <a:srgbClr val="1A4B75"/>
+            </a:solidFill>
+          </a:ln>
+        </p:spPr>
+        <p:style>
+          <a:lnRef idx="1">
+            <a:schemeClr val="accent1"/>
+          </a:lnRef>
+          <a:fillRef idx="3">
+            <a:schemeClr val="accent1"/>
+          </a:fillRef>
+          <a:effectRef idx="2">
+            <a:schemeClr val="accent1"/>
+          </a:effectRef>
+          <a:fontRef idx="minor">
+            <a:schemeClr val="lt1"/>
+          </a:fontRef>
+        </p:style>
+        <p:txBody>
+          <a:bodyPr rtlCol="0" anchor="ctr"/>
+          <a:lstStyle/>
+          <a:p>
+            <a:pPr algn="ctr"/>
+          </a:p>
+        </p:txBody>
+      </p:sp>
+      <p:sp>
+        <p:nvSpPr>
+          <p:cNvPr id="17" name="TextBox 16"/>
+          <p:cNvSpPr txBox="1"/>
+          <p:nvPr/>
+        </p:nvSpPr>
+        <p:spPr>
+          <a:xfrm>
+            <a:off x="9217152" y="3913632"/>
+            <a:ext cx="1938528" cy="731520"/>
+          </a:xfrm>
+          <a:prstGeom prst="rect">
+            <a:avLst/>
+          </a:prstGeom>
+          <a:noFill/>
+        </p:spPr>
+        <p:txBody>
+          <a:bodyPr wrap="square" lIns="0" tIns="0" bIns="0" rIns="0">
+            <a:spAutoFit/>
+          </a:bodyPr>
+          <a:lstStyle/>
+          <a:p>
+            <a:pPr>
+              <a:defRPr sz="750" b="1">
                 <a:solidFill>
                   <a:srgbClr val="00E5C0"/>
                 </a:solidFill>
@@ -11449,94 +13249,135 @@
               </a:defRPr>
             </a:pPr>
             <a:r>
-              <a:t>Investor Query:</a:t>
+              <a:t>DYNAMIC ACTION DEEP-LINKS</a:t>
             </a:r>
           </a:p>
           <a:p>
             <a:pPr>
               <a:spcBef>
-                <a:spcPts val="200"/>
+                <a:spcPts val="100"/>
               </a:spcBef>
-              <a:defRPr sz="1100" i="1">
+              <a:defRPr sz="700">
+                <a:solidFill>
+                  <a:srgbClr val="AABED2"/>
+                </a:solidFill>
+                <a:latin typeface="Arial"/>
+              </a:defRPr>
+            </a:pPr>
+            <a:r>
+              <a:t>One-click routing to the relevant asset profile and live operational telemetry drawer.</a:t>
+            </a:r>
+          </a:p>
+        </p:txBody>
+      </p:sp>
+      <p:sp>
+        <p:nvSpPr>
+          <p:cNvPr id="18" name="Rounded Rectangle 17"/>
+          <p:cNvSpPr/>
+          <p:nvPr/>
+        </p:nvSpPr>
+        <p:spPr>
+          <a:xfrm>
+            <a:off x="9098280" y="4791456"/>
+            <a:ext cx="2176272" cy="877824"/>
+          </a:xfrm>
+          <a:prstGeom prst="roundRect">
+            <a:avLst>
+              <a:gd name="adj" fmla="val 10416"/>
+            </a:avLst>
+          </a:prstGeom>
+          <a:solidFill>
+            <a:srgbClr val="103A62"/>
+          </a:solidFill>
+          <a:ln w="12700">
+            <a:solidFill>
+              <a:srgbClr val="1A4B75"/>
+            </a:solidFill>
+          </a:ln>
+        </p:spPr>
+        <p:style>
+          <a:lnRef idx="1">
+            <a:schemeClr val="accent1"/>
+          </a:lnRef>
+          <a:fillRef idx="3">
+            <a:schemeClr val="accent1"/>
+          </a:fillRef>
+          <a:effectRef idx="2">
+            <a:schemeClr val="accent1"/>
+          </a:effectRef>
+          <a:fontRef idx="minor">
+            <a:schemeClr val="lt1"/>
+          </a:fontRef>
+        </p:style>
+        <p:txBody>
+          <a:bodyPr rtlCol="0" anchor="ctr"/>
+          <a:lstStyle/>
+          <a:p>
+            <a:pPr algn="ctr"/>
+          </a:p>
+        </p:txBody>
+      </p:sp>
+      <p:sp>
+        <p:nvSpPr>
+          <p:cNvPr id="19" name="TextBox 18"/>
+          <p:cNvSpPr txBox="1"/>
+          <p:nvPr/>
+        </p:nvSpPr>
+        <p:spPr>
+          <a:xfrm>
+            <a:off x="9217152" y="4864608"/>
+            <a:ext cx="1938528" cy="731520"/>
+          </a:xfrm>
+          <a:prstGeom prst="rect">
+            <a:avLst/>
+          </a:prstGeom>
+          <a:noFill/>
+        </p:spPr>
+        <p:txBody>
+          <a:bodyPr wrap="square" lIns="0" tIns="0" bIns="0" rIns="0">
+            <a:spAutoFit/>
+          </a:bodyPr>
+          <a:lstStyle/>
+          <a:p>
+            <a:pPr>
+              <a:defRPr sz="750" b="1">
                 <a:solidFill>
                   <a:srgbClr val="FFFFFF"/>
                 </a:solidFill>
-                <a:latin typeface="Georgia"/>
-              </a:defRPr>
-            </a:pPr>
-            <a:r>
-              <a:t>"What is Gold Fields' progress on 2030 decarbonization and what is South Deep's solar plant contribution?"</a:t>
+                <a:latin typeface="Arial"/>
+              </a:defRPr>
+            </a:pPr>
+            <a:r>
+              <a:t>ENTERPRISE AUDIT TRAIL</a:t>
             </a:r>
           </a:p>
           <a:p>
             <a:pPr>
               <a:spcBef>
-                <a:spcPts val="1200"/>
+                <a:spcPts val="100"/>
               </a:spcBef>
-              <a:defRPr sz="900" b="1">
-                <a:solidFill>
-                  <a:srgbClr val="C8A064"/>
-                </a:solidFill>
-                <a:latin typeface="Arial"/>
-              </a:defRPr>
-            </a:pPr>
-            <a:r>
-              <a:t>Copilot Verified Response:</a:t>
-            </a:r>
-          </a:p>
-          <a:p>
-            <a:pPr>
-              <a:spcBef>
-                <a:spcPts val="400"/>
-              </a:spcBef>
-              <a:defRPr sz="900">
-                <a:solidFill>
-                  <a:srgbClr val="FFFFFF"/>
-                </a:solidFill>
-                <a:latin typeface="Arial"/>
-              </a:defRPr>
-            </a:pPr>
-            <a:r>
-              <a:t>1. Decarbonization Roadmap: Gold Fields is tracking toward a 30% absolute reduction in Scope 1 &amp; 2 emissions by 2030 (from 2016 baseline) and net-zero by 2050.</a:t>
-            </a:r>
-            <a:br/>
-            <a:br/>
-            <a:r>
-              <a:t>2. Khanyisa Solar Plant: South Deep's 50MW solar facility generates ~100GWh/year, supplying 24% of the mine's annual electricity and offsetting 110,000 tonnes of CO2e annually.</a:t>
-            </a:r>
-            <a:br/>
-            <a:br/>
-            <a:r>
-              <a:t>3. Australian Microgrids: Agnew (hybrid wind/solar/battery) and Granny Smith solar microgrids pushed group renewable electricity generation to 54% in H1 2026.</a:t>
-            </a:r>
-          </a:p>
-          <a:p>
-            <a:pPr>
-              <a:spcBef>
-                <a:spcPts val="1000"/>
-              </a:spcBef>
-              <a:defRPr sz="800" b="1">
-                <a:solidFill>
-                  <a:srgbClr val="00E5C0"/>
-                </a:solidFill>
-                <a:latin typeface="Arial"/>
-              </a:defRPr>
-            </a:pPr>
-            <a:r>
-              <a:t>Verified Citations: [Climate Change Report 2025, pp. 24-28] • [H1 2026 Disclosures, p. 12] • [South Deep Technical Bulletin 2026]</a:t>
-            </a:r>
-          </a:p>
-        </p:txBody>
-      </p:sp>
-      <p:sp>
-        <p:nvSpPr>
-          <p:cNvPr id="11" name="Rectangle 10"/>
+              <a:defRPr sz="700">
+                <a:solidFill>
+                  <a:srgbClr val="AABED2"/>
+                </a:solidFill>
+                <a:latin typeface="Arial"/>
+              </a:defRPr>
+            </a:pPr>
+            <a:r>
+              <a:t>Every query, citation, and session token is cryptographically logged for compliance.</a:t>
+            </a:r>
+          </a:p>
+        </p:txBody>
+      </p:sp>
+      <p:sp>
+        <p:nvSpPr>
+          <p:cNvPr id="20" name="Rectangle 19"/>
           <p:cNvSpPr/>
           <p:nvPr/>
         </p:nvSpPr>
         <p:spPr>
           <a:xfrm>
-            <a:off x="731520" y="6400800"/>
+            <a:off x="731520" y="6144768"/>
             <a:ext cx="10728655" cy="13716"/>
           </a:xfrm>
           <a:prstGeom prst="rect">
@@ -11573,13 +13414,13 @@
       </p:sp>
       <p:sp>
         <p:nvSpPr>
-          <p:cNvPr id="12" name="TextBox 11"/>
+          <p:cNvPr id="21" name="TextBox 20"/>
           <p:cNvSpPr txBox="1"/>
           <p:nvPr/>
         </p:nvSpPr>
         <p:spPr>
           <a:xfrm>
-            <a:off x="731520" y="6446520"/>
+            <a:off x="731520" y="6236208"/>
             <a:ext cx="8229600" cy="320040"/>
           </a:xfrm>
           <a:prstGeom prst="rect">
@@ -11594,9 +13435,9 @@
           <a:lstStyle/>
           <a:p>
             <a:pPr>
-              <a:defRPr sz="900">
-                <a:solidFill>
-                  <a:srgbClr val="A5B9CD"/>
+              <a:defRPr sz="850">
+                <a:solidFill>
+                  <a:srgbClr val="AABED2"/>
                 </a:solidFill>
                 <a:latin typeface="Arial"/>
               </a:defRPr>
@@ -11609,13 +13450,13 @@
       </p:sp>
       <p:sp>
         <p:nvSpPr>
-          <p:cNvPr id="13" name="TextBox 12"/>
+          <p:cNvPr id="22" name="TextBox 21"/>
           <p:cNvSpPr txBox="1"/>
           <p:nvPr/>
         </p:nvSpPr>
         <p:spPr>
           <a:xfrm>
-            <a:off x="9601200" y="6446520"/>
+            <a:off x="9601200" y="6236208"/>
             <a:ext cx="1858975" cy="320040"/>
           </a:xfrm>
           <a:prstGeom prst="rect">
@@ -11630,7 +13471,7 @@
           <a:lstStyle/>
           <a:p>
             <a:pPr algn="r">
-              <a:defRPr sz="900" b="1">
+              <a:defRPr sz="850" b="1">
                 <a:solidFill>
                   <a:srgbClr val="C8A064"/>
                 </a:solidFill>
@@ -11685,8 +13526,8 @@
         </p:blipFill>
         <p:spPr>
           <a:xfrm>
-            <a:off x="731520" y="365760"/>
-            <a:ext cx="1056315" cy="347472"/>
+            <a:off x="731520" y="320040"/>
+            <a:ext cx="889528" cy="292608"/>
           </a:xfrm>
           <a:prstGeom prst="rect">
             <a:avLst/>
@@ -11701,8 +13542,8 @@
         </p:nvSpPr>
         <p:spPr>
           <a:xfrm>
-            <a:off x="2011680" y="365760"/>
-            <a:ext cx="18288" cy="347472"/>
+            <a:off x="1920240" y="320040"/>
+            <a:ext cx="13716" cy="292608"/>
           </a:xfrm>
           <a:prstGeom prst="rect">
             <a:avLst/>
@@ -11744,8 +13585,8 @@
         </p:nvSpPr>
         <p:spPr>
           <a:xfrm>
-            <a:off x="2148840" y="365760"/>
-            <a:ext cx="4114800" cy="347472"/>
+            <a:off x="2057400" y="320040"/>
+            <a:ext cx="4114800" cy="292608"/>
           </a:xfrm>
           <a:prstGeom prst="rect">
             <a:avLst/>
@@ -11761,7 +13602,7 @@
             <a:pPr>
               <a:defRPr sz="850" b="1">
                 <a:solidFill>
-                  <a:srgbClr val="A5B9CD"/>
+                  <a:srgbClr val="AABED2"/>
                 </a:solidFill>
                 <a:latin typeface="Arial"/>
               </a:defRPr>
@@ -11780,11 +13621,13 @@
         </p:nvSpPr>
         <p:spPr>
           <a:xfrm>
-            <a:off x="8961120" y="329184"/>
-            <a:ext cx="2499055" cy="384048"/>
+            <a:off x="8961120" y="292608"/>
+            <a:ext cx="2499055" cy="329184"/>
           </a:xfrm>
           <a:prstGeom prst="roundRect">
-            <a:avLst/>
+            <a:avLst>
+              <a:gd name="adj" fmla="val 33333"/>
+            </a:avLst>
           </a:prstGeom>
           <a:solidFill>
             <a:srgbClr val="0B3052"/>
@@ -11810,7 +13653,7 @@
           </a:fontRef>
         </p:style>
         <p:txBody>
-          <a:bodyPr rtlCol="0" anchor="ctr" wrap="square" tIns="54864"/>
+          <a:bodyPr rtlCol="0" anchor="ctr" wrap="square" tIns="36576"/>
           <a:lstStyle/>
           <a:p>
             <a:pPr algn="ctr">
@@ -11835,8 +13678,8 @@
         </p:nvSpPr>
         <p:spPr>
           <a:xfrm>
-            <a:off x="731520" y="868680"/>
-            <a:ext cx="10728655" cy="594360"/>
+            <a:off x="731520" y="749808"/>
+            <a:ext cx="10728655" cy="438912"/>
           </a:xfrm>
           <a:prstGeom prst="rect">
             <a:avLst/>
@@ -11850,7 +13693,7 @@
           <a:lstStyle/>
           <a:p>
             <a:pPr>
-              <a:defRPr sz="2200" b="1">
+              <a:defRPr sz="2000" b="1">
                 <a:solidFill>
                   <a:srgbClr val="FFFFFF"/>
                 </a:solidFill>
@@ -11871,11 +13714,13 @@
         </p:nvSpPr>
         <p:spPr>
           <a:xfrm>
-            <a:off x="731520" y="1508760"/>
-            <a:ext cx="5669280" cy="4709160"/>
+            <a:off x="731520" y="1371600"/>
+            <a:ext cx="5257800" cy="4572000"/>
           </a:xfrm>
           <a:prstGeom prst="roundRect">
-            <a:avLst/>
+            <a:avLst>
+              <a:gd name="adj" fmla="val 3000"/>
+            </a:avLst>
           </a:prstGeom>
           <a:solidFill>
             <a:srgbClr val="0B3052"/>
@@ -11908,9 +13753,219 @@
           </a:p>
         </p:txBody>
       </p:sp>
+      <p:sp>
+        <p:nvSpPr>
+          <p:cNvPr id="8" name="Rectangle 7"/>
+          <p:cNvSpPr/>
+          <p:nvPr/>
+        </p:nvSpPr>
+        <p:spPr>
+          <a:xfrm>
+            <a:off x="896112" y="1536192"/>
+            <a:ext cx="4928616" cy="219456"/>
+          </a:xfrm>
+          <a:prstGeom prst="rect">
+            <a:avLst/>
+          </a:prstGeom>
+          <a:solidFill>
+            <a:srgbClr val="103A62"/>
+          </a:solidFill>
+          <a:ln w="9525">
+            <a:solidFill>
+              <a:srgbClr val="1A4B75"/>
+            </a:solidFill>
+          </a:ln>
+        </p:spPr>
+        <p:style>
+          <a:lnRef idx="1">
+            <a:schemeClr val="accent1"/>
+          </a:lnRef>
+          <a:fillRef idx="3">
+            <a:schemeClr val="accent1"/>
+          </a:fillRef>
+          <a:effectRef idx="2">
+            <a:schemeClr val="accent1"/>
+          </a:effectRef>
+          <a:fontRef idx="minor">
+            <a:schemeClr val="lt1"/>
+          </a:fontRef>
+        </p:style>
+        <p:txBody>
+          <a:bodyPr rtlCol="0" anchor="ctr"/>
+          <a:lstStyle/>
+          <a:p>
+            <a:pPr algn="ctr"/>
+          </a:p>
+        </p:txBody>
+      </p:sp>
+      <p:sp>
+        <p:nvSpPr>
+          <p:cNvPr id="9" name="Oval 8"/>
+          <p:cNvSpPr/>
+          <p:nvPr/>
+        </p:nvSpPr>
+        <p:spPr>
+          <a:xfrm>
+            <a:off x="987552" y="1609344"/>
+            <a:ext cx="73152" cy="73152"/>
+          </a:xfrm>
+          <a:prstGeom prst="ellipse">
+            <a:avLst/>
+          </a:prstGeom>
+          <a:solidFill>
+            <a:srgbClr val="EB5A50"/>
+          </a:solidFill>
+          <a:ln>
+            <a:noFill/>
+          </a:ln>
+        </p:spPr>
+        <p:style>
+          <a:lnRef idx="1">
+            <a:schemeClr val="accent1"/>
+          </a:lnRef>
+          <a:fillRef idx="3">
+            <a:schemeClr val="accent1"/>
+          </a:fillRef>
+          <a:effectRef idx="2">
+            <a:schemeClr val="accent1"/>
+          </a:effectRef>
+          <a:fontRef idx="minor">
+            <a:schemeClr val="lt1"/>
+          </a:fontRef>
+        </p:style>
+        <p:txBody>
+          <a:bodyPr rtlCol="0" anchor="ctr"/>
+          <a:lstStyle/>
+          <a:p>
+            <a:pPr algn="ctr"/>
+          </a:p>
+        </p:txBody>
+      </p:sp>
+      <p:sp>
+        <p:nvSpPr>
+          <p:cNvPr id="10" name="Oval 9"/>
+          <p:cNvSpPr/>
+          <p:nvPr/>
+        </p:nvSpPr>
+        <p:spPr>
+          <a:xfrm>
+            <a:off x="1115568" y="1609344"/>
+            <a:ext cx="73152" cy="73152"/>
+          </a:xfrm>
+          <a:prstGeom prst="ellipse">
+            <a:avLst/>
+          </a:prstGeom>
+          <a:solidFill>
+            <a:srgbClr val="F5B94B"/>
+          </a:solidFill>
+          <a:ln>
+            <a:noFill/>
+          </a:ln>
+        </p:spPr>
+        <p:style>
+          <a:lnRef idx="1">
+            <a:schemeClr val="accent1"/>
+          </a:lnRef>
+          <a:fillRef idx="3">
+            <a:schemeClr val="accent1"/>
+          </a:fillRef>
+          <a:effectRef idx="2">
+            <a:schemeClr val="accent1"/>
+          </a:effectRef>
+          <a:fontRef idx="minor">
+            <a:schemeClr val="lt1"/>
+          </a:fontRef>
+        </p:style>
+        <p:txBody>
+          <a:bodyPr rtlCol="0" anchor="ctr"/>
+          <a:lstStyle/>
+          <a:p>
+            <a:pPr algn="ctr"/>
+          </a:p>
+        </p:txBody>
+      </p:sp>
+      <p:sp>
+        <p:nvSpPr>
+          <p:cNvPr id="11" name="Oval 10"/>
+          <p:cNvSpPr/>
+          <p:nvPr/>
+        </p:nvSpPr>
+        <p:spPr>
+          <a:xfrm>
+            <a:off x="1243584" y="1609344"/>
+            <a:ext cx="73152" cy="73152"/>
+          </a:xfrm>
+          <a:prstGeom prst="ellipse">
+            <a:avLst/>
+          </a:prstGeom>
+          <a:solidFill>
+            <a:srgbClr val="2DC378"/>
+          </a:solidFill>
+          <a:ln>
+            <a:noFill/>
+          </a:ln>
+        </p:spPr>
+        <p:style>
+          <a:lnRef idx="1">
+            <a:schemeClr val="accent1"/>
+          </a:lnRef>
+          <a:fillRef idx="3">
+            <a:schemeClr val="accent1"/>
+          </a:fillRef>
+          <a:effectRef idx="2">
+            <a:schemeClr val="accent1"/>
+          </a:effectRef>
+          <a:fontRef idx="minor">
+            <a:schemeClr val="lt1"/>
+          </a:fontRef>
+        </p:style>
+        <p:txBody>
+          <a:bodyPr rtlCol="0" anchor="ctr"/>
+          <a:lstStyle/>
+          <a:p>
+            <a:pPr algn="ctr"/>
+          </a:p>
+        </p:txBody>
+      </p:sp>
+      <p:sp>
+        <p:nvSpPr>
+          <p:cNvPr id="12" name="TextBox 11"/>
+          <p:cNvSpPr txBox="1"/>
+          <p:nvPr/>
+        </p:nvSpPr>
+        <p:spPr>
+          <a:xfrm>
+            <a:off x="1399032" y="1554480"/>
+            <a:ext cx="4334256" cy="182880"/>
+          </a:xfrm>
+          <a:prstGeom prst="rect">
+            <a:avLst/>
+          </a:prstGeom>
+          <a:noFill/>
+        </p:spPr>
+        <p:txBody>
+          <a:bodyPr wrap="none" lIns="0" tIns="0" bIns="0" rIns="0">
+            <a:spAutoFit/>
+          </a:bodyPr>
+          <a:lstStyle/>
+          <a:p>
+            <a:pPr>
+              <a:defRPr sz="700">
+                <a:solidFill>
+                  <a:srgbClr val="AABED2"/>
+                </a:solidFill>
+                <a:latin typeface="Arial"/>
+              </a:defRPr>
+            </a:pPr>
+            <a:r>
+              <a:t>🔒  goldfields-bay.vercel.app#operations-globe</a:t>
+            </a:r>
+          </a:p>
+        </p:txBody>
+      </p:sp>
       <p:pic>
         <p:nvPicPr>
-          <p:cNvPr id="8" name="Picture 7" descr="media_1790528693970.png"/>
+          <p:cNvPr id="13" name="Picture 12" descr="media_1790528693970.png"/>
           <p:cNvPicPr>
             <a:picLocks noChangeAspect="1"/>
           </p:cNvPicPr>
@@ -11924,8 +13979,8 @@
         </p:blipFill>
         <p:spPr>
           <a:xfrm>
-            <a:off x="868680" y="1645920"/>
-            <a:ext cx="5394960" cy="2470934"/>
+            <a:off x="896112" y="1755648"/>
+            <a:ext cx="4928616" cy="2257344"/>
           </a:xfrm>
           <a:prstGeom prst="rect">
             <a:avLst/>
@@ -11934,14 +13989,14 @@
       </p:pic>
       <p:sp>
         <p:nvSpPr>
-          <p:cNvPr id="9" name="TextBox 8"/>
+          <p:cNvPr id="14" name="TextBox 13"/>
           <p:cNvSpPr txBox="1"/>
           <p:nvPr/>
         </p:nvSpPr>
         <p:spPr>
           <a:xfrm>
-            <a:off x="868680" y="5349240"/>
-            <a:ext cx="5394960" cy="731520"/>
+            <a:off x="896112" y="4736592"/>
+            <a:ext cx="4928616" cy="1115568"/>
           </a:xfrm>
           <a:prstGeom prst="rect">
             <a:avLst/>
@@ -11955,7 +14010,7 @@
           <a:lstStyle/>
           <a:p>
             <a:pPr>
-              <a:defRPr sz="850" b="1">
+              <a:defRPr sz="800" b="1">
                 <a:solidFill>
                   <a:srgbClr val="00E5C0"/>
                 </a:solidFill>
@@ -11968,9 +14023,12 @@
           </a:p>
           <a:p>
             <a:pPr>
-              <a:defRPr sz="800">
-                <a:solidFill>
-                  <a:srgbClr val="A5B9CD"/>
+              <a:spcBef>
+                <a:spcPts val="200"/>
+              </a:spcBef>
+              <a:defRPr sz="750">
+                <a:solidFill>
+                  <a:srgbClr val="AABED2"/>
                 </a:solidFill>
                 <a:latin typeface="Arial"/>
               </a:defRPr>
@@ -11983,17 +14041,19 @@
       </p:sp>
       <p:sp>
         <p:nvSpPr>
-          <p:cNvPr id="10" name="Rounded Rectangle 9"/>
+          <p:cNvPr id="15" name="Rounded Rectangle 14"/>
           <p:cNvSpPr/>
           <p:nvPr/>
         </p:nvSpPr>
         <p:spPr>
           <a:xfrm>
-            <a:off x="6656832" y="1508760"/>
-            <a:ext cx="4800600" cy="4709160"/>
+            <a:off x="6199632" y="1371600"/>
+            <a:ext cx="5257800" cy="4572000"/>
           </a:xfrm>
           <a:prstGeom prst="roundRect">
-            <a:avLst/>
+            <a:avLst>
+              <a:gd name="adj" fmla="val 3000"/>
+            </a:avLst>
           </a:prstGeom>
           <a:solidFill>
             <a:srgbClr val="0B3052"/>
@@ -12028,14 +14088,14 @@
       </p:sp>
       <p:sp>
         <p:nvSpPr>
-          <p:cNvPr id="11" name="TextBox 10"/>
+          <p:cNvPr id="16" name="TextBox 15"/>
           <p:cNvSpPr txBox="1"/>
           <p:nvPr/>
         </p:nvSpPr>
         <p:spPr>
           <a:xfrm>
-            <a:off x="6903720" y="1691640"/>
-            <a:ext cx="4297680" cy="4343400"/>
+            <a:off x="6446520" y="1554480"/>
+            <a:ext cx="4754880" cy="4160520"/>
           </a:xfrm>
           <a:prstGeom prst="rect">
             <a:avLst/>
@@ -12063,7 +14123,7 @@
           <a:p>
             <a:pPr>
               <a:spcBef>
-                <a:spcPts val="400"/>
+                <a:spcPts val="500"/>
               </a:spcBef>
               <a:defRPr sz="950" b="1">
                 <a:solidFill>
@@ -12081,9 +14141,9 @@
               <a:spcBef>
                 <a:spcPts val="100"/>
               </a:spcBef>
-              <a:defRPr sz="800">
-                <a:solidFill>
-                  <a:srgbClr val="A5B9CD"/>
+              <a:defRPr sz="750">
+                <a:solidFill>
+                  <a:srgbClr val="AABED2"/>
                 </a:solidFill>
                 <a:latin typeface="Arial"/>
               </a:defRPr>
@@ -12095,7 +14155,7 @@
           <a:p>
             <a:pPr>
               <a:spcBef>
-                <a:spcPts val="400"/>
+                <a:spcPts val="500"/>
               </a:spcBef>
               <a:defRPr sz="950" b="1">
                 <a:solidFill>
@@ -12113,9 +14173,9 @@
               <a:spcBef>
                 <a:spcPts val="100"/>
               </a:spcBef>
-              <a:defRPr sz="800">
-                <a:solidFill>
-                  <a:srgbClr val="A5B9CD"/>
+              <a:defRPr sz="750">
+                <a:solidFill>
+                  <a:srgbClr val="AABED2"/>
                 </a:solidFill>
                 <a:latin typeface="Arial"/>
               </a:defRPr>
@@ -12127,7 +14187,7 @@
           <a:p>
             <a:pPr>
               <a:spcBef>
-                <a:spcPts val="400"/>
+                <a:spcPts val="500"/>
               </a:spcBef>
               <a:defRPr sz="950" b="1">
                 <a:solidFill>
@@ -12145,9 +14205,9 @@
               <a:spcBef>
                 <a:spcPts val="100"/>
               </a:spcBef>
-              <a:defRPr sz="800">
-                <a:solidFill>
-                  <a:srgbClr val="A5B9CD"/>
+              <a:defRPr sz="750">
+                <a:solidFill>
+                  <a:srgbClr val="AABED2"/>
                 </a:solidFill>
                 <a:latin typeface="Arial"/>
               </a:defRPr>
@@ -12159,7 +14219,7 @@
           <a:p>
             <a:pPr>
               <a:spcBef>
-                <a:spcPts val="400"/>
+                <a:spcPts val="500"/>
               </a:spcBef>
               <a:defRPr sz="950" b="1">
                 <a:solidFill>
@@ -12177,9 +14237,9 @@
               <a:spcBef>
                 <a:spcPts val="100"/>
               </a:spcBef>
-              <a:defRPr sz="800">
-                <a:solidFill>
-                  <a:srgbClr val="A5B9CD"/>
+              <a:defRPr sz="750">
+                <a:solidFill>
+                  <a:srgbClr val="AABED2"/>
                 </a:solidFill>
                 <a:latin typeface="Arial"/>
               </a:defRPr>
@@ -12191,7 +14251,7 @@
           <a:p>
             <a:pPr>
               <a:spcBef>
-                <a:spcPts val="400"/>
+                <a:spcPts val="500"/>
               </a:spcBef>
               <a:defRPr sz="950" b="1">
                 <a:solidFill>
@@ -12209,9 +14269,9 @@
               <a:spcBef>
                 <a:spcPts val="100"/>
               </a:spcBef>
-              <a:defRPr sz="800">
-                <a:solidFill>
-                  <a:srgbClr val="A5B9CD"/>
+              <a:defRPr sz="750">
+                <a:solidFill>
+                  <a:srgbClr val="AABED2"/>
                 </a:solidFill>
                 <a:latin typeface="Arial"/>
               </a:defRPr>
@@ -12223,7 +14283,7 @@
           <a:p>
             <a:pPr>
               <a:spcBef>
-                <a:spcPts val="400"/>
+                <a:spcPts val="500"/>
               </a:spcBef>
               <a:defRPr sz="950" b="1">
                 <a:solidFill>
@@ -12241,9 +14301,9 @@
               <a:spcBef>
                 <a:spcPts val="100"/>
               </a:spcBef>
-              <a:defRPr sz="800">
-                <a:solidFill>
-                  <a:srgbClr val="A5B9CD"/>
+              <a:defRPr sz="750">
+                <a:solidFill>
+                  <a:srgbClr val="AABED2"/>
                 </a:solidFill>
                 <a:latin typeface="Arial"/>
               </a:defRPr>
@@ -12256,13 +14316,13 @@
       </p:sp>
       <p:sp>
         <p:nvSpPr>
-          <p:cNvPr id="12" name="Rectangle 11"/>
+          <p:cNvPr id="17" name="Rectangle 16"/>
           <p:cNvSpPr/>
           <p:nvPr/>
         </p:nvSpPr>
         <p:spPr>
           <a:xfrm>
-            <a:off x="731520" y="6400800"/>
+            <a:off x="731520" y="6144768"/>
             <a:ext cx="10728655" cy="13716"/>
           </a:xfrm>
           <a:prstGeom prst="rect">
@@ -12299,13 +14359,13 @@
       </p:sp>
       <p:sp>
         <p:nvSpPr>
-          <p:cNvPr id="13" name="TextBox 12"/>
+          <p:cNvPr id="18" name="TextBox 17"/>
           <p:cNvSpPr txBox="1"/>
           <p:nvPr/>
         </p:nvSpPr>
         <p:spPr>
           <a:xfrm>
-            <a:off x="731520" y="6446520"/>
+            <a:off x="731520" y="6236208"/>
             <a:ext cx="8229600" cy="320040"/>
           </a:xfrm>
           <a:prstGeom prst="rect">
@@ -12320,9 +14380,9 @@
           <a:lstStyle/>
           <a:p>
             <a:pPr>
-              <a:defRPr sz="900">
-                <a:solidFill>
-                  <a:srgbClr val="A5B9CD"/>
+              <a:defRPr sz="850">
+                <a:solidFill>
+                  <a:srgbClr val="AABED2"/>
                 </a:solidFill>
                 <a:latin typeface="Arial"/>
               </a:defRPr>
@@ -12335,13 +14395,13 @@
       </p:sp>
       <p:sp>
         <p:nvSpPr>
-          <p:cNvPr id="14" name="TextBox 13"/>
+          <p:cNvPr id="19" name="TextBox 18"/>
           <p:cNvSpPr txBox="1"/>
           <p:nvPr/>
         </p:nvSpPr>
         <p:spPr>
           <a:xfrm>
-            <a:off x="9601200" y="6446520"/>
+            <a:off x="9601200" y="6236208"/>
             <a:ext cx="1858975" cy="320040"/>
           </a:xfrm>
           <a:prstGeom prst="rect">
@@ -12356,7 +14416,7 @@
           <a:lstStyle/>
           <a:p>
             <a:pPr algn="r">
-              <a:defRPr sz="900" b="1">
+              <a:defRPr sz="850" b="1">
                 <a:solidFill>
                   <a:srgbClr val="C8A064"/>
                 </a:solidFill>
@@ -12411,8 +14471,8 @@
         </p:blipFill>
         <p:spPr>
           <a:xfrm>
-            <a:off x="731520" y="365760"/>
-            <a:ext cx="1056315" cy="347472"/>
+            <a:off x="731520" y="320040"/>
+            <a:ext cx="889528" cy="292608"/>
           </a:xfrm>
           <a:prstGeom prst="rect">
             <a:avLst/>
@@ -12427,8 +14487,8 @@
         </p:nvSpPr>
         <p:spPr>
           <a:xfrm>
-            <a:off x="2011680" y="365760"/>
-            <a:ext cx="18288" cy="347472"/>
+            <a:off x="1920240" y="320040"/>
+            <a:ext cx="13716" cy="292608"/>
           </a:xfrm>
           <a:prstGeom prst="rect">
             <a:avLst/>
@@ -12470,8 +14530,8 @@
         </p:nvSpPr>
         <p:spPr>
           <a:xfrm>
-            <a:off x="2148840" y="365760"/>
-            <a:ext cx="4114800" cy="347472"/>
+            <a:off x="2057400" y="320040"/>
+            <a:ext cx="4114800" cy="292608"/>
           </a:xfrm>
           <a:prstGeom prst="rect">
             <a:avLst/>
@@ -12487,7 +14547,7 @@
             <a:pPr>
               <a:defRPr sz="850" b="1">
                 <a:solidFill>
-                  <a:srgbClr val="A5B9CD"/>
+                  <a:srgbClr val="AABED2"/>
                 </a:solidFill>
                 <a:latin typeface="Arial"/>
               </a:defRPr>
@@ -12506,11 +14566,13 @@
         </p:nvSpPr>
         <p:spPr>
           <a:xfrm>
-            <a:off x="8961120" y="329184"/>
-            <a:ext cx="2499055" cy="384048"/>
+            <a:off x="8961120" y="292608"/>
+            <a:ext cx="2499055" cy="329184"/>
           </a:xfrm>
           <a:prstGeom prst="roundRect">
-            <a:avLst/>
+            <a:avLst>
+              <a:gd name="adj" fmla="val 33333"/>
+            </a:avLst>
           </a:prstGeom>
           <a:solidFill>
             <a:srgbClr val="0B3052"/>
@@ -12536,7 +14598,7 @@
           </a:fontRef>
         </p:style>
         <p:txBody>
-          <a:bodyPr rtlCol="0" anchor="ctr" wrap="square" tIns="54864"/>
+          <a:bodyPr rtlCol="0" anchor="ctr" wrap="square" tIns="36576"/>
           <a:lstStyle/>
           <a:p>
             <a:pPr algn="ctr">
@@ -12561,8 +14623,8 @@
         </p:nvSpPr>
         <p:spPr>
           <a:xfrm>
-            <a:off x="731520" y="868680"/>
-            <a:ext cx="10728655" cy="594360"/>
+            <a:off x="731520" y="749808"/>
+            <a:ext cx="10728655" cy="438912"/>
           </a:xfrm>
           <a:prstGeom prst="rect">
             <a:avLst/>
@@ -12576,7 +14638,7 @@
           <a:lstStyle/>
           <a:p>
             <a:pPr>
-              <a:defRPr sz="2200" b="1">
+              <a:defRPr sz="2000" b="1">
                 <a:solidFill>
                   <a:srgbClr val="FFFFFF"/>
                 </a:solidFill>
@@ -12597,11 +14659,13 @@
         </p:nvSpPr>
         <p:spPr>
           <a:xfrm>
-            <a:off x="731520" y="1508760"/>
-            <a:ext cx="5120640" cy="4709160"/>
+            <a:off x="731520" y="1371600"/>
+            <a:ext cx="5257800" cy="4572000"/>
           </a:xfrm>
           <a:prstGeom prst="roundRect">
-            <a:avLst/>
+            <a:avLst>
+              <a:gd name="adj" fmla="val 3000"/>
+            </a:avLst>
           </a:prstGeom>
           <a:solidFill>
             <a:srgbClr val="0B3052"/>
@@ -12634,9 +14698,219 @@
           </a:p>
         </p:txBody>
       </p:sp>
+      <p:sp>
+        <p:nvSpPr>
+          <p:cNvPr id="8" name="Rectangle 7"/>
+          <p:cNvSpPr/>
+          <p:nvPr/>
+        </p:nvSpPr>
+        <p:spPr>
+          <a:xfrm>
+            <a:off x="896112" y="1536192"/>
+            <a:ext cx="4928616" cy="219456"/>
+          </a:xfrm>
+          <a:prstGeom prst="rect">
+            <a:avLst/>
+          </a:prstGeom>
+          <a:solidFill>
+            <a:srgbClr val="103A62"/>
+          </a:solidFill>
+          <a:ln w="9525">
+            <a:solidFill>
+              <a:srgbClr val="1A4B75"/>
+            </a:solidFill>
+          </a:ln>
+        </p:spPr>
+        <p:style>
+          <a:lnRef idx="1">
+            <a:schemeClr val="accent1"/>
+          </a:lnRef>
+          <a:fillRef idx="3">
+            <a:schemeClr val="accent1"/>
+          </a:fillRef>
+          <a:effectRef idx="2">
+            <a:schemeClr val="accent1"/>
+          </a:effectRef>
+          <a:fontRef idx="minor">
+            <a:schemeClr val="lt1"/>
+          </a:fontRef>
+        </p:style>
+        <p:txBody>
+          <a:bodyPr rtlCol="0" anchor="ctr"/>
+          <a:lstStyle/>
+          <a:p>
+            <a:pPr algn="ctr"/>
+          </a:p>
+        </p:txBody>
+      </p:sp>
+      <p:sp>
+        <p:nvSpPr>
+          <p:cNvPr id="9" name="Oval 8"/>
+          <p:cNvSpPr/>
+          <p:nvPr/>
+        </p:nvSpPr>
+        <p:spPr>
+          <a:xfrm>
+            <a:off x="987552" y="1609344"/>
+            <a:ext cx="73152" cy="73152"/>
+          </a:xfrm>
+          <a:prstGeom prst="ellipse">
+            <a:avLst/>
+          </a:prstGeom>
+          <a:solidFill>
+            <a:srgbClr val="EB5A50"/>
+          </a:solidFill>
+          <a:ln>
+            <a:noFill/>
+          </a:ln>
+        </p:spPr>
+        <p:style>
+          <a:lnRef idx="1">
+            <a:schemeClr val="accent1"/>
+          </a:lnRef>
+          <a:fillRef idx="3">
+            <a:schemeClr val="accent1"/>
+          </a:fillRef>
+          <a:effectRef idx="2">
+            <a:schemeClr val="accent1"/>
+          </a:effectRef>
+          <a:fontRef idx="minor">
+            <a:schemeClr val="lt1"/>
+          </a:fontRef>
+        </p:style>
+        <p:txBody>
+          <a:bodyPr rtlCol="0" anchor="ctr"/>
+          <a:lstStyle/>
+          <a:p>
+            <a:pPr algn="ctr"/>
+          </a:p>
+        </p:txBody>
+      </p:sp>
+      <p:sp>
+        <p:nvSpPr>
+          <p:cNvPr id="10" name="Oval 9"/>
+          <p:cNvSpPr/>
+          <p:nvPr/>
+        </p:nvSpPr>
+        <p:spPr>
+          <a:xfrm>
+            <a:off x="1115568" y="1609344"/>
+            <a:ext cx="73152" cy="73152"/>
+          </a:xfrm>
+          <a:prstGeom prst="ellipse">
+            <a:avLst/>
+          </a:prstGeom>
+          <a:solidFill>
+            <a:srgbClr val="F5B94B"/>
+          </a:solidFill>
+          <a:ln>
+            <a:noFill/>
+          </a:ln>
+        </p:spPr>
+        <p:style>
+          <a:lnRef idx="1">
+            <a:schemeClr val="accent1"/>
+          </a:lnRef>
+          <a:fillRef idx="3">
+            <a:schemeClr val="accent1"/>
+          </a:fillRef>
+          <a:effectRef idx="2">
+            <a:schemeClr val="accent1"/>
+          </a:effectRef>
+          <a:fontRef idx="minor">
+            <a:schemeClr val="lt1"/>
+          </a:fontRef>
+        </p:style>
+        <p:txBody>
+          <a:bodyPr rtlCol="0" anchor="ctr"/>
+          <a:lstStyle/>
+          <a:p>
+            <a:pPr algn="ctr"/>
+          </a:p>
+        </p:txBody>
+      </p:sp>
+      <p:sp>
+        <p:nvSpPr>
+          <p:cNvPr id="11" name="Oval 10"/>
+          <p:cNvSpPr/>
+          <p:nvPr/>
+        </p:nvSpPr>
+        <p:spPr>
+          <a:xfrm>
+            <a:off x="1243584" y="1609344"/>
+            <a:ext cx="73152" cy="73152"/>
+          </a:xfrm>
+          <a:prstGeom prst="ellipse">
+            <a:avLst/>
+          </a:prstGeom>
+          <a:solidFill>
+            <a:srgbClr val="2DC378"/>
+          </a:solidFill>
+          <a:ln>
+            <a:noFill/>
+          </a:ln>
+        </p:spPr>
+        <p:style>
+          <a:lnRef idx="1">
+            <a:schemeClr val="accent1"/>
+          </a:lnRef>
+          <a:fillRef idx="3">
+            <a:schemeClr val="accent1"/>
+          </a:fillRef>
+          <a:effectRef idx="2">
+            <a:schemeClr val="accent1"/>
+          </a:effectRef>
+          <a:fontRef idx="minor">
+            <a:schemeClr val="lt1"/>
+          </a:fontRef>
+        </p:style>
+        <p:txBody>
+          <a:bodyPr rtlCol="0" anchor="ctr"/>
+          <a:lstStyle/>
+          <a:p>
+            <a:pPr algn="ctr"/>
+          </a:p>
+        </p:txBody>
+      </p:sp>
+      <p:sp>
+        <p:nvSpPr>
+          <p:cNvPr id="12" name="TextBox 11"/>
+          <p:cNvSpPr txBox="1"/>
+          <p:nvPr/>
+        </p:nvSpPr>
+        <p:spPr>
+          <a:xfrm>
+            <a:off x="1399032" y="1554480"/>
+            <a:ext cx="4334256" cy="182880"/>
+          </a:xfrm>
+          <a:prstGeom prst="rect">
+            <a:avLst/>
+          </a:prstGeom>
+          <a:noFill/>
+        </p:spPr>
+        <p:txBody>
+          <a:bodyPr wrap="none" lIns="0" tIns="0" bIns="0" rIns="0">
+            <a:spAutoFit/>
+          </a:bodyPr>
+          <a:lstStyle/>
+          <a:p>
+            <a:pPr>
+              <a:defRPr sz="700">
+                <a:solidFill>
+                  <a:srgbClr val="AABED2"/>
+                </a:solidFill>
+                <a:latin typeface="Arial"/>
+              </a:defRPr>
+            </a:pPr>
+            <a:r>
+              <a:t>🔒  goldfields-bay.vercel.app#sustainability</a:t>
+            </a:r>
+          </a:p>
+        </p:txBody>
+      </p:sp>
       <p:pic>
         <p:nvPicPr>
-          <p:cNvPr id="8" name="Picture 7" descr="media_1790571551705.png"/>
+          <p:cNvPr id="13" name="Picture 12" descr="media_1790571551705.png"/>
           <p:cNvPicPr>
             <a:picLocks noChangeAspect="1"/>
           </p:cNvPicPr>
@@ -12650,8 +14924,8 @@
         </p:blipFill>
         <p:spPr>
           <a:xfrm>
-            <a:off x="868680" y="1645920"/>
-            <a:ext cx="4846320" cy="2205454"/>
+            <a:off x="896112" y="1755648"/>
+            <a:ext cx="4928616" cy="2242905"/>
           </a:xfrm>
           <a:prstGeom prst="rect">
             <a:avLst/>
@@ -12660,14 +14934,14 @@
       </p:pic>
       <p:sp>
         <p:nvSpPr>
-          <p:cNvPr id="9" name="TextBox 8"/>
+          <p:cNvPr id="14" name="TextBox 13"/>
           <p:cNvSpPr txBox="1"/>
           <p:nvPr/>
         </p:nvSpPr>
         <p:spPr>
           <a:xfrm>
-            <a:off x="868680" y="5029200"/>
-            <a:ext cx="4846320" cy="1005840"/>
+            <a:off x="896112" y="4736592"/>
+            <a:ext cx="4928616" cy="1115568"/>
           </a:xfrm>
           <a:prstGeom prst="rect">
             <a:avLst/>
@@ -12681,7 +14955,7 @@
           <a:lstStyle/>
           <a:p>
             <a:pPr>
-              <a:defRPr sz="850" b="1">
+              <a:defRPr sz="800" b="1">
                 <a:solidFill>
                   <a:srgbClr val="00E5C0"/>
                 </a:solidFill>
@@ -12694,9 +14968,12 @@
           </a:p>
           <a:p>
             <a:pPr>
-              <a:defRPr sz="800">
-                <a:solidFill>
-                  <a:srgbClr val="A5B9CD"/>
+              <a:spcBef>
+                <a:spcPts val="200"/>
+              </a:spcBef>
+              <a:defRPr sz="750">
+                <a:solidFill>
+                  <a:srgbClr val="AABED2"/>
                 </a:solidFill>
                 <a:latin typeface="Arial"/>
               </a:defRPr>
@@ -12709,24 +14986,26 @@
       </p:sp>
       <p:sp>
         <p:nvSpPr>
-          <p:cNvPr id="10" name="Rounded Rectangle 9"/>
+          <p:cNvPr id="15" name="Rounded Rectangle 14"/>
           <p:cNvSpPr/>
           <p:nvPr/>
         </p:nvSpPr>
         <p:spPr>
           <a:xfrm>
-            <a:off x="6108192" y="1508760"/>
-            <a:ext cx="5349240" cy="4709160"/>
+            <a:off x="6199632" y="1371600"/>
+            <a:ext cx="5257800" cy="4572000"/>
           </a:xfrm>
           <a:prstGeom prst="roundRect">
-            <a:avLst/>
+            <a:avLst>
+              <a:gd name="adj" fmla="val 3000"/>
+            </a:avLst>
           </a:prstGeom>
           <a:solidFill>
             <a:srgbClr val="0B3052"/>
           </a:solidFill>
           <a:ln w="12700">
             <a:solidFill>
-              <a:srgbClr val="1A4B75"/>
+              <a:srgbClr val="1F6E43"/>
             </a:solidFill>
           </a:ln>
         </p:spPr>
@@ -12754,14 +15033,14 @@
       </p:sp>
       <p:sp>
         <p:nvSpPr>
-          <p:cNvPr id="11" name="TextBox 10"/>
+          <p:cNvPr id="16" name="TextBox 15"/>
           <p:cNvSpPr txBox="1"/>
           <p:nvPr/>
         </p:nvSpPr>
         <p:spPr>
           <a:xfrm>
-            <a:off x="6355080" y="1691640"/>
-            <a:ext cx="4846320" cy="4343400"/>
+            <a:off x="6446520" y="1554480"/>
+            <a:ext cx="4754880" cy="4160520"/>
           </a:xfrm>
           <a:prstGeom prst="rect">
             <a:avLst/>
@@ -12807,9 +15086,9 @@
               <a:spcBef>
                 <a:spcPts val="100"/>
               </a:spcBef>
-              <a:defRPr sz="800">
-                <a:solidFill>
-                  <a:srgbClr val="A5B9CD"/>
+              <a:defRPr sz="750">
+                <a:solidFill>
+                  <a:srgbClr val="AABED2"/>
                 </a:solidFill>
                 <a:latin typeface="Arial"/>
               </a:defRPr>
@@ -12839,9 +15118,9 @@
               <a:spcBef>
                 <a:spcPts val="100"/>
               </a:spcBef>
-              <a:defRPr sz="800">
-                <a:solidFill>
-                  <a:srgbClr val="A5B9CD"/>
+              <a:defRPr sz="750">
+                <a:solidFill>
+                  <a:srgbClr val="AABED2"/>
                 </a:solidFill>
                 <a:latin typeface="Arial"/>
               </a:defRPr>
@@ -12871,9 +15150,9 @@
               <a:spcBef>
                 <a:spcPts val="100"/>
               </a:spcBef>
-              <a:defRPr sz="800">
-                <a:solidFill>
-                  <a:srgbClr val="A5B9CD"/>
+              <a:defRPr sz="750">
+                <a:solidFill>
+                  <a:srgbClr val="AABED2"/>
                 </a:solidFill>
                 <a:latin typeface="Arial"/>
               </a:defRPr>
@@ -12903,9 +15182,9 @@
               <a:spcBef>
                 <a:spcPts val="100"/>
               </a:spcBef>
-              <a:defRPr sz="800">
-                <a:solidFill>
-                  <a:srgbClr val="A5B9CD"/>
+              <a:defRPr sz="750">
+                <a:solidFill>
+                  <a:srgbClr val="AABED2"/>
                 </a:solidFill>
                 <a:latin typeface="Arial"/>
               </a:defRPr>
@@ -12935,9 +15214,9 @@
               <a:spcBef>
                 <a:spcPts val="100"/>
               </a:spcBef>
-              <a:defRPr sz="800">
-                <a:solidFill>
-                  <a:srgbClr val="A5B9CD"/>
+              <a:defRPr sz="750">
+                <a:solidFill>
+                  <a:srgbClr val="AABED2"/>
                 </a:solidFill>
                 <a:latin typeface="Arial"/>
               </a:defRPr>
@@ -12967,9 +15246,9 @@
               <a:spcBef>
                 <a:spcPts val="100"/>
               </a:spcBef>
-              <a:defRPr sz="800">
-                <a:solidFill>
-                  <a:srgbClr val="A5B9CD"/>
+              <a:defRPr sz="750">
+                <a:solidFill>
+                  <a:srgbClr val="AABED2"/>
                 </a:solidFill>
                 <a:latin typeface="Arial"/>
               </a:defRPr>
@@ -12982,13 +15261,13 @@
       </p:sp>
       <p:sp>
         <p:nvSpPr>
-          <p:cNvPr id="12" name="Rectangle 11"/>
+          <p:cNvPr id="17" name="Rectangle 16"/>
           <p:cNvSpPr/>
           <p:nvPr/>
         </p:nvSpPr>
         <p:spPr>
           <a:xfrm>
-            <a:off x="731520" y="6400800"/>
+            <a:off x="731520" y="6144768"/>
             <a:ext cx="10728655" cy="13716"/>
           </a:xfrm>
           <a:prstGeom prst="rect">
@@ -13025,13 +15304,13 @@
       </p:sp>
       <p:sp>
         <p:nvSpPr>
-          <p:cNvPr id="13" name="TextBox 12"/>
+          <p:cNvPr id="18" name="TextBox 17"/>
           <p:cNvSpPr txBox="1"/>
           <p:nvPr/>
         </p:nvSpPr>
         <p:spPr>
           <a:xfrm>
-            <a:off x="731520" y="6446520"/>
+            <a:off x="731520" y="6236208"/>
             <a:ext cx="8229600" cy="320040"/>
           </a:xfrm>
           <a:prstGeom prst="rect">
@@ -13046,9 +15325,9 @@
           <a:lstStyle/>
           <a:p>
             <a:pPr>
-              <a:defRPr sz="900">
-                <a:solidFill>
-                  <a:srgbClr val="A5B9CD"/>
+              <a:defRPr sz="850">
+                <a:solidFill>
+                  <a:srgbClr val="AABED2"/>
                 </a:solidFill>
                 <a:latin typeface="Arial"/>
               </a:defRPr>
@@ -13061,13 +15340,13 @@
       </p:sp>
       <p:sp>
         <p:nvSpPr>
-          <p:cNvPr id="14" name="TextBox 13"/>
+          <p:cNvPr id="19" name="TextBox 18"/>
           <p:cNvSpPr txBox="1"/>
           <p:nvPr/>
         </p:nvSpPr>
         <p:spPr>
           <a:xfrm>
-            <a:off x="9601200" y="6446520"/>
+            <a:off x="9601200" y="6236208"/>
             <a:ext cx="1858975" cy="320040"/>
           </a:xfrm>
           <a:prstGeom prst="rect">
@@ -13082,7 +15361,7 @@
           <a:lstStyle/>
           <a:p>
             <a:pPr algn="r">
-              <a:defRPr sz="900" b="1">
+              <a:defRPr sz="850" b="1">
                 <a:solidFill>
                   <a:srgbClr val="C8A064"/>
                 </a:solidFill>
@@ -13137,8 +15416,8 @@
         </p:blipFill>
         <p:spPr>
           <a:xfrm>
-            <a:off x="731520" y="365760"/>
-            <a:ext cx="1056315" cy="347472"/>
+            <a:off x="731520" y="320040"/>
+            <a:ext cx="889528" cy="292608"/>
           </a:xfrm>
           <a:prstGeom prst="rect">
             <a:avLst/>
@@ -13153,8 +15432,8 @@
         </p:nvSpPr>
         <p:spPr>
           <a:xfrm>
-            <a:off x="2011680" y="365760"/>
-            <a:ext cx="18288" cy="347472"/>
+            <a:off x="1920240" y="320040"/>
+            <a:ext cx="13716" cy="292608"/>
           </a:xfrm>
           <a:prstGeom prst="rect">
             <a:avLst/>
@@ -13196,8 +15475,8 @@
         </p:nvSpPr>
         <p:spPr>
           <a:xfrm>
-            <a:off x="2148840" y="365760"/>
-            <a:ext cx="4114800" cy="347472"/>
+            <a:off x="2057400" y="320040"/>
+            <a:ext cx="4114800" cy="292608"/>
           </a:xfrm>
           <a:prstGeom prst="rect">
             <a:avLst/>
@@ -13213,7 +15492,7 @@
             <a:pPr>
               <a:defRPr sz="850" b="1">
                 <a:solidFill>
-                  <a:srgbClr val="A5B9CD"/>
+                  <a:srgbClr val="AABED2"/>
                 </a:solidFill>
                 <a:latin typeface="Arial"/>
               </a:defRPr>
@@ -13232,11 +15511,13 @@
         </p:nvSpPr>
         <p:spPr>
           <a:xfrm>
-            <a:off x="8961120" y="329184"/>
-            <a:ext cx="2499055" cy="384048"/>
+            <a:off x="8961120" y="292608"/>
+            <a:ext cx="2499055" cy="329184"/>
           </a:xfrm>
           <a:prstGeom prst="roundRect">
-            <a:avLst/>
+            <a:avLst>
+              <a:gd name="adj" fmla="val 33333"/>
+            </a:avLst>
           </a:prstGeom>
           <a:solidFill>
             <a:srgbClr val="0B3052"/>
@@ -13262,7 +15543,7 @@
           </a:fontRef>
         </p:style>
         <p:txBody>
-          <a:bodyPr rtlCol="0" anchor="ctr" wrap="square" tIns="54864"/>
+          <a:bodyPr rtlCol="0" anchor="ctr" wrap="square" tIns="36576"/>
           <a:lstStyle/>
           <a:p>
             <a:pPr algn="ctr">
@@ -13287,8 +15568,8 @@
         </p:nvSpPr>
         <p:spPr>
           <a:xfrm>
-            <a:off x="731520" y="868680"/>
-            <a:ext cx="10728655" cy="594360"/>
+            <a:off x="731520" y="749808"/>
+            <a:ext cx="10728655" cy="438912"/>
           </a:xfrm>
           <a:prstGeom prst="rect">
             <a:avLst/>
@@ -13302,7 +15583,7 @@
           <a:lstStyle/>
           <a:p>
             <a:pPr>
-              <a:defRPr sz="2200" b="1">
+              <a:defRPr sz="2000" b="1">
                 <a:solidFill>
                   <a:srgbClr val="FFFFFF"/>
                 </a:solidFill>
@@ -13323,11 +15604,13 @@
         </p:nvSpPr>
         <p:spPr>
           <a:xfrm>
-            <a:off x="731520" y="1508760"/>
-            <a:ext cx="4114800" cy="4709160"/>
+            <a:off x="731520" y="1371600"/>
+            <a:ext cx="4114800" cy="4572000"/>
           </a:xfrm>
           <a:prstGeom prst="roundRect">
-            <a:avLst/>
+            <a:avLst>
+              <a:gd name="adj" fmla="val 3333"/>
+            </a:avLst>
           </a:prstGeom>
           <a:solidFill>
             <a:srgbClr val="0B3052"/>
@@ -13360,9 +15643,219 @@
           </a:p>
         </p:txBody>
       </p:sp>
+      <p:sp>
+        <p:nvSpPr>
+          <p:cNvPr id="8" name="Rectangle 7"/>
+          <p:cNvSpPr/>
+          <p:nvPr/>
+        </p:nvSpPr>
+        <p:spPr>
+          <a:xfrm>
+            <a:off x="896112" y="1536192"/>
+            <a:ext cx="3785616" cy="219456"/>
+          </a:xfrm>
+          <a:prstGeom prst="rect">
+            <a:avLst/>
+          </a:prstGeom>
+          <a:solidFill>
+            <a:srgbClr val="103A62"/>
+          </a:solidFill>
+          <a:ln w="9525">
+            <a:solidFill>
+              <a:srgbClr val="1A4B75"/>
+            </a:solidFill>
+          </a:ln>
+        </p:spPr>
+        <p:style>
+          <a:lnRef idx="1">
+            <a:schemeClr val="accent1"/>
+          </a:lnRef>
+          <a:fillRef idx="3">
+            <a:schemeClr val="accent1"/>
+          </a:fillRef>
+          <a:effectRef idx="2">
+            <a:schemeClr val="accent1"/>
+          </a:effectRef>
+          <a:fontRef idx="minor">
+            <a:schemeClr val="lt1"/>
+          </a:fontRef>
+        </p:style>
+        <p:txBody>
+          <a:bodyPr rtlCol="0" anchor="ctr"/>
+          <a:lstStyle/>
+          <a:p>
+            <a:pPr algn="ctr"/>
+          </a:p>
+        </p:txBody>
+      </p:sp>
+      <p:sp>
+        <p:nvSpPr>
+          <p:cNvPr id="9" name="Oval 8"/>
+          <p:cNvSpPr/>
+          <p:nvPr/>
+        </p:nvSpPr>
+        <p:spPr>
+          <a:xfrm>
+            <a:off x="987552" y="1609344"/>
+            <a:ext cx="73152" cy="73152"/>
+          </a:xfrm>
+          <a:prstGeom prst="ellipse">
+            <a:avLst/>
+          </a:prstGeom>
+          <a:solidFill>
+            <a:srgbClr val="EB5A50"/>
+          </a:solidFill>
+          <a:ln>
+            <a:noFill/>
+          </a:ln>
+        </p:spPr>
+        <p:style>
+          <a:lnRef idx="1">
+            <a:schemeClr val="accent1"/>
+          </a:lnRef>
+          <a:fillRef idx="3">
+            <a:schemeClr val="accent1"/>
+          </a:fillRef>
+          <a:effectRef idx="2">
+            <a:schemeClr val="accent1"/>
+          </a:effectRef>
+          <a:fontRef idx="minor">
+            <a:schemeClr val="lt1"/>
+          </a:fontRef>
+        </p:style>
+        <p:txBody>
+          <a:bodyPr rtlCol="0" anchor="ctr"/>
+          <a:lstStyle/>
+          <a:p>
+            <a:pPr algn="ctr"/>
+          </a:p>
+        </p:txBody>
+      </p:sp>
+      <p:sp>
+        <p:nvSpPr>
+          <p:cNvPr id="10" name="Oval 9"/>
+          <p:cNvSpPr/>
+          <p:nvPr/>
+        </p:nvSpPr>
+        <p:spPr>
+          <a:xfrm>
+            <a:off x="1115568" y="1609344"/>
+            <a:ext cx="73152" cy="73152"/>
+          </a:xfrm>
+          <a:prstGeom prst="ellipse">
+            <a:avLst/>
+          </a:prstGeom>
+          <a:solidFill>
+            <a:srgbClr val="F5B94B"/>
+          </a:solidFill>
+          <a:ln>
+            <a:noFill/>
+          </a:ln>
+        </p:spPr>
+        <p:style>
+          <a:lnRef idx="1">
+            <a:schemeClr val="accent1"/>
+          </a:lnRef>
+          <a:fillRef idx="3">
+            <a:schemeClr val="accent1"/>
+          </a:fillRef>
+          <a:effectRef idx="2">
+            <a:schemeClr val="accent1"/>
+          </a:effectRef>
+          <a:fontRef idx="minor">
+            <a:schemeClr val="lt1"/>
+          </a:fontRef>
+        </p:style>
+        <p:txBody>
+          <a:bodyPr rtlCol="0" anchor="ctr"/>
+          <a:lstStyle/>
+          <a:p>
+            <a:pPr algn="ctr"/>
+          </a:p>
+        </p:txBody>
+      </p:sp>
+      <p:sp>
+        <p:nvSpPr>
+          <p:cNvPr id="11" name="Oval 10"/>
+          <p:cNvSpPr/>
+          <p:nvPr/>
+        </p:nvSpPr>
+        <p:spPr>
+          <a:xfrm>
+            <a:off x="1243584" y="1609344"/>
+            <a:ext cx="73152" cy="73152"/>
+          </a:xfrm>
+          <a:prstGeom prst="ellipse">
+            <a:avLst/>
+          </a:prstGeom>
+          <a:solidFill>
+            <a:srgbClr val="2DC378"/>
+          </a:solidFill>
+          <a:ln>
+            <a:noFill/>
+          </a:ln>
+        </p:spPr>
+        <p:style>
+          <a:lnRef idx="1">
+            <a:schemeClr val="accent1"/>
+          </a:lnRef>
+          <a:fillRef idx="3">
+            <a:schemeClr val="accent1"/>
+          </a:fillRef>
+          <a:effectRef idx="2">
+            <a:schemeClr val="accent1"/>
+          </a:effectRef>
+          <a:fontRef idx="minor">
+            <a:schemeClr val="lt1"/>
+          </a:fontRef>
+        </p:style>
+        <p:txBody>
+          <a:bodyPr rtlCol="0" anchor="ctr"/>
+          <a:lstStyle/>
+          <a:p>
+            <a:pPr algn="ctr"/>
+          </a:p>
+        </p:txBody>
+      </p:sp>
+      <p:sp>
+        <p:nvSpPr>
+          <p:cNvPr id="12" name="TextBox 11"/>
+          <p:cNvSpPr txBox="1"/>
+          <p:nvPr/>
+        </p:nvSpPr>
+        <p:spPr>
+          <a:xfrm>
+            <a:off x="1399032" y="1554480"/>
+            <a:ext cx="3191256" cy="182880"/>
+          </a:xfrm>
+          <a:prstGeom prst="rect">
+            <a:avLst/>
+          </a:prstGeom>
+          <a:noFill/>
+        </p:spPr>
+        <p:txBody>
+          <a:bodyPr wrap="none" lIns="0" tIns="0" bIns="0" rIns="0">
+            <a:spAutoFit/>
+          </a:bodyPr>
+          <a:lstStyle/>
+          <a:p>
+            <a:pPr>
+              <a:defRPr sz="700">
+                <a:solidFill>
+                  <a:srgbClr val="AABED2"/>
+                </a:solidFill>
+                <a:latin typeface="Arial"/>
+              </a:defRPr>
+            </a:pPr>
+            <a:r>
+              <a:t>🔒  goldfields-bay.vercel.app#investors</a:t>
+            </a:r>
+          </a:p>
+        </p:txBody>
+      </p:sp>
       <p:pic>
         <p:nvPicPr>
-          <p:cNvPr id="8" name="Picture 7" descr="media_1790562287284.png"/>
+          <p:cNvPr id="13" name="Picture 12" descr="media_1790562287284.png"/>
           <p:cNvPicPr>
             <a:picLocks noChangeAspect="1"/>
           </p:cNvPicPr>
@@ -13376,8 +15869,8 @@
         </p:blipFill>
         <p:spPr>
           <a:xfrm>
-            <a:off x="868680" y="1645920"/>
-            <a:ext cx="3840480" cy="3307796"/>
+            <a:off x="1100890" y="1755648"/>
+            <a:ext cx="3376059" cy="2907792"/>
           </a:xfrm>
           <a:prstGeom prst="rect">
             <a:avLst/>
@@ -13386,14 +15879,14 @@
       </p:pic>
       <p:sp>
         <p:nvSpPr>
-          <p:cNvPr id="9" name="TextBox 8"/>
+          <p:cNvPr id="14" name="TextBox 13"/>
           <p:cNvSpPr txBox="1"/>
           <p:nvPr/>
         </p:nvSpPr>
         <p:spPr>
           <a:xfrm>
-            <a:off x="868680" y="5120640"/>
-            <a:ext cx="3840480" cy="914400"/>
+            <a:off x="896112" y="4736592"/>
+            <a:ext cx="3785616" cy="1115568"/>
           </a:xfrm>
           <a:prstGeom prst="rect">
             <a:avLst/>
@@ -13407,7 +15900,7 @@
           <a:lstStyle/>
           <a:p>
             <a:pPr>
-              <a:defRPr sz="850" b="1">
+              <a:defRPr sz="800" b="1">
                 <a:solidFill>
                   <a:srgbClr val="00E5C0"/>
                 </a:solidFill>
@@ -13420,32 +15913,37 @@
           </a:p>
           <a:p>
             <a:pPr>
-              <a:defRPr sz="800">
-                <a:solidFill>
-                  <a:srgbClr val="A5B9CD"/>
-                </a:solidFill>
-                <a:latin typeface="Arial"/>
-              </a:defRPr>
-            </a:pPr>
-            <a:r>
-              <a:t>Live telemetry showing 1.06Moz attributable gold production, 151koz South Deep output, and one-click 3.8MB PDF booklet downloads.</a:t>
-            </a:r>
-          </a:p>
-        </p:txBody>
-      </p:sp>
-      <p:sp>
-        <p:nvSpPr>
-          <p:cNvPr id="10" name="Rounded Rectangle 9"/>
+              <a:spcBef>
+                <a:spcPts val="200"/>
+              </a:spcBef>
+              <a:defRPr sz="750">
+                <a:solidFill>
+                  <a:srgbClr val="AABED2"/>
+                </a:solidFill>
+                <a:latin typeface="Arial"/>
+              </a:defRPr>
+            </a:pPr>
+            <a:r>
+              <a:t>Live telemetry showing 1.06Moz attributable gold production, 151koz South Deep output, and one-click PDF downloads.</a:t>
+            </a:r>
+          </a:p>
+        </p:txBody>
+      </p:sp>
+      <p:sp>
+        <p:nvSpPr>
+          <p:cNvPr id="15" name="Rounded Rectangle 14"/>
           <p:cNvSpPr/>
           <p:nvPr/>
         </p:nvSpPr>
         <p:spPr>
           <a:xfrm>
-            <a:off x="5074920" y="1508760"/>
-            <a:ext cx="3063240" cy="4709160"/>
+            <a:off x="5120640" y="1371600"/>
+            <a:ext cx="3108960" cy="4572000"/>
           </a:xfrm>
           <a:prstGeom prst="roundRect">
-            <a:avLst/>
+            <a:avLst>
+              <a:gd name="adj" fmla="val 4411"/>
+            </a:avLst>
           </a:prstGeom>
           <a:solidFill>
             <a:srgbClr val="0B3052"/>
@@ -13480,14 +15978,14 @@
       </p:sp>
       <p:sp>
         <p:nvSpPr>
-          <p:cNvPr id="11" name="TextBox 10"/>
+          <p:cNvPr id="16" name="TextBox 15"/>
           <p:cNvSpPr txBox="1"/>
           <p:nvPr/>
         </p:nvSpPr>
         <p:spPr>
           <a:xfrm>
-            <a:off x="5239512" y="1691640"/>
-            <a:ext cx="2734056" cy="4343400"/>
+            <a:off x="5285232" y="1554480"/>
+            <a:ext cx="2779776" cy="4206240"/>
           </a:xfrm>
           <a:prstGeom prst="rect">
             <a:avLst/>
@@ -13501,7 +15999,7 @@
           <a:lstStyle/>
           <a:p>
             <a:pPr>
-              <a:defRPr sz="950" b="1">
+              <a:defRPr sz="900" b="1">
                 <a:solidFill>
                   <a:srgbClr val="00E5C0"/>
                 </a:solidFill>
@@ -13515,9 +16013,9 @@
           <a:p>
             <a:pPr>
               <a:spcBef>
-                <a:spcPts val="1000"/>
+                <a:spcPts val="800"/>
               </a:spcBef>
-              <a:defRPr sz="1050" b="1">
+              <a:defRPr sz="1000" b="1">
                 <a:solidFill>
                   <a:srgbClr val="FFFFFF"/>
                 </a:solidFill>
@@ -13531,11 +16029,11 @@
           <a:p>
             <a:pPr>
               <a:spcBef>
-                <a:spcPts val="200"/>
+                <a:spcPts val="100"/>
               </a:spcBef>
-              <a:defRPr sz="800">
-                <a:solidFill>
-                  <a:srgbClr val="A5B9CD"/>
+              <a:defRPr sz="750">
+                <a:solidFill>
+                  <a:srgbClr val="AABED2"/>
                 </a:solidFill>
                 <a:latin typeface="Arial"/>
               </a:defRPr>
@@ -13547,9 +16045,9 @@
           <a:p>
             <a:pPr>
               <a:spcBef>
-                <a:spcPts val="1000"/>
+                <a:spcPts val="800"/>
               </a:spcBef>
-              <a:defRPr sz="1050" b="1">
+              <a:defRPr sz="1000" b="1">
                 <a:solidFill>
                   <a:srgbClr val="FFFFFF"/>
                 </a:solidFill>
@@ -13563,11 +16061,11 @@
           <a:p>
             <a:pPr>
               <a:spcBef>
-                <a:spcPts val="200"/>
+                <a:spcPts val="100"/>
               </a:spcBef>
-              <a:defRPr sz="800">
-                <a:solidFill>
-                  <a:srgbClr val="A5B9CD"/>
+              <a:defRPr sz="750">
+                <a:solidFill>
+                  <a:srgbClr val="AABED2"/>
                 </a:solidFill>
                 <a:latin typeface="Arial"/>
               </a:defRPr>
@@ -13579,9 +16077,9 @@
           <a:p>
             <a:pPr>
               <a:spcBef>
-                <a:spcPts val="1000"/>
+                <a:spcPts val="800"/>
               </a:spcBef>
-              <a:defRPr sz="1050" b="1">
+              <a:defRPr sz="1000" b="1">
                 <a:solidFill>
                   <a:srgbClr val="FFFFFF"/>
                 </a:solidFill>
@@ -13595,11 +16093,11 @@
           <a:p>
             <a:pPr>
               <a:spcBef>
-                <a:spcPts val="200"/>
+                <a:spcPts val="100"/>
               </a:spcBef>
-              <a:defRPr sz="800">
-                <a:solidFill>
-                  <a:srgbClr val="A5B9CD"/>
+              <a:defRPr sz="750">
+                <a:solidFill>
+                  <a:srgbClr val="AABED2"/>
                 </a:solidFill>
                 <a:latin typeface="Arial"/>
               </a:defRPr>
@@ -13612,17 +16110,19 @@
       </p:sp>
       <p:sp>
         <p:nvSpPr>
-          <p:cNvPr id="12" name="Rounded Rectangle 11"/>
+          <p:cNvPr id="17" name="Rounded Rectangle 16"/>
           <p:cNvSpPr/>
           <p:nvPr/>
         </p:nvSpPr>
         <p:spPr>
           <a:xfrm>
-            <a:off x="8366760" y="1508760"/>
-            <a:ext cx="3063240" cy="4709160"/>
+            <a:off x="8485632" y="1371600"/>
+            <a:ext cx="3108960" cy="4572000"/>
           </a:xfrm>
           <a:prstGeom prst="roundRect">
-            <a:avLst/>
+            <a:avLst>
+              <a:gd name="adj" fmla="val 4411"/>
+            </a:avLst>
           </a:prstGeom>
           <a:solidFill>
             <a:srgbClr val="0B3052"/>
@@ -13657,14 +16157,14 @@
       </p:sp>
       <p:sp>
         <p:nvSpPr>
-          <p:cNvPr id="13" name="TextBox 12"/>
+          <p:cNvPr id="18" name="TextBox 17"/>
           <p:cNvSpPr txBox="1"/>
           <p:nvPr/>
         </p:nvSpPr>
         <p:spPr>
           <a:xfrm>
-            <a:off x="8531352" y="1691640"/>
-            <a:ext cx="2734056" cy="4343400"/>
+            <a:off x="8650224" y="1554480"/>
+            <a:ext cx="2779776" cy="4206240"/>
           </a:xfrm>
           <a:prstGeom prst="rect">
             <a:avLst/>
@@ -13678,7 +16178,7 @@
           <a:lstStyle/>
           <a:p>
             <a:pPr>
-              <a:defRPr sz="950" b="1">
+              <a:defRPr sz="900" b="1">
                 <a:solidFill>
                   <a:srgbClr val="1F6E43"/>
                 </a:solidFill>
@@ -13692,9 +16192,9 @@
           <a:p>
             <a:pPr>
               <a:spcBef>
-                <a:spcPts val="1000"/>
+                <a:spcPts val="800"/>
               </a:spcBef>
-              <a:defRPr sz="1050" b="1">
+              <a:defRPr sz="1000" b="1">
                 <a:solidFill>
                   <a:srgbClr val="FFFFFF"/>
                 </a:solidFill>
@@ -13708,11 +16208,11 @@
           <a:p>
             <a:pPr>
               <a:spcBef>
-                <a:spcPts val="200"/>
+                <a:spcPts val="100"/>
               </a:spcBef>
-              <a:defRPr sz="800">
-                <a:solidFill>
-                  <a:srgbClr val="A5B9CD"/>
+              <a:defRPr sz="750">
+                <a:solidFill>
+                  <a:srgbClr val="AABED2"/>
                 </a:solidFill>
                 <a:latin typeface="Arial"/>
               </a:defRPr>
@@ -13724,9 +16224,9 @@
           <a:p>
             <a:pPr>
               <a:spcBef>
-                <a:spcPts val="1000"/>
+                <a:spcPts val="800"/>
               </a:spcBef>
-              <a:defRPr sz="1050" b="1">
+              <a:defRPr sz="1000" b="1">
                 <a:solidFill>
                   <a:srgbClr val="FFFFFF"/>
                 </a:solidFill>
@@ -13740,11 +16240,11 @@
           <a:p>
             <a:pPr>
               <a:spcBef>
-                <a:spcPts val="200"/>
+                <a:spcPts val="100"/>
               </a:spcBef>
-              <a:defRPr sz="800">
-                <a:solidFill>
-                  <a:srgbClr val="A5B9CD"/>
+              <a:defRPr sz="750">
+                <a:solidFill>
+                  <a:srgbClr val="AABED2"/>
                 </a:solidFill>
                 <a:latin typeface="Arial"/>
               </a:defRPr>
@@ -13756,9 +16256,9 @@
           <a:p>
             <a:pPr>
               <a:spcBef>
-                <a:spcPts val="1000"/>
+                <a:spcPts val="800"/>
               </a:spcBef>
-              <a:defRPr sz="1050" b="1">
+              <a:defRPr sz="1000" b="1">
                 <a:solidFill>
                   <a:srgbClr val="FFFFFF"/>
                 </a:solidFill>
@@ -13772,11 +16272,11 @@
           <a:p>
             <a:pPr>
               <a:spcBef>
-                <a:spcPts val="200"/>
+                <a:spcPts val="100"/>
               </a:spcBef>
-              <a:defRPr sz="800">
-                <a:solidFill>
-                  <a:srgbClr val="A5B9CD"/>
+              <a:defRPr sz="750">
+                <a:solidFill>
+                  <a:srgbClr val="AABED2"/>
                 </a:solidFill>
                 <a:latin typeface="Arial"/>
               </a:defRPr>
@@ -13789,13 +16289,13 @@
       </p:sp>
       <p:sp>
         <p:nvSpPr>
-          <p:cNvPr id="14" name="Rectangle 13"/>
+          <p:cNvPr id="19" name="Rectangle 18"/>
           <p:cNvSpPr/>
           <p:nvPr/>
         </p:nvSpPr>
         <p:spPr>
           <a:xfrm>
-            <a:off x="731520" y="6400800"/>
+            <a:off x="731520" y="6144768"/>
             <a:ext cx="10728655" cy="13716"/>
           </a:xfrm>
           <a:prstGeom prst="rect">
@@ -13832,13 +16332,13 @@
       </p:sp>
       <p:sp>
         <p:nvSpPr>
-          <p:cNvPr id="15" name="TextBox 14"/>
+          <p:cNvPr id="20" name="TextBox 19"/>
           <p:cNvSpPr txBox="1"/>
           <p:nvPr/>
         </p:nvSpPr>
         <p:spPr>
           <a:xfrm>
-            <a:off x="731520" y="6446520"/>
+            <a:off x="731520" y="6236208"/>
             <a:ext cx="8229600" cy="320040"/>
           </a:xfrm>
           <a:prstGeom prst="rect">
@@ -13853,9 +16353,9 @@
           <a:lstStyle/>
           <a:p>
             <a:pPr>
-              <a:defRPr sz="900">
-                <a:solidFill>
-                  <a:srgbClr val="A5B9CD"/>
+              <a:defRPr sz="850">
+                <a:solidFill>
+                  <a:srgbClr val="AABED2"/>
                 </a:solidFill>
                 <a:latin typeface="Arial"/>
               </a:defRPr>
@@ -13868,13 +16368,13 @@
       </p:sp>
       <p:sp>
         <p:nvSpPr>
-          <p:cNvPr id="16" name="TextBox 15"/>
+          <p:cNvPr id="21" name="TextBox 20"/>
           <p:cNvSpPr txBox="1"/>
           <p:nvPr/>
         </p:nvSpPr>
         <p:spPr>
           <a:xfrm>
-            <a:off x="9601200" y="6446520"/>
+            <a:off x="9601200" y="6236208"/>
             <a:ext cx="1858975" cy="320040"/>
           </a:xfrm>
           <a:prstGeom prst="rect">
@@ -13889,7 +16389,7 @@
           <a:lstStyle/>
           <a:p>
             <a:pPr algn="r">
-              <a:defRPr sz="900" b="1">
+              <a:defRPr sz="850" b="1">
                 <a:solidFill>
                   <a:srgbClr val="C8A064"/>
                 </a:solidFill>
@@ -13944,8 +16444,8 @@
         </p:blipFill>
         <p:spPr>
           <a:xfrm>
-            <a:off x="731520" y="365760"/>
-            <a:ext cx="1056315" cy="347472"/>
+            <a:off x="731520" y="320040"/>
+            <a:ext cx="889528" cy="292608"/>
           </a:xfrm>
           <a:prstGeom prst="rect">
             <a:avLst/>
@@ -13960,8 +16460,8 @@
         </p:nvSpPr>
         <p:spPr>
           <a:xfrm>
-            <a:off x="2011680" y="365760"/>
-            <a:ext cx="18288" cy="347472"/>
+            <a:off x="1920240" y="320040"/>
+            <a:ext cx="13716" cy="292608"/>
           </a:xfrm>
           <a:prstGeom prst="rect">
             <a:avLst/>
@@ -14003,8 +16503,8 @@
         </p:nvSpPr>
         <p:spPr>
           <a:xfrm>
-            <a:off x="2148840" y="365760"/>
-            <a:ext cx="4114800" cy="347472"/>
+            <a:off x="2057400" y="320040"/>
+            <a:ext cx="4114800" cy="292608"/>
           </a:xfrm>
           <a:prstGeom prst="rect">
             <a:avLst/>
@@ -14020,7 +16520,7 @@
             <a:pPr>
               <a:defRPr sz="850" b="1">
                 <a:solidFill>
-                  <a:srgbClr val="A5B9CD"/>
+                  <a:srgbClr val="AABED2"/>
                 </a:solidFill>
                 <a:latin typeface="Arial"/>
               </a:defRPr>
@@ -14039,11 +16539,13 @@
         </p:nvSpPr>
         <p:spPr>
           <a:xfrm>
-            <a:off x="8961120" y="329184"/>
-            <a:ext cx="2499055" cy="384048"/>
+            <a:off x="8961120" y="292608"/>
+            <a:ext cx="2499055" cy="329184"/>
           </a:xfrm>
           <a:prstGeom prst="roundRect">
-            <a:avLst/>
+            <a:avLst>
+              <a:gd name="adj" fmla="val 33333"/>
+            </a:avLst>
           </a:prstGeom>
           <a:solidFill>
             <a:srgbClr val="0B3052"/>
@@ -14069,7 +16571,7 @@
           </a:fontRef>
         </p:style>
         <p:txBody>
-          <a:bodyPr rtlCol="0" anchor="ctr" wrap="square" tIns="54864"/>
+          <a:bodyPr rtlCol="0" anchor="ctr" wrap="square" tIns="36576"/>
           <a:lstStyle/>
           <a:p>
             <a:pPr algn="ctr">
@@ -14094,8 +16596,8 @@
         </p:nvSpPr>
         <p:spPr>
           <a:xfrm>
-            <a:off x="731520" y="868680"/>
-            <a:ext cx="10728655" cy="594360"/>
+            <a:off x="731520" y="749808"/>
+            <a:ext cx="10728655" cy="438912"/>
           </a:xfrm>
           <a:prstGeom prst="rect">
             <a:avLst/>
@@ -14109,7 +16611,7 @@
           <a:lstStyle/>
           <a:p>
             <a:pPr>
-              <a:defRPr sz="2200" b="1">
+              <a:defRPr sz="2000" b="1">
                 <a:solidFill>
                   <a:srgbClr val="FFFFFF"/>
                 </a:solidFill>
@@ -14130,11 +16632,13 @@
         </p:nvSpPr>
         <p:spPr>
           <a:xfrm>
-            <a:off x="731520" y="1508760"/>
-            <a:ext cx="5669280" cy="4709160"/>
+            <a:off x="731520" y="1371600"/>
+            <a:ext cx="5257800" cy="4572000"/>
           </a:xfrm>
           <a:prstGeom prst="roundRect">
-            <a:avLst/>
+            <a:avLst>
+              <a:gd name="adj" fmla="val 3000"/>
+            </a:avLst>
           </a:prstGeom>
           <a:solidFill>
             <a:srgbClr val="0B3052"/>
@@ -14167,9 +16671,219 @@
           </a:p>
         </p:txBody>
       </p:sp>
+      <p:sp>
+        <p:nvSpPr>
+          <p:cNvPr id="8" name="Rectangle 7"/>
+          <p:cNvSpPr/>
+          <p:nvPr/>
+        </p:nvSpPr>
+        <p:spPr>
+          <a:xfrm>
+            <a:off x="896112" y="1536192"/>
+            <a:ext cx="4928616" cy="219456"/>
+          </a:xfrm>
+          <a:prstGeom prst="rect">
+            <a:avLst/>
+          </a:prstGeom>
+          <a:solidFill>
+            <a:srgbClr val="103A62"/>
+          </a:solidFill>
+          <a:ln w="9525">
+            <a:solidFill>
+              <a:srgbClr val="1A4B75"/>
+            </a:solidFill>
+          </a:ln>
+        </p:spPr>
+        <p:style>
+          <a:lnRef idx="1">
+            <a:schemeClr val="accent1"/>
+          </a:lnRef>
+          <a:fillRef idx="3">
+            <a:schemeClr val="accent1"/>
+          </a:fillRef>
+          <a:effectRef idx="2">
+            <a:schemeClr val="accent1"/>
+          </a:effectRef>
+          <a:fontRef idx="minor">
+            <a:schemeClr val="lt1"/>
+          </a:fontRef>
+        </p:style>
+        <p:txBody>
+          <a:bodyPr rtlCol="0" anchor="ctr"/>
+          <a:lstStyle/>
+          <a:p>
+            <a:pPr algn="ctr"/>
+          </a:p>
+        </p:txBody>
+      </p:sp>
+      <p:sp>
+        <p:nvSpPr>
+          <p:cNvPr id="9" name="Oval 8"/>
+          <p:cNvSpPr/>
+          <p:nvPr/>
+        </p:nvSpPr>
+        <p:spPr>
+          <a:xfrm>
+            <a:off x="987552" y="1609344"/>
+            <a:ext cx="73152" cy="73152"/>
+          </a:xfrm>
+          <a:prstGeom prst="ellipse">
+            <a:avLst/>
+          </a:prstGeom>
+          <a:solidFill>
+            <a:srgbClr val="EB5A50"/>
+          </a:solidFill>
+          <a:ln>
+            <a:noFill/>
+          </a:ln>
+        </p:spPr>
+        <p:style>
+          <a:lnRef idx="1">
+            <a:schemeClr val="accent1"/>
+          </a:lnRef>
+          <a:fillRef idx="3">
+            <a:schemeClr val="accent1"/>
+          </a:fillRef>
+          <a:effectRef idx="2">
+            <a:schemeClr val="accent1"/>
+          </a:effectRef>
+          <a:fontRef idx="minor">
+            <a:schemeClr val="lt1"/>
+          </a:fontRef>
+        </p:style>
+        <p:txBody>
+          <a:bodyPr rtlCol="0" anchor="ctr"/>
+          <a:lstStyle/>
+          <a:p>
+            <a:pPr algn="ctr"/>
+          </a:p>
+        </p:txBody>
+      </p:sp>
+      <p:sp>
+        <p:nvSpPr>
+          <p:cNvPr id="10" name="Oval 9"/>
+          <p:cNvSpPr/>
+          <p:nvPr/>
+        </p:nvSpPr>
+        <p:spPr>
+          <a:xfrm>
+            <a:off x="1115568" y="1609344"/>
+            <a:ext cx="73152" cy="73152"/>
+          </a:xfrm>
+          <a:prstGeom prst="ellipse">
+            <a:avLst/>
+          </a:prstGeom>
+          <a:solidFill>
+            <a:srgbClr val="F5B94B"/>
+          </a:solidFill>
+          <a:ln>
+            <a:noFill/>
+          </a:ln>
+        </p:spPr>
+        <p:style>
+          <a:lnRef idx="1">
+            <a:schemeClr val="accent1"/>
+          </a:lnRef>
+          <a:fillRef idx="3">
+            <a:schemeClr val="accent1"/>
+          </a:fillRef>
+          <a:effectRef idx="2">
+            <a:schemeClr val="accent1"/>
+          </a:effectRef>
+          <a:fontRef idx="minor">
+            <a:schemeClr val="lt1"/>
+          </a:fontRef>
+        </p:style>
+        <p:txBody>
+          <a:bodyPr rtlCol="0" anchor="ctr"/>
+          <a:lstStyle/>
+          <a:p>
+            <a:pPr algn="ctr"/>
+          </a:p>
+        </p:txBody>
+      </p:sp>
+      <p:sp>
+        <p:nvSpPr>
+          <p:cNvPr id="11" name="Oval 10"/>
+          <p:cNvSpPr/>
+          <p:nvPr/>
+        </p:nvSpPr>
+        <p:spPr>
+          <a:xfrm>
+            <a:off x="1243584" y="1609344"/>
+            <a:ext cx="73152" cy="73152"/>
+          </a:xfrm>
+          <a:prstGeom prst="ellipse">
+            <a:avLst/>
+          </a:prstGeom>
+          <a:solidFill>
+            <a:srgbClr val="2DC378"/>
+          </a:solidFill>
+          <a:ln>
+            <a:noFill/>
+          </a:ln>
+        </p:spPr>
+        <p:style>
+          <a:lnRef idx="1">
+            <a:schemeClr val="accent1"/>
+          </a:lnRef>
+          <a:fillRef idx="3">
+            <a:schemeClr val="accent1"/>
+          </a:fillRef>
+          <a:effectRef idx="2">
+            <a:schemeClr val="accent1"/>
+          </a:effectRef>
+          <a:fontRef idx="minor">
+            <a:schemeClr val="lt1"/>
+          </a:fontRef>
+        </p:style>
+        <p:txBody>
+          <a:bodyPr rtlCol="0" anchor="ctr"/>
+          <a:lstStyle/>
+          <a:p>
+            <a:pPr algn="ctr"/>
+          </a:p>
+        </p:txBody>
+      </p:sp>
+      <p:sp>
+        <p:nvSpPr>
+          <p:cNvPr id="12" name="TextBox 11"/>
+          <p:cNvSpPr txBox="1"/>
+          <p:nvPr/>
+        </p:nvSpPr>
+        <p:spPr>
+          <a:xfrm>
+            <a:off x="1399032" y="1554480"/>
+            <a:ext cx="4334256" cy="182880"/>
+          </a:xfrm>
+          <a:prstGeom prst="rect">
+            <a:avLst/>
+          </a:prstGeom>
+          <a:noFill/>
+        </p:spPr>
+        <p:txBody>
+          <a:bodyPr wrap="none" lIns="0" tIns="0" bIns="0" rIns="0">
+            <a:spAutoFit/>
+          </a:bodyPr>
+          <a:lstStyle/>
+          <a:p>
+            <a:pPr>
+              <a:defRPr sz="700">
+                <a:solidFill>
+                  <a:srgbClr val="AABED2"/>
+                </a:solidFill>
+                <a:latin typeface="Arial"/>
+              </a:defRPr>
+            </a:pPr>
+            <a:r>
+              <a:t>🔒  goldfields-bay.vercel.app/admin/pages/page_home</a:t>
+            </a:r>
+          </a:p>
+        </p:txBody>
+      </p:sp>
       <p:pic>
         <p:nvPicPr>
-          <p:cNvPr id="8" name="Picture 7" descr="media_1790567902942.png"/>
+          <p:cNvPr id="13" name="Picture 12" descr="media_1790567902942.png"/>
           <p:cNvPicPr>
             <a:picLocks noChangeAspect="1"/>
           </p:cNvPicPr>
@@ -14183,8 +16897,8 @@
         </p:blipFill>
         <p:spPr>
           <a:xfrm>
-            <a:off x="868680" y="1645920"/>
-            <a:ext cx="5394960" cy="3082082"/>
+            <a:off x="896112" y="1755648"/>
+            <a:ext cx="4928616" cy="2815664"/>
           </a:xfrm>
           <a:prstGeom prst="rect">
             <a:avLst/>
@@ -14193,14 +16907,14 @@
       </p:pic>
       <p:sp>
         <p:nvSpPr>
-          <p:cNvPr id="9" name="TextBox 8"/>
+          <p:cNvPr id="14" name="TextBox 13"/>
           <p:cNvSpPr txBox="1"/>
           <p:nvPr/>
         </p:nvSpPr>
         <p:spPr>
           <a:xfrm>
-            <a:off x="868680" y="5349240"/>
-            <a:ext cx="5394960" cy="731520"/>
+            <a:off x="896112" y="4736592"/>
+            <a:ext cx="4928616" cy="1115568"/>
           </a:xfrm>
           <a:prstGeom prst="rect">
             <a:avLst/>
@@ -14214,7 +16928,7 @@
           <a:lstStyle/>
           <a:p>
             <a:pPr>
-              <a:defRPr sz="850" b="1">
+              <a:defRPr sz="800" b="1">
                 <a:solidFill>
                   <a:srgbClr val="00E5C0"/>
                 </a:solidFill>
@@ -14227,9 +16941,12 @@
           </a:p>
           <a:p>
             <a:pPr>
-              <a:defRPr sz="800">
-                <a:solidFill>
-                  <a:srgbClr val="A5B9CD"/>
+              <a:spcBef>
+                <a:spcPts val="200"/>
+              </a:spcBef>
+              <a:defRPr sz="750">
+                <a:solidFill>
+                  <a:srgbClr val="AABED2"/>
                 </a:solidFill>
                 <a:latin typeface="Arial"/>
               </a:defRPr>
@@ -14242,17 +16959,19 @@
       </p:sp>
       <p:sp>
         <p:nvSpPr>
-          <p:cNvPr id="10" name="Rounded Rectangle 9"/>
+          <p:cNvPr id="15" name="Rounded Rectangle 14"/>
           <p:cNvSpPr/>
           <p:nvPr/>
         </p:nvSpPr>
         <p:spPr>
           <a:xfrm>
-            <a:off x="6656832" y="1508760"/>
-            <a:ext cx="4800600" cy="4709160"/>
+            <a:off x="6199632" y="1371600"/>
+            <a:ext cx="5257800" cy="4572000"/>
           </a:xfrm>
           <a:prstGeom prst="roundRect">
-            <a:avLst/>
+            <a:avLst>
+              <a:gd name="adj" fmla="val 3000"/>
+            </a:avLst>
           </a:prstGeom>
           <a:solidFill>
             <a:srgbClr val="0B3052"/>
@@ -14287,14 +17006,14 @@
       </p:sp>
       <p:sp>
         <p:nvSpPr>
-          <p:cNvPr id="11" name="TextBox 10"/>
+          <p:cNvPr id="16" name="TextBox 15"/>
           <p:cNvSpPr txBox="1"/>
           <p:nvPr/>
         </p:nvSpPr>
         <p:spPr>
           <a:xfrm>
-            <a:off x="6903720" y="1691640"/>
-            <a:ext cx="4297680" cy="4343400"/>
+            <a:off x="6446520" y="1554480"/>
+            <a:ext cx="4754880" cy="4160520"/>
           </a:xfrm>
           <a:prstGeom prst="rect">
             <a:avLst/>
@@ -14324,7 +17043,7 @@
               <a:spcBef>
                 <a:spcPts val="800"/>
               </a:spcBef>
-              <a:defRPr sz="1100" b="1">
+              <a:defRPr sz="1000" b="1">
                 <a:solidFill>
                   <a:srgbClr val="FFFFFF"/>
                 </a:solidFill>
@@ -14338,11 +17057,11 @@
           <a:p>
             <a:pPr>
               <a:spcBef>
-                <a:spcPts val="200"/>
+                <a:spcPts val="100"/>
               </a:spcBef>
-              <a:defRPr sz="900">
-                <a:solidFill>
-                  <a:srgbClr val="A5B9CD"/>
+              <a:defRPr sz="800">
+                <a:solidFill>
+                  <a:srgbClr val="AABED2"/>
                 </a:solidFill>
                 <a:latin typeface="Arial"/>
               </a:defRPr>
@@ -14356,7 +17075,7 @@
               <a:spcBef>
                 <a:spcPts val="800"/>
               </a:spcBef>
-              <a:defRPr sz="1100" b="1">
+              <a:defRPr sz="1000" b="1">
                 <a:solidFill>
                   <a:srgbClr val="FFFFFF"/>
                 </a:solidFill>
@@ -14370,11 +17089,11 @@
           <a:p>
             <a:pPr>
               <a:spcBef>
-                <a:spcPts val="200"/>
+                <a:spcPts val="100"/>
               </a:spcBef>
-              <a:defRPr sz="900">
-                <a:solidFill>
-                  <a:srgbClr val="A5B9CD"/>
+              <a:defRPr sz="800">
+                <a:solidFill>
+                  <a:srgbClr val="AABED2"/>
                 </a:solidFill>
                 <a:latin typeface="Arial"/>
               </a:defRPr>
@@ -14388,7 +17107,7 @@
               <a:spcBef>
                 <a:spcPts val="800"/>
               </a:spcBef>
-              <a:defRPr sz="1100" b="1">
+              <a:defRPr sz="1000" b="1">
                 <a:solidFill>
                   <a:srgbClr val="FFFFFF"/>
                 </a:solidFill>
@@ -14402,11 +17121,11 @@
           <a:p>
             <a:pPr>
               <a:spcBef>
-                <a:spcPts val="200"/>
+                <a:spcPts val="100"/>
               </a:spcBef>
-              <a:defRPr sz="900">
-                <a:solidFill>
-                  <a:srgbClr val="A5B9CD"/>
+              <a:defRPr sz="800">
+                <a:solidFill>
+                  <a:srgbClr val="AABED2"/>
                 </a:solidFill>
                 <a:latin typeface="Arial"/>
               </a:defRPr>
@@ -14420,7 +17139,7 @@
               <a:spcBef>
                 <a:spcPts val="800"/>
               </a:spcBef>
-              <a:defRPr sz="1100" b="1">
+              <a:defRPr sz="1000" b="1">
                 <a:solidFill>
                   <a:srgbClr val="FFFFFF"/>
                 </a:solidFill>
@@ -14434,11 +17153,11 @@
           <a:p>
             <a:pPr>
               <a:spcBef>
-                <a:spcPts val="200"/>
+                <a:spcPts val="100"/>
               </a:spcBef>
-              <a:defRPr sz="900">
-                <a:solidFill>
-                  <a:srgbClr val="A5B9CD"/>
+              <a:defRPr sz="800">
+                <a:solidFill>
+                  <a:srgbClr val="AABED2"/>
                 </a:solidFill>
                 <a:latin typeface="Arial"/>
               </a:defRPr>
@@ -14451,13 +17170,13 @@
       </p:sp>
       <p:sp>
         <p:nvSpPr>
-          <p:cNvPr id="12" name="Rectangle 11"/>
+          <p:cNvPr id="17" name="Rectangle 16"/>
           <p:cNvSpPr/>
           <p:nvPr/>
         </p:nvSpPr>
         <p:spPr>
           <a:xfrm>
-            <a:off x="731520" y="6400800"/>
+            <a:off x="731520" y="6144768"/>
             <a:ext cx="10728655" cy="13716"/>
           </a:xfrm>
           <a:prstGeom prst="rect">
@@ -14494,13 +17213,13 @@
       </p:sp>
       <p:sp>
         <p:nvSpPr>
-          <p:cNvPr id="13" name="TextBox 12"/>
+          <p:cNvPr id="18" name="TextBox 17"/>
           <p:cNvSpPr txBox="1"/>
           <p:nvPr/>
         </p:nvSpPr>
         <p:spPr>
           <a:xfrm>
-            <a:off x="731520" y="6446520"/>
+            <a:off x="731520" y="6236208"/>
             <a:ext cx="8229600" cy="320040"/>
           </a:xfrm>
           <a:prstGeom prst="rect">
@@ -14515,9 +17234,9 @@
           <a:lstStyle/>
           <a:p>
             <a:pPr>
-              <a:defRPr sz="900">
-                <a:solidFill>
-                  <a:srgbClr val="A5B9CD"/>
+              <a:defRPr sz="850">
+                <a:solidFill>
+                  <a:srgbClr val="AABED2"/>
                 </a:solidFill>
                 <a:latin typeface="Arial"/>
               </a:defRPr>
@@ -14530,13 +17249,13 @@
       </p:sp>
       <p:sp>
         <p:nvSpPr>
-          <p:cNvPr id="14" name="TextBox 13"/>
+          <p:cNvPr id="19" name="TextBox 18"/>
           <p:cNvSpPr txBox="1"/>
           <p:nvPr/>
         </p:nvSpPr>
         <p:spPr>
           <a:xfrm>
-            <a:off x="9601200" y="6446520"/>
+            <a:off x="9601200" y="6236208"/>
             <a:ext cx="1858975" cy="320040"/>
           </a:xfrm>
           <a:prstGeom prst="rect">
@@ -14551,7 +17270,7 @@
           <a:lstStyle/>
           <a:p>
             <a:pPr algn="r">
-              <a:defRPr sz="900" b="1">
+              <a:defRPr sz="850" b="1">
                 <a:solidFill>
                   <a:srgbClr val="C8A064"/>
                 </a:solidFill>
